--- a/docs/content/05-teaching-resources/slides/digital-infrastructure/03-servers-virtualisation-and-operating-systems.pptx
+++ b/docs/content/05-teaching-resources/slides/digital-infrastructure/03-servers-virtualisation-and-operating-systems.pptx
@@ -10,11 +10,15 @@
     <p:sldId id="258" r:id="rId9"/>
     <p:sldId id="259" r:id="rId10"/>
     <p:sldId id="260" r:id="rId11"/>
-    <p:sldId id="261" r:id="rId12"/>
-    <p:sldId id="262" r:id="rId13"/>
+    <p:sldId id="261" r:id="rId13"/>
+    <p:sldId id="262" r:id="rId14"/>
     <p:sldId id="263" r:id="rId15"/>
     <p:sldId id="264" r:id="rId16"/>
     <p:sldId id="265" r:id="rId17"/>
+    <p:sldId id="266" r:id="rId18"/>
+    <p:sldId id="267" r:id="rId19"/>
+    <p:sldId id="268" r:id="rId20"/>
+    <p:sldId id="269" r:id="rId21"/>
   </p:sldIdLst>
   <p:sldSz cx="12191695" cy="6858000" type="screen4x3"/>
   <p:notesSz cx="6858000" cy="9144000"/>
@@ -511,7 +515,22 @@
           <a:lstStyle/>
           <a:p>
             <a:r>
-              <a:t>Give students a few minutes to answer on mini whiteboards or paper, then reveal the answers on the next slide.</a:t>
+              <a:t>Answers:</a:t>
+            </a:r>
+          </a:p>
+          <a:p>
+            <a:r>
+              <a:t>1. E.g. expensive, hard to scale, need space.</a:t>
+            </a:r>
+          </a:p>
+          <a:p>
+            <a:r>
+              <a:t>2. A lightweight package holding an application and only what it needs.</a:t>
+            </a:r>
+          </a:p>
+          <a:p>
+            <a:r>
+              <a:t>3. Easy scaling and built-in redundancy.</a:t>
             </a:r>
           </a:p>
         </p:txBody>
@@ -581,7 +600,22 @@
           <a:lstStyle/>
           <a:p>
             <a:r>
-              <a:t>Talk through any answers the class found difficult.</a:t>
+              <a:t>Answers:</a:t>
+            </a:r>
+          </a:p>
+          <a:p>
+            <a:r>
+              <a:t>1. A whole VM stored as files that can be moved or copied.</a:t>
+            </a:r>
+          </a:p>
+          <a:p>
+            <a:r>
+              <a:t>2. A problem in one VM affecting others.</a:t>
+            </a:r>
+          </a:p>
+          <a:p>
+            <a:r>
+              <a:t>3. Any two: network, server, desktop, OS, data.</a:t>
             </a:r>
           </a:p>
         </p:txBody>
@@ -607,6 +641,146 @@
 </file>
 
 <file path=ppt/notesSlides/notesSlide3.xml><?xml version="1.0" encoding="utf-8"?>
+<p:notes xmlns:a="http://schemas.openxmlformats.org/drawingml/2006/main" xmlns:p="http://schemas.openxmlformats.org/presentationml/2006/main" xmlns:r="http://schemas.openxmlformats.org/officeDocument/2006/relationships">
+  <p:cSld>
+    <p:spTree>
+      <p:nvGrpSpPr>
+        <p:cNvPr id="1" name=""/>
+        <p:cNvGrpSpPr/>
+        <p:nvPr/>
+      </p:nvGrpSpPr>
+      <p:grpSpPr>
+        <a:xfrm>
+          <a:off x="0" y="0"/>
+          <a:ext cx="0" cy="0"/>
+          <a:chOff x="0" y="0"/>
+          <a:chExt cx="0" cy="0"/>
+        </a:xfrm>
+      </p:grpSpPr>
+      <p:sp>
+        <p:nvSpPr>
+          <p:cNvPr id="2" name="Slide Image Placeholder 1"/>
+          <p:cNvSpPr>
+            <a:spLocks noGrp="1"/>
+          </p:cNvSpPr>
+          <p:nvPr>
+            <p:ph type="sldImg" idx="2"/>
+          </p:nvPr>
+        </p:nvSpPr>
+        <p:spPr/>
+      </p:sp>
+      <p:sp>
+        <p:nvSpPr>
+          <p:cNvPr id="3" name="Notes Placeholder 2"/>
+          <p:cNvSpPr>
+            <a:spLocks noGrp="1"/>
+          </p:cNvSpPr>
+          <p:nvPr>
+            <p:ph type="body" idx="3" sz="quarter"/>
+          </p:nvPr>
+        </p:nvSpPr>
+        <p:spPr/>
+        <p:txBody>
+          <a:bodyPr/>
+          <a:lstStyle/>
+          <a:p>
+            <a:r>
+              <a:t>Give students a few minutes to answer on mini whiteboards or paper, then reveal the answers on the next slide.</a:t>
+            </a:r>
+          </a:p>
+        </p:txBody>
+      </p:sp>
+      <p:sp>
+        <p:nvSpPr>
+          <p:cNvPr id="4" name="Slide Number Placeholder 3"/>
+          <p:cNvSpPr>
+            <a:spLocks noGrp="1"/>
+          </p:cNvSpPr>
+          <p:nvPr>
+            <p:ph type="sldNum" idx="5" sz="quarter"/>
+          </p:nvPr>
+        </p:nvSpPr>
+        <p:spPr/>
+      </p:sp>
+    </p:spTree>
+  </p:cSld>
+  <p:clrMapOvr>
+    <a:masterClrMapping/>
+  </p:clrMapOvr>
+</p:notes>
+</file>
+
+<file path=ppt/notesSlides/notesSlide4.xml><?xml version="1.0" encoding="utf-8"?>
+<p:notes xmlns:a="http://schemas.openxmlformats.org/drawingml/2006/main" xmlns:p="http://schemas.openxmlformats.org/presentationml/2006/main" xmlns:r="http://schemas.openxmlformats.org/officeDocument/2006/relationships">
+  <p:cSld>
+    <p:spTree>
+      <p:nvGrpSpPr>
+        <p:cNvPr id="1" name=""/>
+        <p:cNvGrpSpPr/>
+        <p:nvPr/>
+      </p:nvGrpSpPr>
+      <p:grpSpPr>
+        <a:xfrm>
+          <a:off x="0" y="0"/>
+          <a:ext cx="0" cy="0"/>
+          <a:chOff x="0" y="0"/>
+          <a:chExt cx="0" cy="0"/>
+        </a:xfrm>
+      </p:grpSpPr>
+      <p:sp>
+        <p:nvSpPr>
+          <p:cNvPr id="2" name="Slide Image Placeholder 1"/>
+          <p:cNvSpPr>
+            <a:spLocks noGrp="1"/>
+          </p:cNvSpPr>
+          <p:nvPr>
+            <p:ph type="sldImg" idx="2"/>
+          </p:nvPr>
+        </p:nvSpPr>
+        <p:spPr/>
+      </p:sp>
+      <p:sp>
+        <p:nvSpPr>
+          <p:cNvPr id="3" name="Notes Placeholder 2"/>
+          <p:cNvSpPr>
+            <a:spLocks noGrp="1"/>
+          </p:cNvSpPr>
+          <p:nvPr>
+            <p:ph type="body" idx="3" sz="quarter"/>
+          </p:nvPr>
+        </p:nvSpPr>
+        <p:spPr/>
+        <p:txBody>
+          <a:bodyPr/>
+          <a:lstStyle/>
+          <a:p>
+            <a:r>
+              <a:t>Talk through any answers the class found difficult.</a:t>
+            </a:r>
+          </a:p>
+        </p:txBody>
+      </p:sp>
+      <p:sp>
+        <p:nvSpPr>
+          <p:cNvPr id="4" name="Slide Number Placeholder 3"/>
+          <p:cNvSpPr>
+            <a:spLocks noGrp="1"/>
+          </p:cNvSpPr>
+          <p:nvPr>
+            <p:ph type="sldNum" idx="5" sz="quarter"/>
+          </p:nvPr>
+        </p:nvSpPr>
+        <p:spPr/>
+      </p:sp>
+    </p:spTree>
+  </p:cSld>
+  <p:clrMapOvr>
+    <a:masterClrMapping/>
+  </p:clrMapOvr>
+</p:notes>
+</file>
+
+<file path=ppt/notesSlides/notesSlide5.xml><?xml version="1.0" encoding="utf-8"?>
 <p:notes xmlns:a="http://schemas.openxmlformats.org/drawingml/2006/main" xmlns:p="http://schemas.openxmlformats.org/presentationml/2006/main" xmlns:r="http://schemas.openxmlformats.org/officeDocument/2006/relationships">
   <p:cSld>
     <p:spTree>
@@ -3982,6 +4156,2802 @@
     <p:bg>
       <p:bgPr>
         <a:solidFill>
+          <a:srgbClr val="FFFFFF"/>
+        </a:solidFill>
+        <a:effectLst/>
+      </p:bgPr>
+    </p:bg>
+    <p:spTree>
+      <p:nvGrpSpPr>
+        <p:cNvPr id="1" name=""/>
+        <p:cNvGrpSpPr/>
+        <p:nvPr/>
+      </p:nvGrpSpPr>
+      <p:grpSpPr/>
+      <p:sp>
+        <p:nvSpPr>
+          <p:cNvPr id="2" name="TextBox 1"/>
+          <p:cNvSpPr txBox="1"/>
+          <p:nvPr/>
+        </p:nvSpPr>
+        <p:spPr>
+          <a:xfrm>
+            <a:off x="548640" y="320040"/>
+            <a:ext cx="11094415" cy="274320"/>
+          </a:xfrm>
+          <a:prstGeom prst="rect">
+            <a:avLst/>
+          </a:prstGeom>
+          <a:noFill/>
+        </p:spPr>
+        <p:txBody>
+          <a:bodyPr wrap="square" anchor="t" lIns="0" rIns="0" tIns="0" bIns="0"/>
+          <a:lstStyle/>
+          <a:p>
+            <a:pPr algn="l"/>
+            <a:r>
+              <a:rPr sz="1100" b="1" i="0">
+                <a:solidFill>
+                  <a:srgbClr val="54595D"/>
+                </a:solidFill>
+                <a:latin typeface="Calibri"/>
+              </a:rPr>
+              <a:t>DIGITAL INFRASTRUCTURE  ·  Digital Infrastructure Content Area 2</a:t>
+            </a:r>
+          </a:p>
+        </p:txBody>
+      </p:sp>
+      <p:sp>
+        <p:nvSpPr>
+          <p:cNvPr id="3" name="TextBox 2"/>
+          <p:cNvSpPr txBox="1"/>
+          <p:nvPr/>
+        </p:nvSpPr>
+        <p:spPr>
+          <a:xfrm>
+            <a:off x="548640" y="566928"/>
+            <a:ext cx="11094415" cy="822960"/>
+          </a:xfrm>
+          <a:prstGeom prst="rect">
+            <a:avLst/>
+          </a:prstGeom>
+          <a:noFill/>
+        </p:spPr>
+        <p:txBody>
+          <a:bodyPr wrap="square" anchor="ctr" lIns="0" rIns="0" tIns="0" bIns="0"/>
+          <a:lstStyle/>
+          <a:p>
+            <a:pPr algn="l"/>
+            <a:r>
+              <a:rPr sz="3200" b="1" i="0">
+                <a:solidFill>
+                  <a:srgbClr val="03306E"/>
+                </a:solidFill>
+                <a:latin typeface="Cambria"/>
+              </a:rPr>
+              <a:t>Applications of virtualisation</a:t>
+            </a:r>
+          </a:p>
+        </p:txBody>
+      </p:sp>
+      <p:sp>
+        <p:nvSpPr>
+          <p:cNvPr id="4" name="TextBox 3"/>
+          <p:cNvSpPr txBox="1"/>
+          <p:nvPr/>
+        </p:nvSpPr>
+        <p:spPr>
+          <a:xfrm>
+            <a:off x="548640" y="6446520"/>
+            <a:ext cx="8229600" cy="274320"/>
+          </a:xfrm>
+          <a:prstGeom prst="rect">
+            <a:avLst/>
+          </a:prstGeom>
+          <a:noFill/>
+        </p:spPr>
+        <p:txBody>
+          <a:bodyPr wrap="square" anchor="t" lIns="0" rIns="0" tIns="0" bIns="0"/>
+          <a:lstStyle/>
+          <a:p>
+            <a:pPr algn="l"/>
+            <a:r>
+              <a:rPr sz="1000" b="0" i="0">
+                <a:solidFill>
+                  <a:srgbClr val="54595D"/>
+                </a:solidFill>
+                <a:latin typeface="Calibri"/>
+              </a:rPr>
+              <a:t>Digital Support and Security T Level  ·  Servers, Virtualisation and Operating Systems</a:t>
+            </a:r>
+          </a:p>
+        </p:txBody>
+      </p:sp>
+      <p:sp>
+        <p:nvSpPr>
+          <p:cNvPr id="5" name="TextBox 4"/>
+          <p:cNvSpPr txBox="1"/>
+          <p:nvPr/>
+        </p:nvSpPr>
+        <p:spPr>
+          <a:xfrm>
+            <a:off x="10728655" y="6446520"/>
+            <a:ext cx="914400" cy="274320"/>
+          </a:xfrm>
+          <a:prstGeom prst="rect">
+            <a:avLst/>
+          </a:prstGeom>
+          <a:noFill/>
+        </p:spPr>
+        <p:txBody>
+          <a:bodyPr wrap="square" anchor="t" lIns="0" rIns="0" tIns="0" bIns="0"/>
+          <a:lstStyle/>
+          <a:p>
+            <a:pPr algn="r"/>
+            <a:r>
+              <a:rPr sz="1000" b="0" i="0">
+                <a:solidFill>
+                  <a:srgbClr val="54595D"/>
+                </a:solidFill>
+                <a:latin typeface="Calibri"/>
+              </a:rPr>
+              <a:t>10</a:t>
+            </a:r>
+          </a:p>
+        </p:txBody>
+      </p:sp>
+      <p:sp>
+        <p:nvSpPr>
+          <p:cNvPr id="6" name="Rounded Rectangle 5"/>
+          <p:cNvSpPr/>
+          <p:nvPr/>
+        </p:nvSpPr>
+        <p:spPr>
+          <a:xfrm>
+            <a:off x="548640" y="1600200"/>
+            <a:ext cx="3515258" cy="2148840"/>
+          </a:xfrm>
+          <a:prstGeom prst="roundRect">
+            <a:avLst>
+              <a:gd name="adj" fmla="val 6000"/>
+            </a:avLst>
+          </a:prstGeom>
+          <a:solidFill>
+            <a:srgbClr val="EAF3FF"/>
+          </a:solidFill>
+          <a:ln>
+            <a:noFill/>
+          </a:ln>
+          <a:effectLst/>
+        </p:spPr>
+        <p:style>
+          <a:lnRef idx="1">
+            <a:schemeClr val="accent1"/>
+          </a:lnRef>
+          <a:fillRef idx="3">
+            <a:schemeClr val="accent1"/>
+          </a:fillRef>
+          <a:effectRef idx="2">
+            <a:schemeClr val="accent1"/>
+          </a:effectRef>
+          <a:fontRef idx="minor">
+            <a:schemeClr val="lt1"/>
+          </a:fontRef>
+        </p:style>
+        <p:txBody>
+          <a:bodyPr rtlCol="0" anchor="ctr"/>
+          <a:lstStyle/>
+          <a:p/>
+        </p:txBody>
+      </p:sp>
+      <p:sp>
+        <p:nvSpPr>
+          <p:cNvPr id="7" name="Oval 6"/>
+          <p:cNvSpPr/>
+          <p:nvPr/>
+        </p:nvSpPr>
+        <p:spPr>
+          <a:xfrm>
+            <a:off x="777240" y="1828800"/>
+            <a:ext cx="457200" cy="457200"/>
+          </a:xfrm>
+          <a:prstGeom prst="ellipse">
+            <a:avLst/>
+          </a:prstGeom>
+          <a:solidFill>
+            <a:srgbClr val="33C17A"/>
+          </a:solidFill>
+          <a:ln>
+            <a:noFill/>
+          </a:ln>
+          <a:effectLst/>
+        </p:spPr>
+        <p:style>
+          <a:lnRef idx="1">
+            <a:schemeClr val="accent1"/>
+          </a:lnRef>
+          <a:fillRef idx="3">
+            <a:schemeClr val="accent1"/>
+          </a:fillRef>
+          <a:effectRef idx="2">
+            <a:schemeClr val="accent1"/>
+          </a:effectRef>
+          <a:fontRef idx="minor">
+            <a:schemeClr val="lt1"/>
+          </a:fontRef>
+        </p:style>
+        <p:txBody>
+          <a:bodyPr rtlCol="0" anchor="ctr" lIns="0" rIns="0" tIns="0" bIns="0"/>
+          <a:lstStyle/>
+          <a:p>
+            <a:pPr algn="ctr"/>
+            <a:r>
+              <a:rPr sz="1500" b="1">
+                <a:solidFill>
+                  <a:srgbClr val="202122"/>
+                </a:solidFill>
+                <a:latin typeface="Calibri"/>
+              </a:rPr>
+              <a:t>1</a:t>
+            </a:r>
+          </a:p>
+        </p:txBody>
+      </p:sp>
+      <p:sp>
+        <p:nvSpPr>
+          <p:cNvPr id="8" name="TextBox 7"/>
+          <p:cNvSpPr txBox="1"/>
+          <p:nvPr/>
+        </p:nvSpPr>
+        <p:spPr>
+          <a:xfrm>
+            <a:off x="1371600" y="1801368"/>
+            <a:ext cx="2509418" cy="512064"/>
+          </a:xfrm>
+          <a:prstGeom prst="rect">
+            <a:avLst/>
+          </a:prstGeom>
+          <a:noFill/>
+        </p:spPr>
+        <p:txBody>
+          <a:bodyPr wrap="square" anchor="ctr" lIns="0" rIns="0" tIns="0" bIns="0"/>
+          <a:lstStyle/>
+          <a:p>
+            <a:pPr algn="l"/>
+            <a:r>
+              <a:rPr sz="1900" b="1" i="0">
+                <a:solidFill>
+                  <a:srgbClr val="03306E"/>
+                </a:solidFill>
+                <a:latin typeface="Calibri"/>
+              </a:rPr>
+              <a:t>Network</a:t>
+            </a:r>
+          </a:p>
+        </p:txBody>
+      </p:sp>
+      <p:sp>
+        <p:nvSpPr>
+          <p:cNvPr id="9" name="TextBox 8"/>
+          <p:cNvSpPr txBox="1"/>
+          <p:nvPr/>
+        </p:nvSpPr>
+        <p:spPr>
+          <a:xfrm>
+            <a:off x="777240" y="2468880"/>
+            <a:ext cx="3058058" cy="1143000"/>
+          </a:xfrm>
+          <a:prstGeom prst="rect">
+            <a:avLst/>
+          </a:prstGeom>
+          <a:noFill/>
+        </p:spPr>
+        <p:txBody>
+          <a:bodyPr wrap="square" anchor="t" lIns="0" rIns="0" tIns="0" bIns="0"/>
+          <a:lstStyle/>
+          <a:p>
+            <a:pPr algn="l"/>
+            <a:r>
+              <a:rPr sz="2000" b="0" i="0">
+                <a:solidFill>
+                  <a:srgbClr val="202122"/>
+                </a:solidFill>
+                <a:latin typeface="Calibri"/>
+              </a:rPr>
+              <a:t>Virtual switches, routers and networks.</a:t>
+            </a:r>
+          </a:p>
+        </p:txBody>
+      </p:sp>
+      <p:sp>
+        <p:nvSpPr>
+          <p:cNvPr id="10" name="Rounded Rectangle 9"/>
+          <p:cNvSpPr/>
+          <p:nvPr/>
+        </p:nvSpPr>
+        <p:spPr>
+          <a:xfrm>
+            <a:off x="4338218" y="1600200"/>
+            <a:ext cx="3515258" cy="2148840"/>
+          </a:xfrm>
+          <a:prstGeom prst="roundRect">
+            <a:avLst>
+              <a:gd name="adj" fmla="val 6000"/>
+            </a:avLst>
+          </a:prstGeom>
+          <a:solidFill>
+            <a:srgbClr val="EAF3FF"/>
+          </a:solidFill>
+          <a:ln>
+            <a:noFill/>
+          </a:ln>
+          <a:effectLst/>
+        </p:spPr>
+        <p:style>
+          <a:lnRef idx="1">
+            <a:schemeClr val="accent1"/>
+          </a:lnRef>
+          <a:fillRef idx="3">
+            <a:schemeClr val="accent1"/>
+          </a:fillRef>
+          <a:effectRef idx="2">
+            <a:schemeClr val="accent1"/>
+          </a:effectRef>
+          <a:fontRef idx="minor">
+            <a:schemeClr val="lt1"/>
+          </a:fontRef>
+        </p:style>
+        <p:txBody>
+          <a:bodyPr rtlCol="0" anchor="ctr"/>
+          <a:lstStyle/>
+          <a:p/>
+        </p:txBody>
+      </p:sp>
+      <p:sp>
+        <p:nvSpPr>
+          <p:cNvPr id="11" name="Oval 10"/>
+          <p:cNvSpPr/>
+          <p:nvPr/>
+        </p:nvSpPr>
+        <p:spPr>
+          <a:xfrm>
+            <a:off x="4566818" y="1828800"/>
+            <a:ext cx="457200" cy="457200"/>
+          </a:xfrm>
+          <a:prstGeom prst="ellipse">
+            <a:avLst/>
+          </a:prstGeom>
+          <a:solidFill>
+            <a:srgbClr val="33C17A"/>
+          </a:solidFill>
+          <a:ln>
+            <a:noFill/>
+          </a:ln>
+          <a:effectLst/>
+        </p:spPr>
+        <p:style>
+          <a:lnRef idx="1">
+            <a:schemeClr val="accent1"/>
+          </a:lnRef>
+          <a:fillRef idx="3">
+            <a:schemeClr val="accent1"/>
+          </a:fillRef>
+          <a:effectRef idx="2">
+            <a:schemeClr val="accent1"/>
+          </a:effectRef>
+          <a:fontRef idx="minor">
+            <a:schemeClr val="lt1"/>
+          </a:fontRef>
+        </p:style>
+        <p:txBody>
+          <a:bodyPr rtlCol="0" anchor="ctr" lIns="0" rIns="0" tIns="0" bIns="0"/>
+          <a:lstStyle/>
+          <a:p>
+            <a:pPr algn="ctr"/>
+            <a:r>
+              <a:rPr sz="1500" b="1">
+                <a:solidFill>
+                  <a:srgbClr val="202122"/>
+                </a:solidFill>
+                <a:latin typeface="Calibri"/>
+              </a:rPr>
+              <a:t>2</a:t>
+            </a:r>
+          </a:p>
+        </p:txBody>
+      </p:sp>
+      <p:sp>
+        <p:nvSpPr>
+          <p:cNvPr id="12" name="TextBox 11"/>
+          <p:cNvSpPr txBox="1"/>
+          <p:nvPr/>
+        </p:nvSpPr>
+        <p:spPr>
+          <a:xfrm>
+            <a:off x="5161178" y="1801368"/>
+            <a:ext cx="2509418" cy="512064"/>
+          </a:xfrm>
+          <a:prstGeom prst="rect">
+            <a:avLst/>
+          </a:prstGeom>
+          <a:noFill/>
+        </p:spPr>
+        <p:txBody>
+          <a:bodyPr wrap="square" anchor="ctr" lIns="0" rIns="0" tIns="0" bIns="0"/>
+          <a:lstStyle/>
+          <a:p>
+            <a:pPr algn="l"/>
+            <a:r>
+              <a:rPr sz="1900" b="1" i="0">
+                <a:solidFill>
+                  <a:srgbClr val="03306E"/>
+                </a:solidFill>
+                <a:latin typeface="Calibri"/>
+              </a:rPr>
+              <a:t>Server</a:t>
+            </a:r>
+          </a:p>
+        </p:txBody>
+      </p:sp>
+      <p:sp>
+        <p:nvSpPr>
+          <p:cNvPr id="13" name="TextBox 12"/>
+          <p:cNvSpPr txBox="1"/>
+          <p:nvPr/>
+        </p:nvSpPr>
+        <p:spPr>
+          <a:xfrm>
+            <a:off x="4566818" y="2468880"/>
+            <a:ext cx="3058058" cy="1143000"/>
+          </a:xfrm>
+          <a:prstGeom prst="rect">
+            <a:avLst/>
+          </a:prstGeom>
+          <a:noFill/>
+        </p:spPr>
+        <p:txBody>
+          <a:bodyPr wrap="square" anchor="t" lIns="0" rIns="0" tIns="0" bIns="0"/>
+          <a:lstStyle/>
+          <a:p>
+            <a:pPr algn="l"/>
+            <a:r>
+              <a:rPr sz="2000" b="0" i="0">
+                <a:solidFill>
+                  <a:srgbClr val="202122"/>
+                </a:solidFill>
+                <a:latin typeface="Calibri"/>
+              </a:rPr>
+              <a:t>Many servers on one host.</a:t>
+            </a:r>
+          </a:p>
+        </p:txBody>
+      </p:sp>
+      <p:sp>
+        <p:nvSpPr>
+          <p:cNvPr id="14" name="Rounded Rectangle 13"/>
+          <p:cNvSpPr/>
+          <p:nvPr/>
+        </p:nvSpPr>
+        <p:spPr>
+          <a:xfrm>
+            <a:off x="8127796" y="1600200"/>
+            <a:ext cx="3515258" cy="2148840"/>
+          </a:xfrm>
+          <a:prstGeom prst="roundRect">
+            <a:avLst>
+              <a:gd name="adj" fmla="val 6000"/>
+            </a:avLst>
+          </a:prstGeom>
+          <a:solidFill>
+            <a:srgbClr val="EAF3FF"/>
+          </a:solidFill>
+          <a:ln>
+            <a:noFill/>
+          </a:ln>
+          <a:effectLst/>
+        </p:spPr>
+        <p:style>
+          <a:lnRef idx="1">
+            <a:schemeClr val="accent1"/>
+          </a:lnRef>
+          <a:fillRef idx="3">
+            <a:schemeClr val="accent1"/>
+          </a:fillRef>
+          <a:effectRef idx="2">
+            <a:schemeClr val="accent1"/>
+          </a:effectRef>
+          <a:fontRef idx="minor">
+            <a:schemeClr val="lt1"/>
+          </a:fontRef>
+        </p:style>
+        <p:txBody>
+          <a:bodyPr rtlCol="0" anchor="ctr"/>
+          <a:lstStyle/>
+          <a:p/>
+        </p:txBody>
+      </p:sp>
+      <p:sp>
+        <p:nvSpPr>
+          <p:cNvPr id="15" name="Oval 14"/>
+          <p:cNvSpPr/>
+          <p:nvPr/>
+        </p:nvSpPr>
+        <p:spPr>
+          <a:xfrm>
+            <a:off x="8356396" y="1828800"/>
+            <a:ext cx="457200" cy="457200"/>
+          </a:xfrm>
+          <a:prstGeom prst="ellipse">
+            <a:avLst/>
+          </a:prstGeom>
+          <a:solidFill>
+            <a:srgbClr val="33C17A"/>
+          </a:solidFill>
+          <a:ln>
+            <a:noFill/>
+          </a:ln>
+          <a:effectLst/>
+        </p:spPr>
+        <p:style>
+          <a:lnRef idx="1">
+            <a:schemeClr val="accent1"/>
+          </a:lnRef>
+          <a:fillRef idx="3">
+            <a:schemeClr val="accent1"/>
+          </a:fillRef>
+          <a:effectRef idx="2">
+            <a:schemeClr val="accent1"/>
+          </a:effectRef>
+          <a:fontRef idx="minor">
+            <a:schemeClr val="lt1"/>
+          </a:fontRef>
+        </p:style>
+        <p:txBody>
+          <a:bodyPr rtlCol="0" anchor="ctr" lIns="0" rIns="0" tIns="0" bIns="0"/>
+          <a:lstStyle/>
+          <a:p>
+            <a:pPr algn="ctr"/>
+            <a:r>
+              <a:rPr sz="1500" b="1">
+                <a:solidFill>
+                  <a:srgbClr val="202122"/>
+                </a:solidFill>
+                <a:latin typeface="Calibri"/>
+              </a:rPr>
+              <a:t>3</a:t>
+            </a:r>
+          </a:p>
+        </p:txBody>
+      </p:sp>
+      <p:sp>
+        <p:nvSpPr>
+          <p:cNvPr id="16" name="TextBox 15"/>
+          <p:cNvSpPr txBox="1"/>
+          <p:nvPr/>
+        </p:nvSpPr>
+        <p:spPr>
+          <a:xfrm>
+            <a:off x="8950756" y="1801368"/>
+            <a:ext cx="2509418" cy="512064"/>
+          </a:xfrm>
+          <a:prstGeom prst="rect">
+            <a:avLst/>
+          </a:prstGeom>
+          <a:noFill/>
+        </p:spPr>
+        <p:txBody>
+          <a:bodyPr wrap="square" anchor="ctr" lIns="0" rIns="0" tIns="0" bIns="0"/>
+          <a:lstStyle/>
+          <a:p>
+            <a:pPr algn="l"/>
+            <a:r>
+              <a:rPr sz="1900" b="1" i="0">
+                <a:solidFill>
+                  <a:srgbClr val="03306E"/>
+                </a:solidFill>
+                <a:latin typeface="Calibri"/>
+              </a:rPr>
+              <a:t>Desktop</a:t>
+            </a:r>
+          </a:p>
+        </p:txBody>
+      </p:sp>
+      <p:sp>
+        <p:nvSpPr>
+          <p:cNvPr id="17" name="TextBox 16"/>
+          <p:cNvSpPr txBox="1"/>
+          <p:nvPr/>
+        </p:nvSpPr>
+        <p:spPr>
+          <a:xfrm>
+            <a:off x="8356396" y="2468880"/>
+            <a:ext cx="3058058" cy="1143000"/>
+          </a:xfrm>
+          <a:prstGeom prst="rect">
+            <a:avLst/>
+          </a:prstGeom>
+          <a:noFill/>
+        </p:spPr>
+        <p:txBody>
+          <a:bodyPr wrap="square" anchor="t" lIns="0" rIns="0" tIns="0" bIns="0"/>
+          <a:lstStyle/>
+          <a:p>
+            <a:pPr algn="l"/>
+            <a:r>
+              <a:rPr sz="2000" b="0" i="0">
+                <a:solidFill>
+                  <a:srgbClr val="202122"/>
+                </a:solidFill>
+                <a:latin typeface="Calibri"/>
+              </a:rPr>
+              <a:t>Users' desktops hosted centrally.</a:t>
+            </a:r>
+          </a:p>
+        </p:txBody>
+      </p:sp>
+      <p:sp>
+        <p:nvSpPr>
+          <p:cNvPr id="18" name="Rounded Rectangle 17"/>
+          <p:cNvSpPr/>
+          <p:nvPr/>
+        </p:nvSpPr>
+        <p:spPr>
+          <a:xfrm>
+            <a:off x="548640" y="4023360"/>
+            <a:ext cx="3515258" cy="2148840"/>
+          </a:xfrm>
+          <a:prstGeom prst="roundRect">
+            <a:avLst>
+              <a:gd name="adj" fmla="val 6000"/>
+            </a:avLst>
+          </a:prstGeom>
+          <a:solidFill>
+            <a:srgbClr val="EAF3FF"/>
+          </a:solidFill>
+          <a:ln>
+            <a:noFill/>
+          </a:ln>
+          <a:effectLst/>
+        </p:spPr>
+        <p:style>
+          <a:lnRef idx="1">
+            <a:schemeClr val="accent1"/>
+          </a:lnRef>
+          <a:fillRef idx="3">
+            <a:schemeClr val="accent1"/>
+          </a:fillRef>
+          <a:effectRef idx="2">
+            <a:schemeClr val="accent1"/>
+          </a:effectRef>
+          <a:fontRef idx="minor">
+            <a:schemeClr val="lt1"/>
+          </a:fontRef>
+        </p:style>
+        <p:txBody>
+          <a:bodyPr rtlCol="0" anchor="ctr"/>
+          <a:lstStyle/>
+          <a:p/>
+        </p:txBody>
+      </p:sp>
+      <p:sp>
+        <p:nvSpPr>
+          <p:cNvPr id="19" name="Oval 18"/>
+          <p:cNvSpPr/>
+          <p:nvPr/>
+        </p:nvSpPr>
+        <p:spPr>
+          <a:xfrm>
+            <a:off x="777240" y="4251960"/>
+            <a:ext cx="457200" cy="457200"/>
+          </a:xfrm>
+          <a:prstGeom prst="ellipse">
+            <a:avLst/>
+          </a:prstGeom>
+          <a:solidFill>
+            <a:srgbClr val="33C17A"/>
+          </a:solidFill>
+          <a:ln>
+            <a:noFill/>
+          </a:ln>
+          <a:effectLst/>
+        </p:spPr>
+        <p:style>
+          <a:lnRef idx="1">
+            <a:schemeClr val="accent1"/>
+          </a:lnRef>
+          <a:fillRef idx="3">
+            <a:schemeClr val="accent1"/>
+          </a:fillRef>
+          <a:effectRef idx="2">
+            <a:schemeClr val="accent1"/>
+          </a:effectRef>
+          <a:fontRef idx="minor">
+            <a:schemeClr val="lt1"/>
+          </a:fontRef>
+        </p:style>
+        <p:txBody>
+          <a:bodyPr rtlCol="0" anchor="ctr" lIns="0" rIns="0" tIns="0" bIns="0"/>
+          <a:lstStyle/>
+          <a:p>
+            <a:pPr algn="ctr"/>
+            <a:r>
+              <a:rPr sz="1500" b="1">
+                <a:solidFill>
+                  <a:srgbClr val="202122"/>
+                </a:solidFill>
+                <a:latin typeface="Calibri"/>
+              </a:rPr>
+              <a:t>4</a:t>
+            </a:r>
+          </a:p>
+        </p:txBody>
+      </p:sp>
+      <p:sp>
+        <p:nvSpPr>
+          <p:cNvPr id="20" name="TextBox 19"/>
+          <p:cNvSpPr txBox="1"/>
+          <p:nvPr/>
+        </p:nvSpPr>
+        <p:spPr>
+          <a:xfrm>
+            <a:off x="1371600" y="4224528"/>
+            <a:ext cx="2509418" cy="512064"/>
+          </a:xfrm>
+          <a:prstGeom prst="rect">
+            <a:avLst/>
+          </a:prstGeom>
+          <a:noFill/>
+        </p:spPr>
+        <p:txBody>
+          <a:bodyPr wrap="square" anchor="ctr" lIns="0" rIns="0" tIns="0" bIns="0"/>
+          <a:lstStyle/>
+          <a:p>
+            <a:pPr algn="l"/>
+            <a:r>
+              <a:rPr sz="1900" b="1" i="0">
+                <a:solidFill>
+                  <a:srgbClr val="03306E"/>
+                </a:solidFill>
+                <a:latin typeface="Calibri"/>
+              </a:rPr>
+              <a:t>Operating system</a:t>
+            </a:r>
+          </a:p>
+        </p:txBody>
+      </p:sp>
+      <p:sp>
+        <p:nvSpPr>
+          <p:cNvPr id="21" name="TextBox 20"/>
+          <p:cNvSpPr txBox="1"/>
+          <p:nvPr/>
+        </p:nvSpPr>
+        <p:spPr>
+          <a:xfrm>
+            <a:off x="777240" y="4892040"/>
+            <a:ext cx="3058058" cy="1143000"/>
+          </a:xfrm>
+          <a:prstGeom prst="rect">
+            <a:avLst/>
+          </a:prstGeom>
+          <a:noFill/>
+        </p:spPr>
+        <p:txBody>
+          <a:bodyPr wrap="square" anchor="t" lIns="0" rIns="0" tIns="0" bIns="0"/>
+          <a:lstStyle/>
+          <a:p>
+            <a:pPr algn="l"/>
+            <a:r>
+              <a:rPr sz="2000" b="0" i="0">
+                <a:solidFill>
+                  <a:srgbClr val="202122"/>
+                </a:solidFill>
+                <a:latin typeface="Calibri"/>
+              </a:rPr>
+              <a:t>Several OSs on one machine.</a:t>
+            </a:r>
+          </a:p>
+        </p:txBody>
+      </p:sp>
+      <p:sp>
+        <p:nvSpPr>
+          <p:cNvPr id="22" name="Rounded Rectangle 21"/>
+          <p:cNvSpPr/>
+          <p:nvPr/>
+        </p:nvSpPr>
+        <p:spPr>
+          <a:xfrm>
+            <a:off x="4338218" y="4023360"/>
+            <a:ext cx="3515258" cy="2148840"/>
+          </a:xfrm>
+          <a:prstGeom prst="roundRect">
+            <a:avLst>
+              <a:gd name="adj" fmla="val 6000"/>
+            </a:avLst>
+          </a:prstGeom>
+          <a:solidFill>
+            <a:srgbClr val="EAF3FF"/>
+          </a:solidFill>
+          <a:ln>
+            <a:noFill/>
+          </a:ln>
+          <a:effectLst/>
+        </p:spPr>
+        <p:style>
+          <a:lnRef idx="1">
+            <a:schemeClr val="accent1"/>
+          </a:lnRef>
+          <a:fillRef idx="3">
+            <a:schemeClr val="accent1"/>
+          </a:fillRef>
+          <a:effectRef idx="2">
+            <a:schemeClr val="accent1"/>
+          </a:effectRef>
+          <a:fontRef idx="minor">
+            <a:schemeClr val="lt1"/>
+          </a:fontRef>
+        </p:style>
+        <p:txBody>
+          <a:bodyPr rtlCol="0" anchor="ctr"/>
+          <a:lstStyle/>
+          <a:p/>
+        </p:txBody>
+      </p:sp>
+      <p:sp>
+        <p:nvSpPr>
+          <p:cNvPr id="23" name="Oval 22"/>
+          <p:cNvSpPr/>
+          <p:nvPr/>
+        </p:nvSpPr>
+        <p:spPr>
+          <a:xfrm>
+            <a:off x="4566818" y="4251960"/>
+            <a:ext cx="457200" cy="457200"/>
+          </a:xfrm>
+          <a:prstGeom prst="ellipse">
+            <a:avLst/>
+          </a:prstGeom>
+          <a:solidFill>
+            <a:srgbClr val="33C17A"/>
+          </a:solidFill>
+          <a:ln>
+            <a:noFill/>
+          </a:ln>
+          <a:effectLst/>
+        </p:spPr>
+        <p:style>
+          <a:lnRef idx="1">
+            <a:schemeClr val="accent1"/>
+          </a:lnRef>
+          <a:fillRef idx="3">
+            <a:schemeClr val="accent1"/>
+          </a:fillRef>
+          <a:effectRef idx="2">
+            <a:schemeClr val="accent1"/>
+          </a:effectRef>
+          <a:fontRef idx="minor">
+            <a:schemeClr val="lt1"/>
+          </a:fontRef>
+        </p:style>
+        <p:txBody>
+          <a:bodyPr rtlCol="0" anchor="ctr" lIns="0" rIns="0" tIns="0" bIns="0"/>
+          <a:lstStyle/>
+          <a:p>
+            <a:pPr algn="ctr"/>
+            <a:r>
+              <a:rPr sz="1500" b="1">
+                <a:solidFill>
+                  <a:srgbClr val="202122"/>
+                </a:solidFill>
+                <a:latin typeface="Calibri"/>
+              </a:rPr>
+              <a:t>5</a:t>
+            </a:r>
+          </a:p>
+        </p:txBody>
+      </p:sp>
+      <p:sp>
+        <p:nvSpPr>
+          <p:cNvPr id="24" name="TextBox 23"/>
+          <p:cNvSpPr txBox="1"/>
+          <p:nvPr/>
+        </p:nvSpPr>
+        <p:spPr>
+          <a:xfrm>
+            <a:off x="5161178" y="4224528"/>
+            <a:ext cx="2509418" cy="512064"/>
+          </a:xfrm>
+          <a:prstGeom prst="rect">
+            <a:avLst/>
+          </a:prstGeom>
+          <a:noFill/>
+        </p:spPr>
+        <p:txBody>
+          <a:bodyPr wrap="square" anchor="ctr" lIns="0" rIns="0" tIns="0" bIns="0"/>
+          <a:lstStyle/>
+          <a:p>
+            <a:pPr algn="l"/>
+            <a:r>
+              <a:rPr sz="1900" b="1" i="0">
+                <a:solidFill>
+                  <a:srgbClr val="03306E"/>
+                </a:solidFill>
+                <a:latin typeface="Calibri"/>
+              </a:rPr>
+              <a:t>Data</a:t>
+            </a:r>
+          </a:p>
+        </p:txBody>
+      </p:sp>
+      <p:sp>
+        <p:nvSpPr>
+          <p:cNvPr id="25" name="TextBox 24"/>
+          <p:cNvSpPr txBox="1"/>
+          <p:nvPr/>
+        </p:nvSpPr>
+        <p:spPr>
+          <a:xfrm>
+            <a:off x="4566818" y="4892040"/>
+            <a:ext cx="3058058" cy="1143000"/>
+          </a:xfrm>
+          <a:prstGeom prst="rect">
+            <a:avLst/>
+          </a:prstGeom>
+          <a:noFill/>
+        </p:spPr>
+        <p:txBody>
+          <a:bodyPr wrap="square" anchor="t" lIns="0" rIns="0" tIns="0" bIns="0"/>
+          <a:lstStyle/>
+          <a:p>
+            <a:pPr algn="l"/>
+            <a:r>
+              <a:rPr sz="2000" b="0" i="0">
+                <a:solidFill>
+                  <a:srgbClr val="202122"/>
+                </a:solidFill>
+                <a:latin typeface="Calibri"/>
+              </a:rPr>
+              <a:t>One view of data held in many places.</a:t>
+            </a:r>
+          </a:p>
+        </p:txBody>
+      </p:sp>
+    </p:spTree>
+  </p:cSld>
+  <p:clrMapOvr>
+    <a:masterClrMapping/>
+  </p:clrMapOvr>
+</p:sld>
+</file>
+
+<file path=ppt/slides/slide11.xml><?xml version="1.0" encoding="utf-8"?>
+<p:sld xmlns:a="http://schemas.openxmlformats.org/drawingml/2006/main" xmlns:p="http://schemas.openxmlformats.org/presentationml/2006/main" xmlns:r="http://schemas.openxmlformats.org/officeDocument/2006/relationships">
+  <p:cSld>
+    <p:bg>
+      <p:bgPr>
+        <a:solidFill>
+          <a:srgbClr val="FFFFFF"/>
+        </a:solidFill>
+        <a:effectLst/>
+      </p:bgPr>
+    </p:bg>
+    <p:spTree>
+      <p:nvGrpSpPr>
+        <p:cNvPr id="1" name=""/>
+        <p:cNvGrpSpPr/>
+        <p:nvPr/>
+      </p:nvGrpSpPr>
+      <p:grpSpPr/>
+      <p:sp>
+        <p:nvSpPr>
+          <p:cNvPr id="2" name="TextBox 1"/>
+          <p:cNvSpPr txBox="1"/>
+          <p:nvPr/>
+        </p:nvSpPr>
+        <p:spPr>
+          <a:xfrm>
+            <a:off x="548640" y="320040"/>
+            <a:ext cx="11094415" cy="274320"/>
+          </a:xfrm>
+          <a:prstGeom prst="rect">
+            <a:avLst/>
+          </a:prstGeom>
+          <a:noFill/>
+        </p:spPr>
+        <p:txBody>
+          <a:bodyPr wrap="square" anchor="t" lIns="0" rIns="0" tIns="0" bIns="0"/>
+          <a:lstStyle/>
+          <a:p>
+            <a:pPr algn="l"/>
+            <a:r>
+              <a:rPr sz="1100" b="1" i="0">
+                <a:solidFill>
+                  <a:srgbClr val="54595D"/>
+                </a:solidFill>
+                <a:latin typeface="Calibri"/>
+              </a:rPr>
+              <a:t>DIGITAL INFRASTRUCTURE  ·  Digital Infrastructure Content Area 2</a:t>
+            </a:r>
+          </a:p>
+        </p:txBody>
+      </p:sp>
+      <p:sp>
+        <p:nvSpPr>
+          <p:cNvPr id="3" name="TextBox 2"/>
+          <p:cNvSpPr txBox="1"/>
+          <p:nvPr/>
+        </p:nvSpPr>
+        <p:spPr>
+          <a:xfrm>
+            <a:off x="548640" y="566928"/>
+            <a:ext cx="11094415" cy="822960"/>
+          </a:xfrm>
+          <a:prstGeom prst="rect">
+            <a:avLst/>
+          </a:prstGeom>
+          <a:noFill/>
+        </p:spPr>
+        <p:txBody>
+          <a:bodyPr wrap="square" anchor="ctr" lIns="0" rIns="0" tIns="0" bIns="0"/>
+          <a:lstStyle/>
+          <a:p>
+            <a:pPr algn="l"/>
+            <a:r>
+              <a:rPr sz="3200" b="1" i="0">
+                <a:solidFill>
+                  <a:srgbClr val="03306E"/>
+                </a:solidFill>
+                <a:latin typeface="Cambria"/>
+              </a:rPr>
+              <a:t>Check your understanding</a:t>
+            </a:r>
+          </a:p>
+        </p:txBody>
+      </p:sp>
+      <p:sp>
+        <p:nvSpPr>
+          <p:cNvPr id="4" name="TextBox 3"/>
+          <p:cNvSpPr txBox="1"/>
+          <p:nvPr/>
+        </p:nvSpPr>
+        <p:spPr>
+          <a:xfrm>
+            <a:off x="548640" y="6446520"/>
+            <a:ext cx="8229600" cy="274320"/>
+          </a:xfrm>
+          <a:prstGeom prst="rect">
+            <a:avLst/>
+          </a:prstGeom>
+          <a:noFill/>
+        </p:spPr>
+        <p:txBody>
+          <a:bodyPr wrap="square" anchor="t" lIns="0" rIns="0" tIns="0" bIns="0"/>
+          <a:lstStyle/>
+          <a:p>
+            <a:pPr algn="l"/>
+            <a:r>
+              <a:rPr sz="1000" b="0" i="0">
+                <a:solidFill>
+                  <a:srgbClr val="54595D"/>
+                </a:solidFill>
+                <a:latin typeface="Calibri"/>
+              </a:rPr>
+              <a:t>Digital Support and Security T Level  ·  Servers, Virtualisation and Operating Systems</a:t>
+            </a:r>
+          </a:p>
+        </p:txBody>
+      </p:sp>
+      <p:sp>
+        <p:nvSpPr>
+          <p:cNvPr id="5" name="TextBox 4"/>
+          <p:cNvSpPr txBox="1"/>
+          <p:nvPr/>
+        </p:nvSpPr>
+        <p:spPr>
+          <a:xfrm>
+            <a:off x="10728655" y="6446520"/>
+            <a:ext cx="914400" cy="274320"/>
+          </a:xfrm>
+          <a:prstGeom prst="rect">
+            <a:avLst/>
+          </a:prstGeom>
+          <a:noFill/>
+        </p:spPr>
+        <p:txBody>
+          <a:bodyPr wrap="square" anchor="t" lIns="0" rIns="0" tIns="0" bIns="0"/>
+          <a:lstStyle/>
+          <a:p>
+            <a:pPr algn="r"/>
+            <a:r>
+              <a:rPr sz="1000" b="0" i="0">
+                <a:solidFill>
+                  <a:srgbClr val="54595D"/>
+                </a:solidFill>
+                <a:latin typeface="Calibri"/>
+              </a:rPr>
+              <a:t>11</a:t>
+            </a:r>
+          </a:p>
+        </p:txBody>
+      </p:sp>
+      <p:sp>
+        <p:nvSpPr>
+          <p:cNvPr id="6" name="Oval 5"/>
+          <p:cNvSpPr/>
+          <p:nvPr/>
+        </p:nvSpPr>
+        <p:spPr>
+          <a:xfrm>
+            <a:off x="548640" y="1618488"/>
+            <a:ext cx="411480" cy="411480"/>
+          </a:xfrm>
+          <a:prstGeom prst="ellipse">
+            <a:avLst/>
+          </a:prstGeom>
+          <a:solidFill>
+            <a:srgbClr val="33C17A"/>
+          </a:solidFill>
+          <a:ln>
+            <a:noFill/>
+          </a:ln>
+          <a:effectLst/>
+        </p:spPr>
+        <p:style>
+          <a:lnRef idx="1">
+            <a:schemeClr val="accent1"/>
+          </a:lnRef>
+          <a:fillRef idx="3">
+            <a:schemeClr val="accent1"/>
+          </a:fillRef>
+          <a:effectRef idx="2">
+            <a:schemeClr val="accent1"/>
+          </a:effectRef>
+          <a:fontRef idx="minor">
+            <a:schemeClr val="lt1"/>
+          </a:fontRef>
+        </p:style>
+        <p:txBody>
+          <a:bodyPr rtlCol="0" anchor="ctr" lIns="0" rIns="0" tIns="0" bIns="0"/>
+          <a:lstStyle/>
+          <a:p>
+            <a:pPr algn="ctr"/>
+            <a:r>
+              <a:rPr sz="1400" b="1">
+                <a:solidFill>
+                  <a:srgbClr val="202122"/>
+                </a:solidFill>
+                <a:latin typeface="Calibri"/>
+              </a:rPr>
+              <a:t>1</a:t>
+            </a:r>
+          </a:p>
+        </p:txBody>
+      </p:sp>
+      <p:sp>
+        <p:nvSpPr>
+          <p:cNvPr id="7" name="TextBox 6"/>
+          <p:cNvSpPr txBox="1"/>
+          <p:nvPr/>
+        </p:nvSpPr>
+        <p:spPr>
+          <a:xfrm>
+            <a:off x="1234440" y="1600200"/>
+            <a:ext cx="10408615" cy="1030986"/>
+          </a:xfrm>
+          <a:prstGeom prst="rect">
+            <a:avLst/>
+          </a:prstGeom>
+          <a:noFill/>
+        </p:spPr>
+        <p:txBody>
+          <a:bodyPr wrap="square" anchor="t" lIns="0" rIns="0" tIns="0" bIns="0"/>
+          <a:lstStyle/>
+          <a:p>
+            <a:pPr algn="l"/>
+            <a:r>
+              <a:rPr sz="2200" b="0" i="0">
+                <a:solidFill>
+                  <a:srgbClr val="202122"/>
+                </a:solidFill>
+                <a:latin typeface="Calibri"/>
+              </a:rPr>
+              <a:t>Give one disadvantage of a physical server.</a:t>
+            </a:r>
+          </a:p>
+        </p:txBody>
+      </p:sp>
+      <p:sp>
+        <p:nvSpPr>
+          <p:cNvPr id="8" name="Oval 7"/>
+          <p:cNvSpPr/>
+          <p:nvPr/>
+        </p:nvSpPr>
+        <p:spPr>
+          <a:xfrm>
+            <a:off x="548640" y="2814066"/>
+            <a:ext cx="411480" cy="411480"/>
+          </a:xfrm>
+          <a:prstGeom prst="ellipse">
+            <a:avLst/>
+          </a:prstGeom>
+          <a:solidFill>
+            <a:srgbClr val="33C17A"/>
+          </a:solidFill>
+          <a:ln>
+            <a:noFill/>
+          </a:ln>
+          <a:effectLst/>
+        </p:spPr>
+        <p:style>
+          <a:lnRef idx="1">
+            <a:schemeClr val="accent1"/>
+          </a:lnRef>
+          <a:fillRef idx="3">
+            <a:schemeClr val="accent1"/>
+          </a:fillRef>
+          <a:effectRef idx="2">
+            <a:schemeClr val="accent1"/>
+          </a:effectRef>
+          <a:fontRef idx="minor">
+            <a:schemeClr val="lt1"/>
+          </a:fontRef>
+        </p:style>
+        <p:txBody>
+          <a:bodyPr rtlCol="0" anchor="ctr" lIns="0" rIns="0" tIns="0" bIns="0"/>
+          <a:lstStyle/>
+          <a:p>
+            <a:pPr algn="ctr"/>
+            <a:r>
+              <a:rPr sz="1400" b="1">
+                <a:solidFill>
+                  <a:srgbClr val="202122"/>
+                </a:solidFill>
+                <a:latin typeface="Calibri"/>
+              </a:rPr>
+              <a:t>2</a:t>
+            </a:r>
+          </a:p>
+        </p:txBody>
+      </p:sp>
+      <p:sp>
+        <p:nvSpPr>
+          <p:cNvPr id="9" name="TextBox 8"/>
+          <p:cNvSpPr txBox="1"/>
+          <p:nvPr/>
+        </p:nvSpPr>
+        <p:spPr>
+          <a:xfrm>
+            <a:off x="1234440" y="2795778"/>
+            <a:ext cx="10408615" cy="1030986"/>
+          </a:xfrm>
+          <a:prstGeom prst="rect">
+            <a:avLst/>
+          </a:prstGeom>
+          <a:noFill/>
+        </p:spPr>
+        <p:txBody>
+          <a:bodyPr wrap="square" anchor="t" lIns="0" rIns="0" tIns="0" bIns="0"/>
+          <a:lstStyle/>
+          <a:p>
+            <a:pPr algn="l"/>
+            <a:r>
+              <a:rPr sz="2200" b="0" i="0">
+                <a:solidFill>
+                  <a:srgbClr val="202122"/>
+                </a:solidFill>
+                <a:latin typeface="Calibri"/>
+              </a:rPr>
+              <a:t>Why are containers lightweight?</a:t>
+            </a:r>
+          </a:p>
+        </p:txBody>
+      </p:sp>
+      <p:sp>
+        <p:nvSpPr>
+          <p:cNvPr id="10" name="Oval 9"/>
+          <p:cNvSpPr/>
+          <p:nvPr/>
+        </p:nvSpPr>
+        <p:spPr>
+          <a:xfrm>
+            <a:off x="548640" y="4009644"/>
+            <a:ext cx="411480" cy="411480"/>
+          </a:xfrm>
+          <a:prstGeom prst="ellipse">
+            <a:avLst/>
+          </a:prstGeom>
+          <a:solidFill>
+            <a:srgbClr val="33C17A"/>
+          </a:solidFill>
+          <a:ln>
+            <a:noFill/>
+          </a:ln>
+          <a:effectLst/>
+        </p:spPr>
+        <p:style>
+          <a:lnRef idx="1">
+            <a:schemeClr val="accent1"/>
+          </a:lnRef>
+          <a:fillRef idx="3">
+            <a:schemeClr val="accent1"/>
+          </a:fillRef>
+          <a:effectRef idx="2">
+            <a:schemeClr val="accent1"/>
+          </a:effectRef>
+          <a:fontRef idx="minor">
+            <a:schemeClr val="lt1"/>
+          </a:fontRef>
+        </p:style>
+        <p:txBody>
+          <a:bodyPr rtlCol="0" anchor="ctr" lIns="0" rIns="0" tIns="0" bIns="0"/>
+          <a:lstStyle/>
+          <a:p>
+            <a:pPr algn="ctr"/>
+            <a:r>
+              <a:rPr sz="1400" b="1">
+                <a:solidFill>
+                  <a:srgbClr val="202122"/>
+                </a:solidFill>
+                <a:latin typeface="Calibri"/>
+              </a:rPr>
+              <a:t>3</a:t>
+            </a:r>
+          </a:p>
+        </p:txBody>
+      </p:sp>
+      <p:sp>
+        <p:nvSpPr>
+          <p:cNvPr id="11" name="TextBox 10"/>
+          <p:cNvSpPr txBox="1"/>
+          <p:nvPr/>
+        </p:nvSpPr>
+        <p:spPr>
+          <a:xfrm>
+            <a:off x="1234440" y="3991356"/>
+            <a:ext cx="10408615" cy="1030986"/>
+          </a:xfrm>
+          <a:prstGeom prst="rect">
+            <a:avLst/>
+          </a:prstGeom>
+          <a:noFill/>
+        </p:spPr>
+        <p:txBody>
+          <a:bodyPr wrap="square" anchor="t" lIns="0" rIns="0" tIns="0" bIns="0"/>
+          <a:lstStyle/>
+          <a:p>
+            <a:pPr algn="l"/>
+            <a:r>
+              <a:rPr sz="2200" b="0" i="0">
+                <a:solidFill>
+                  <a:srgbClr val="202122"/>
+                </a:solidFill>
+                <a:latin typeface="Calibri"/>
+              </a:rPr>
+              <a:t>What does encapsulation mean in virtualisation?</a:t>
+            </a:r>
+          </a:p>
+        </p:txBody>
+      </p:sp>
+      <p:sp>
+        <p:nvSpPr>
+          <p:cNvPr id="12" name="Oval 11"/>
+          <p:cNvSpPr/>
+          <p:nvPr/>
+        </p:nvSpPr>
+        <p:spPr>
+          <a:xfrm>
+            <a:off x="548640" y="5205221"/>
+            <a:ext cx="411480" cy="411480"/>
+          </a:xfrm>
+          <a:prstGeom prst="ellipse">
+            <a:avLst/>
+          </a:prstGeom>
+          <a:solidFill>
+            <a:srgbClr val="33C17A"/>
+          </a:solidFill>
+          <a:ln>
+            <a:noFill/>
+          </a:ln>
+          <a:effectLst/>
+        </p:spPr>
+        <p:style>
+          <a:lnRef idx="1">
+            <a:schemeClr val="accent1"/>
+          </a:lnRef>
+          <a:fillRef idx="3">
+            <a:schemeClr val="accent1"/>
+          </a:fillRef>
+          <a:effectRef idx="2">
+            <a:schemeClr val="accent1"/>
+          </a:effectRef>
+          <a:fontRef idx="minor">
+            <a:schemeClr val="lt1"/>
+          </a:fontRef>
+        </p:style>
+        <p:txBody>
+          <a:bodyPr rtlCol="0" anchor="ctr" lIns="0" rIns="0" tIns="0" bIns="0"/>
+          <a:lstStyle/>
+          <a:p>
+            <a:pPr algn="ctr"/>
+            <a:r>
+              <a:rPr sz="1400" b="1">
+                <a:solidFill>
+                  <a:srgbClr val="202122"/>
+                </a:solidFill>
+                <a:latin typeface="Calibri"/>
+              </a:rPr>
+              <a:t>4</a:t>
+            </a:r>
+          </a:p>
+        </p:txBody>
+      </p:sp>
+      <p:sp>
+        <p:nvSpPr>
+          <p:cNvPr id="13" name="TextBox 12"/>
+          <p:cNvSpPr txBox="1"/>
+          <p:nvPr/>
+        </p:nvSpPr>
+        <p:spPr>
+          <a:xfrm>
+            <a:off x="1234440" y="5186933"/>
+            <a:ext cx="10408615" cy="1030986"/>
+          </a:xfrm>
+          <a:prstGeom prst="rect">
+            <a:avLst/>
+          </a:prstGeom>
+          <a:noFill/>
+        </p:spPr>
+        <p:txBody>
+          <a:bodyPr wrap="square" anchor="t" lIns="0" rIns="0" tIns="0" bIns="0"/>
+          <a:lstStyle/>
+          <a:p>
+            <a:pPr algn="l"/>
+            <a:r>
+              <a:rPr sz="2200" b="0" i="0">
+                <a:solidFill>
+                  <a:srgbClr val="202122"/>
+                </a:solidFill>
+                <a:latin typeface="Calibri"/>
+              </a:rPr>
+              <a:t>Name a server operating system.</a:t>
+            </a:r>
+          </a:p>
+        </p:txBody>
+      </p:sp>
+    </p:spTree>
+  </p:cSld>
+  <p:clrMapOvr>
+    <a:masterClrMapping/>
+  </p:clrMapOvr>
+</p:sld>
+</file>
+
+<file path=ppt/slides/slide12.xml><?xml version="1.0" encoding="utf-8"?>
+<p:sld xmlns:a="http://schemas.openxmlformats.org/drawingml/2006/main" xmlns:p="http://schemas.openxmlformats.org/presentationml/2006/main" xmlns:r="http://schemas.openxmlformats.org/officeDocument/2006/relationships">
+  <p:cSld>
+    <p:bg>
+      <p:bgPr>
+        <a:solidFill>
+          <a:srgbClr val="FFFFFF"/>
+        </a:solidFill>
+        <a:effectLst/>
+      </p:bgPr>
+    </p:bg>
+    <p:spTree>
+      <p:nvGrpSpPr>
+        <p:cNvPr id="1" name=""/>
+        <p:cNvGrpSpPr/>
+        <p:nvPr/>
+      </p:nvGrpSpPr>
+      <p:grpSpPr/>
+      <p:sp>
+        <p:nvSpPr>
+          <p:cNvPr id="2" name="TextBox 1"/>
+          <p:cNvSpPr txBox="1"/>
+          <p:nvPr/>
+        </p:nvSpPr>
+        <p:spPr>
+          <a:xfrm>
+            <a:off x="548640" y="320040"/>
+            <a:ext cx="11094415" cy="274320"/>
+          </a:xfrm>
+          <a:prstGeom prst="rect">
+            <a:avLst/>
+          </a:prstGeom>
+          <a:noFill/>
+        </p:spPr>
+        <p:txBody>
+          <a:bodyPr wrap="square" anchor="t" lIns="0" rIns="0" tIns="0" bIns="0"/>
+          <a:lstStyle/>
+          <a:p>
+            <a:pPr algn="l"/>
+            <a:r>
+              <a:rPr sz="1100" b="1" i="0">
+                <a:solidFill>
+                  <a:srgbClr val="54595D"/>
+                </a:solidFill>
+                <a:latin typeface="Calibri"/>
+              </a:rPr>
+              <a:t>DIGITAL INFRASTRUCTURE  ·  Digital Infrastructure Content Area 2</a:t>
+            </a:r>
+          </a:p>
+        </p:txBody>
+      </p:sp>
+      <p:sp>
+        <p:nvSpPr>
+          <p:cNvPr id="3" name="TextBox 2"/>
+          <p:cNvSpPr txBox="1"/>
+          <p:nvPr/>
+        </p:nvSpPr>
+        <p:spPr>
+          <a:xfrm>
+            <a:off x="548640" y="566928"/>
+            <a:ext cx="11094415" cy="822960"/>
+          </a:xfrm>
+          <a:prstGeom prst="rect">
+            <a:avLst/>
+          </a:prstGeom>
+          <a:noFill/>
+        </p:spPr>
+        <p:txBody>
+          <a:bodyPr wrap="square" anchor="ctr" lIns="0" rIns="0" tIns="0" bIns="0"/>
+          <a:lstStyle/>
+          <a:p>
+            <a:pPr algn="l"/>
+            <a:r>
+              <a:rPr sz="3200" b="1" i="0">
+                <a:solidFill>
+                  <a:srgbClr val="03306E"/>
+                </a:solidFill>
+                <a:latin typeface="Cambria"/>
+              </a:rPr>
+              <a:t>Answers</a:t>
+            </a:r>
+          </a:p>
+        </p:txBody>
+      </p:sp>
+      <p:sp>
+        <p:nvSpPr>
+          <p:cNvPr id="4" name="TextBox 3"/>
+          <p:cNvSpPr txBox="1"/>
+          <p:nvPr/>
+        </p:nvSpPr>
+        <p:spPr>
+          <a:xfrm>
+            <a:off x="548640" y="6446520"/>
+            <a:ext cx="8229600" cy="274320"/>
+          </a:xfrm>
+          <a:prstGeom prst="rect">
+            <a:avLst/>
+          </a:prstGeom>
+          <a:noFill/>
+        </p:spPr>
+        <p:txBody>
+          <a:bodyPr wrap="square" anchor="t" lIns="0" rIns="0" tIns="0" bIns="0"/>
+          <a:lstStyle/>
+          <a:p>
+            <a:pPr algn="l"/>
+            <a:r>
+              <a:rPr sz="1000" b="0" i="0">
+                <a:solidFill>
+                  <a:srgbClr val="54595D"/>
+                </a:solidFill>
+                <a:latin typeface="Calibri"/>
+              </a:rPr>
+              <a:t>Digital Support and Security T Level  ·  Servers, Virtualisation and Operating Systems</a:t>
+            </a:r>
+          </a:p>
+        </p:txBody>
+      </p:sp>
+      <p:sp>
+        <p:nvSpPr>
+          <p:cNvPr id="5" name="TextBox 4"/>
+          <p:cNvSpPr txBox="1"/>
+          <p:nvPr/>
+        </p:nvSpPr>
+        <p:spPr>
+          <a:xfrm>
+            <a:off x="10728655" y="6446520"/>
+            <a:ext cx="914400" cy="274320"/>
+          </a:xfrm>
+          <a:prstGeom prst="rect">
+            <a:avLst/>
+          </a:prstGeom>
+          <a:noFill/>
+        </p:spPr>
+        <p:txBody>
+          <a:bodyPr wrap="square" anchor="t" lIns="0" rIns="0" tIns="0" bIns="0"/>
+          <a:lstStyle/>
+          <a:p>
+            <a:pPr algn="r"/>
+            <a:r>
+              <a:rPr sz="1000" b="0" i="0">
+                <a:solidFill>
+                  <a:srgbClr val="54595D"/>
+                </a:solidFill>
+                <a:latin typeface="Calibri"/>
+              </a:rPr>
+              <a:t>12</a:t>
+            </a:r>
+          </a:p>
+        </p:txBody>
+      </p:sp>
+      <p:sp>
+        <p:nvSpPr>
+          <p:cNvPr id="6" name="Oval 5"/>
+          <p:cNvSpPr/>
+          <p:nvPr/>
+        </p:nvSpPr>
+        <p:spPr>
+          <a:xfrm>
+            <a:off x="548640" y="1618488"/>
+            <a:ext cx="411480" cy="411480"/>
+          </a:xfrm>
+          <a:prstGeom prst="ellipse">
+            <a:avLst/>
+          </a:prstGeom>
+          <a:solidFill>
+            <a:srgbClr val="33C17A"/>
+          </a:solidFill>
+          <a:ln>
+            <a:noFill/>
+          </a:ln>
+          <a:effectLst/>
+        </p:spPr>
+        <p:style>
+          <a:lnRef idx="1">
+            <a:schemeClr val="accent1"/>
+          </a:lnRef>
+          <a:fillRef idx="3">
+            <a:schemeClr val="accent1"/>
+          </a:fillRef>
+          <a:effectRef idx="2">
+            <a:schemeClr val="accent1"/>
+          </a:effectRef>
+          <a:fontRef idx="minor">
+            <a:schemeClr val="lt1"/>
+          </a:fontRef>
+        </p:style>
+        <p:txBody>
+          <a:bodyPr rtlCol="0" anchor="ctr" lIns="0" rIns="0" tIns="0" bIns="0"/>
+          <a:lstStyle/>
+          <a:p>
+            <a:pPr algn="ctr"/>
+            <a:r>
+              <a:rPr sz="1400" b="1">
+                <a:solidFill>
+                  <a:srgbClr val="202122"/>
+                </a:solidFill>
+                <a:latin typeface="Calibri"/>
+              </a:rPr>
+              <a:t>1</a:t>
+            </a:r>
+          </a:p>
+        </p:txBody>
+      </p:sp>
+      <p:sp>
+        <p:nvSpPr>
+          <p:cNvPr id="7" name="TextBox 6"/>
+          <p:cNvSpPr txBox="1"/>
+          <p:nvPr/>
+        </p:nvSpPr>
+        <p:spPr>
+          <a:xfrm>
+            <a:off x="1234440" y="1600200"/>
+            <a:ext cx="10408615" cy="1030986"/>
+          </a:xfrm>
+          <a:prstGeom prst="rect">
+            <a:avLst/>
+          </a:prstGeom>
+          <a:noFill/>
+        </p:spPr>
+        <p:txBody>
+          <a:bodyPr wrap="square" anchor="t" lIns="0" rIns="0" tIns="0" bIns="0"/>
+          <a:lstStyle/>
+          <a:p>
+            <a:pPr algn="l"/>
+            <a:r>
+              <a:rPr sz="1800" b="0" i="0">
+                <a:solidFill>
+                  <a:srgbClr val="54595D"/>
+                </a:solidFill>
+                <a:latin typeface="Calibri"/>
+              </a:rPr>
+              <a:t>Give one disadvantage of a physical server.</a:t>
+            </a:r>
+          </a:p>
+          <a:p>
+            <a:r>
+              <a:rPr sz="1800" b="1">
+                <a:solidFill>
+                  <a:srgbClr val="03306E"/>
+                </a:solidFill>
+                <a:latin typeface="Calibri"/>
+              </a:rPr>
+              <a:t>E.g. expensive, hard to scale, needs physical space.</a:t>
+            </a:r>
+          </a:p>
+        </p:txBody>
+      </p:sp>
+      <p:sp>
+        <p:nvSpPr>
+          <p:cNvPr id="8" name="Oval 7"/>
+          <p:cNvSpPr/>
+          <p:nvPr/>
+        </p:nvSpPr>
+        <p:spPr>
+          <a:xfrm>
+            <a:off x="548640" y="2814066"/>
+            <a:ext cx="411480" cy="411480"/>
+          </a:xfrm>
+          <a:prstGeom prst="ellipse">
+            <a:avLst/>
+          </a:prstGeom>
+          <a:solidFill>
+            <a:srgbClr val="33C17A"/>
+          </a:solidFill>
+          <a:ln>
+            <a:noFill/>
+          </a:ln>
+          <a:effectLst/>
+        </p:spPr>
+        <p:style>
+          <a:lnRef idx="1">
+            <a:schemeClr val="accent1"/>
+          </a:lnRef>
+          <a:fillRef idx="3">
+            <a:schemeClr val="accent1"/>
+          </a:fillRef>
+          <a:effectRef idx="2">
+            <a:schemeClr val="accent1"/>
+          </a:effectRef>
+          <a:fontRef idx="minor">
+            <a:schemeClr val="lt1"/>
+          </a:fontRef>
+        </p:style>
+        <p:txBody>
+          <a:bodyPr rtlCol="0" anchor="ctr" lIns="0" rIns="0" tIns="0" bIns="0"/>
+          <a:lstStyle/>
+          <a:p>
+            <a:pPr algn="ctr"/>
+            <a:r>
+              <a:rPr sz="1400" b="1">
+                <a:solidFill>
+                  <a:srgbClr val="202122"/>
+                </a:solidFill>
+                <a:latin typeface="Calibri"/>
+              </a:rPr>
+              <a:t>2</a:t>
+            </a:r>
+          </a:p>
+        </p:txBody>
+      </p:sp>
+      <p:sp>
+        <p:nvSpPr>
+          <p:cNvPr id="9" name="TextBox 8"/>
+          <p:cNvSpPr txBox="1"/>
+          <p:nvPr/>
+        </p:nvSpPr>
+        <p:spPr>
+          <a:xfrm>
+            <a:off x="1234440" y="2795778"/>
+            <a:ext cx="10408615" cy="1030986"/>
+          </a:xfrm>
+          <a:prstGeom prst="rect">
+            <a:avLst/>
+          </a:prstGeom>
+          <a:noFill/>
+        </p:spPr>
+        <p:txBody>
+          <a:bodyPr wrap="square" anchor="t" lIns="0" rIns="0" tIns="0" bIns="0"/>
+          <a:lstStyle/>
+          <a:p>
+            <a:pPr algn="l"/>
+            <a:r>
+              <a:rPr sz="1800" b="0" i="0">
+                <a:solidFill>
+                  <a:srgbClr val="54595D"/>
+                </a:solidFill>
+                <a:latin typeface="Calibri"/>
+              </a:rPr>
+              <a:t>Why are containers lightweight?</a:t>
+            </a:r>
+          </a:p>
+          <a:p>
+            <a:r>
+              <a:rPr sz="1800" b="1">
+                <a:solidFill>
+                  <a:srgbClr val="03306E"/>
+                </a:solidFill>
+                <a:latin typeface="Calibri"/>
+              </a:rPr>
+              <a:t>They carry only what the application needs and share the host OS kernel.</a:t>
+            </a:r>
+          </a:p>
+        </p:txBody>
+      </p:sp>
+      <p:sp>
+        <p:nvSpPr>
+          <p:cNvPr id="10" name="Oval 9"/>
+          <p:cNvSpPr/>
+          <p:nvPr/>
+        </p:nvSpPr>
+        <p:spPr>
+          <a:xfrm>
+            <a:off x="548640" y="4009644"/>
+            <a:ext cx="411480" cy="411480"/>
+          </a:xfrm>
+          <a:prstGeom prst="ellipse">
+            <a:avLst/>
+          </a:prstGeom>
+          <a:solidFill>
+            <a:srgbClr val="33C17A"/>
+          </a:solidFill>
+          <a:ln>
+            <a:noFill/>
+          </a:ln>
+          <a:effectLst/>
+        </p:spPr>
+        <p:style>
+          <a:lnRef idx="1">
+            <a:schemeClr val="accent1"/>
+          </a:lnRef>
+          <a:fillRef idx="3">
+            <a:schemeClr val="accent1"/>
+          </a:fillRef>
+          <a:effectRef idx="2">
+            <a:schemeClr val="accent1"/>
+          </a:effectRef>
+          <a:fontRef idx="minor">
+            <a:schemeClr val="lt1"/>
+          </a:fontRef>
+        </p:style>
+        <p:txBody>
+          <a:bodyPr rtlCol="0" anchor="ctr" lIns="0" rIns="0" tIns="0" bIns="0"/>
+          <a:lstStyle/>
+          <a:p>
+            <a:pPr algn="ctr"/>
+            <a:r>
+              <a:rPr sz="1400" b="1">
+                <a:solidFill>
+                  <a:srgbClr val="202122"/>
+                </a:solidFill>
+                <a:latin typeface="Calibri"/>
+              </a:rPr>
+              <a:t>3</a:t>
+            </a:r>
+          </a:p>
+        </p:txBody>
+      </p:sp>
+      <p:sp>
+        <p:nvSpPr>
+          <p:cNvPr id="11" name="TextBox 10"/>
+          <p:cNvSpPr txBox="1"/>
+          <p:nvPr/>
+        </p:nvSpPr>
+        <p:spPr>
+          <a:xfrm>
+            <a:off x="1234440" y="3991356"/>
+            <a:ext cx="10408615" cy="1030986"/>
+          </a:xfrm>
+          <a:prstGeom prst="rect">
+            <a:avLst/>
+          </a:prstGeom>
+          <a:noFill/>
+        </p:spPr>
+        <p:txBody>
+          <a:bodyPr wrap="square" anchor="t" lIns="0" rIns="0" tIns="0" bIns="0"/>
+          <a:lstStyle/>
+          <a:p>
+            <a:pPr algn="l"/>
+            <a:r>
+              <a:rPr sz="1800" b="0" i="0">
+                <a:solidFill>
+                  <a:srgbClr val="54595D"/>
+                </a:solidFill>
+                <a:latin typeface="Calibri"/>
+              </a:rPr>
+              <a:t>What does encapsulation mean in virtualisation?</a:t>
+            </a:r>
+          </a:p>
+          <a:p>
+            <a:r>
+              <a:rPr sz="1800" b="1">
+                <a:solidFill>
+                  <a:srgbClr val="03306E"/>
+                </a:solidFill>
+                <a:latin typeface="Calibri"/>
+              </a:rPr>
+              <a:t>The whole VM is stored as files that can be moved or copied.</a:t>
+            </a:r>
+          </a:p>
+        </p:txBody>
+      </p:sp>
+      <p:sp>
+        <p:nvSpPr>
+          <p:cNvPr id="12" name="Oval 11"/>
+          <p:cNvSpPr/>
+          <p:nvPr/>
+        </p:nvSpPr>
+        <p:spPr>
+          <a:xfrm>
+            <a:off x="548640" y="5205221"/>
+            <a:ext cx="411480" cy="411480"/>
+          </a:xfrm>
+          <a:prstGeom prst="ellipse">
+            <a:avLst/>
+          </a:prstGeom>
+          <a:solidFill>
+            <a:srgbClr val="33C17A"/>
+          </a:solidFill>
+          <a:ln>
+            <a:noFill/>
+          </a:ln>
+          <a:effectLst/>
+        </p:spPr>
+        <p:style>
+          <a:lnRef idx="1">
+            <a:schemeClr val="accent1"/>
+          </a:lnRef>
+          <a:fillRef idx="3">
+            <a:schemeClr val="accent1"/>
+          </a:fillRef>
+          <a:effectRef idx="2">
+            <a:schemeClr val="accent1"/>
+          </a:effectRef>
+          <a:fontRef idx="minor">
+            <a:schemeClr val="lt1"/>
+          </a:fontRef>
+        </p:style>
+        <p:txBody>
+          <a:bodyPr rtlCol="0" anchor="ctr" lIns="0" rIns="0" tIns="0" bIns="0"/>
+          <a:lstStyle/>
+          <a:p>
+            <a:pPr algn="ctr"/>
+            <a:r>
+              <a:rPr sz="1400" b="1">
+                <a:solidFill>
+                  <a:srgbClr val="202122"/>
+                </a:solidFill>
+                <a:latin typeface="Calibri"/>
+              </a:rPr>
+              <a:t>4</a:t>
+            </a:r>
+          </a:p>
+        </p:txBody>
+      </p:sp>
+      <p:sp>
+        <p:nvSpPr>
+          <p:cNvPr id="13" name="TextBox 12"/>
+          <p:cNvSpPr txBox="1"/>
+          <p:nvPr/>
+        </p:nvSpPr>
+        <p:spPr>
+          <a:xfrm>
+            <a:off x="1234440" y="5186933"/>
+            <a:ext cx="10408615" cy="1030986"/>
+          </a:xfrm>
+          <a:prstGeom prst="rect">
+            <a:avLst/>
+          </a:prstGeom>
+          <a:noFill/>
+        </p:spPr>
+        <p:txBody>
+          <a:bodyPr wrap="square" anchor="t" lIns="0" rIns="0" tIns="0" bIns="0"/>
+          <a:lstStyle/>
+          <a:p>
+            <a:pPr algn="l"/>
+            <a:r>
+              <a:rPr sz="1800" b="0" i="0">
+                <a:solidFill>
+                  <a:srgbClr val="54595D"/>
+                </a:solidFill>
+                <a:latin typeface="Calibri"/>
+              </a:rPr>
+              <a:t>Name a server operating system.</a:t>
+            </a:r>
+          </a:p>
+          <a:p>
+            <a:r>
+              <a:rPr sz="1800" b="1">
+                <a:solidFill>
+                  <a:srgbClr val="03306E"/>
+                </a:solidFill>
+                <a:latin typeface="Calibri"/>
+              </a:rPr>
+              <a:t>Linux or Windows Server.</a:t>
+            </a:r>
+          </a:p>
+        </p:txBody>
+      </p:sp>
+    </p:spTree>
+  </p:cSld>
+  <p:clrMapOvr>
+    <a:masterClrMapping/>
+  </p:clrMapOvr>
+</p:sld>
+</file>
+
+<file path=ppt/slides/slide13.xml><?xml version="1.0" encoding="utf-8"?>
+<p:sld xmlns:a="http://schemas.openxmlformats.org/drawingml/2006/main" xmlns:p="http://schemas.openxmlformats.org/presentationml/2006/main" xmlns:r="http://schemas.openxmlformats.org/officeDocument/2006/relationships">
+  <p:cSld>
+    <p:bg>
+      <p:bgPr>
+        <a:solidFill>
+          <a:srgbClr val="FFFFFF"/>
+        </a:solidFill>
+        <a:effectLst/>
+      </p:bgPr>
+    </p:bg>
+    <p:spTree>
+      <p:nvGrpSpPr>
+        <p:cNvPr id="1" name=""/>
+        <p:cNvGrpSpPr/>
+        <p:nvPr/>
+      </p:nvGrpSpPr>
+      <p:grpSpPr/>
+      <p:sp>
+        <p:nvSpPr>
+          <p:cNvPr id="2" name="TextBox 1"/>
+          <p:cNvSpPr txBox="1"/>
+          <p:nvPr/>
+        </p:nvSpPr>
+        <p:spPr>
+          <a:xfrm>
+            <a:off x="548640" y="320040"/>
+            <a:ext cx="11094415" cy="274320"/>
+          </a:xfrm>
+          <a:prstGeom prst="rect">
+            <a:avLst/>
+          </a:prstGeom>
+          <a:noFill/>
+        </p:spPr>
+        <p:txBody>
+          <a:bodyPr wrap="square" anchor="t" lIns="0" rIns="0" tIns="0" bIns="0"/>
+          <a:lstStyle/>
+          <a:p>
+            <a:pPr algn="l"/>
+            <a:r>
+              <a:rPr sz="1100" b="1" i="0">
+                <a:solidFill>
+                  <a:srgbClr val="54595D"/>
+                </a:solidFill>
+                <a:latin typeface="Calibri"/>
+              </a:rPr>
+              <a:t>DIGITAL INFRASTRUCTURE  ·  Digital Infrastructure Content Area 2</a:t>
+            </a:r>
+          </a:p>
+        </p:txBody>
+      </p:sp>
+      <p:sp>
+        <p:nvSpPr>
+          <p:cNvPr id="3" name="TextBox 2"/>
+          <p:cNvSpPr txBox="1"/>
+          <p:nvPr/>
+        </p:nvSpPr>
+        <p:spPr>
+          <a:xfrm>
+            <a:off x="548640" y="566928"/>
+            <a:ext cx="11094415" cy="822960"/>
+          </a:xfrm>
+          <a:prstGeom prst="rect">
+            <a:avLst/>
+          </a:prstGeom>
+          <a:noFill/>
+        </p:spPr>
+        <p:txBody>
+          <a:bodyPr wrap="square" anchor="ctr" lIns="0" rIns="0" tIns="0" bIns="0"/>
+          <a:lstStyle/>
+          <a:p>
+            <a:pPr algn="l"/>
+            <a:r>
+              <a:rPr sz="3200" b="1" i="0">
+                <a:solidFill>
+                  <a:srgbClr val="03306E"/>
+                </a:solidFill>
+                <a:latin typeface="Cambria"/>
+              </a:rPr>
+              <a:t>Activity: Build a virtual lab</a:t>
+            </a:r>
+          </a:p>
+        </p:txBody>
+      </p:sp>
+      <p:sp>
+        <p:nvSpPr>
+          <p:cNvPr id="4" name="TextBox 3"/>
+          <p:cNvSpPr txBox="1"/>
+          <p:nvPr/>
+        </p:nvSpPr>
+        <p:spPr>
+          <a:xfrm>
+            <a:off x="548640" y="6446520"/>
+            <a:ext cx="8229600" cy="274320"/>
+          </a:xfrm>
+          <a:prstGeom prst="rect">
+            <a:avLst/>
+          </a:prstGeom>
+          <a:noFill/>
+        </p:spPr>
+        <p:txBody>
+          <a:bodyPr wrap="square" anchor="t" lIns="0" rIns="0" tIns="0" bIns="0"/>
+          <a:lstStyle/>
+          <a:p>
+            <a:pPr algn="l"/>
+            <a:r>
+              <a:rPr sz="1000" b="0" i="0">
+                <a:solidFill>
+                  <a:srgbClr val="54595D"/>
+                </a:solidFill>
+                <a:latin typeface="Calibri"/>
+              </a:rPr>
+              <a:t>Digital Support and Security T Level  ·  Servers, Virtualisation and Operating Systems</a:t>
+            </a:r>
+          </a:p>
+        </p:txBody>
+      </p:sp>
+      <p:sp>
+        <p:nvSpPr>
+          <p:cNvPr id="5" name="TextBox 4"/>
+          <p:cNvSpPr txBox="1"/>
+          <p:nvPr/>
+        </p:nvSpPr>
+        <p:spPr>
+          <a:xfrm>
+            <a:off x="10728655" y="6446520"/>
+            <a:ext cx="914400" cy="274320"/>
+          </a:xfrm>
+          <a:prstGeom prst="rect">
+            <a:avLst/>
+          </a:prstGeom>
+          <a:noFill/>
+        </p:spPr>
+        <p:txBody>
+          <a:bodyPr wrap="square" anchor="t" lIns="0" rIns="0" tIns="0" bIns="0"/>
+          <a:lstStyle/>
+          <a:p>
+            <a:pPr algn="r"/>
+            <a:r>
+              <a:rPr sz="1000" b="0" i="0">
+                <a:solidFill>
+                  <a:srgbClr val="54595D"/>
+                </a:solidFill>
+                <a:latin typeface="Calibri"/>
+              </a:rPr>
+              <a:t>13</a:t>
+            </a:r>
+          </a:p>
+        </p:txBody>
+      </p:sp>
+      <p:sp>
+        <p:nvSpPr>
+          <p:cNvPr id="6" name="Rounded Rectangle 5"/>
+          <p:cNvSpPr/>
+          <p:nvPr/>
+        </p:nvSpPr>
+        <p:spPr>
+          <a:xfrm>
+            <a:off x="548640" y="1508760"/>
+            <a:ext cx="2011680" cy="457200"/>
+          </a:xfrm>
+          <a:prstGeom prst="roundRect">
+            <a:avLst>
+              <a:gd name="adj" fmla="val 50000"/>
+            </a:avLst>
+          </a:prstGeom>
+          <a:solidFill>
+            <a:srgbClr val="33C17A"/>
+          </a:solidFill>
+          <a:ln>
+            <a:noFill/>
+          </a:ln>
+          <a:effectLst/>
+        </p:spPr>
+        <p:style>
+          <a:lnRef idx="1">
+            <a:schemeClr val="accent1"/>
+          </a:lnRef>
+          <a:fillRef idx="3">
+            <a:schemeClr val="accent1"/>
+          </a:fillRef>
+          <a:effectRef idx="2">
+            <a:schemeClr val="accent1"/>
+          </a:effectRef>
+          <a:fontRef idx="minor">
+            <a:schemeClr val="lt1"/>
+          </a:fontRef>
+        </p:style>
+        <p:txBody>
+          <a:bodyPr rtlCol="0" anchor="ctr"/>
+          <a:lstStyle/>
+          <a:p/>
+        </p:txBody>
+      </p:sp>
+      <p:sp>
+        <p:nvSpPr>
+          <p:cNvPr id="7" name="TextBox 6"/>
+          <p:cNvSpPr txBox="1"/>
+          <p:nvPr/>
+        </p:nvSpPr>
+        <p:spPr>
+          <a:xfrm>
+            <a:off x="548640" y="1508760"/>
+            <a:ext cx="2011680" cy="457200"/>
+          </a:xfrm>
+          <a:prstGeom prst="rect">
+            <a:avLst/>
+          </a:prstGeom>
+          <a:noFill/>
+        </p:spPr>
+        <p:txBody>
+          <a:bodyPr wrap="square" anchor="ctr" lIns="0" rIns="0" tIns="0" bIns="0"/>
+          <a:lstStyle/>
+          <a:p>
+            <a:pPr algn="ctr"/>
+            <a:r>
+              <a:rPr sz="1400" b="1" i="0">
+                <a:solidFill>
+                  <a:srgbClr val="202122"/>
+                </a:solidFill>
+                <a:latin typeface="Calibri"/>
+              </a:rPr>
+              <a:t>40 minutes</a:t>
+            </a:r>
+          </a:p>
+        </p:txBody>
+      </p:sp>
+      <p:sp>
+        <p:nvSpPr>
+          <p:cNvPr id="8" name="TextBox 7"/>
+          <p:cNvSpPr txBox="1"/>
+          <p:nvPr/>
+        </p:nvSpPr>
+        <p:spPr>
+          <a:xfrm>
+            <a:off x="2743200" y="1508760"/>
+            <a:ext cx="4754880" cy="457200"/>
+          </a:xfrm>
+          <a:prstGeom prst="rect">
+            <a:avLst/>
+          </a:prstGeom>
+          <a:noFill/>
+        </p:spPr>
+        <p:txBody>
+          <a:bodyPr wrap="square" anchor="ctr" lIns="0" rIns="0" tIns="0" bIns="0"/>
+          <a:lstStyle/>
+          <a:p>
+            <a:pPr algn="l"/>
+            <a:r>
+              <a:rPr sz="1400" b="0" i="1">
+                <a:solidFill>
+                  <a:srgbClr val="54595D"/>
+                </a:solidFill>
+                <a:latin typeface="Calibri"/>
+              </a:rPr>
+              <a:t>Pairs, on a lab PC</a:t>
+            </a:r>
+          </a:p>
+        </p:txBody>
+      </p:sp>
+      <p:sp>
+        <p:nvSpPr>
+          <p:cNvPr id="9" name="Oval 8"/>
+          <p:cNvSpPr/>
+          <p:nvPr/>
+        </p:nvSpPr>
+        <p:spPr>
+          <a:xfrm>
+            <a:off x="548640" y="2482596"/>
+            <a:ext cx="384048" cy="384048"/>
+          </a:xfrm>
+          <a:prstGeom prst="ellipse">
+            <a:avLst/>
+          </a:prstGeom>
+          <a:solidFill>
+            <a:srgbClr val="0645AD"/>
+          </a:solidFill>
+          <a:ln>
+            <a:noFill/>
+          </a:ln>
+          <a:effectLst/>
+        </p:spPr>
+        <p:style>
+          <a:lnRef idx="1">
+            <a:schemeClr val="accent1"/>
+          </a:lnRef>
+          <a:fillRef idx="3">
+            <a:schemeClr val="accent1"/>
+          </a:fillRef>
+          <a:effectRef idx="2">
+            <a:schemeClr val="accent1"/>
+          </a:effectRef>
+          <a:fontRef idx="minor">
+            <a:schemeClr val="lt1"/>
+          </a:fontRef>
+        </p:style>
+        <p:txBody>
+          <a:bodyPr rtlCol="0" anchor="ctr" lIns="0" rIns="0" tIns="0" bIns="0"/>
+          <a:lstStyle/>
+          <a:p>
+            <a:pPr algn="ctr"/>
+            <a:r>
+              <a:rPr sz="1300" b="1">
+                <a:solidFill>
+                  <a:srgbClr val="FFFFFF"/>
+                </a:solidFill>
+                <a:latin typeface="Calibri"/>
+              </a:rPr>
+              <a:t>1</a:t>
+            </a:r>
+          </a:p>
+        </p:txBody>
+      </p:sp>
+      <p:sp>
+        <p:nvSpPr>
+          <p:cNvPr id="10" name="TextBox 9"/>
+          <p:cNvSpPr txBox="1"/>
+          <p:nvPr/>
+        </p:nvSpPr>
+        <p:spPr>
+          <a:xfrm>
+            <a:off x="1143000" y="2240280"/>
+            <a:ext cx="5943600" cy="868680"/>
+          </a:xfrm>
+          <a:prstGeom prst="rect">
+            <a:avLst/>
+          </a:prstGeom>
+          <a:noFill/>
+        </p:spPr>
+        <p:txBody>
+          <a:bodyPr wrap="square" anchor="ctr" lIns="0" rIns="0" tIns="0" bIns="0"/>
+          <a:lstStyle/>
+          <a:p>
+            <a:pPr algn="l"/>
+            <a:r>
+              <a:rPr sz="1700" b="0" i="0">
+                <a:solidFill>
+                  <a:srgbClr val="202122"/>
+                </a:solidFill>
+                <a:latin typeface="Calibri"/>
+              </a:rPr>
+              <a:t>Install a Type 2 hypervisor or use the one provided.</a:t>
+            </a:r>
+          </a:p>
+        </p:txBody>
+      </p:sp>
+      <p:sp>
+        <p:nvSpPr>
+          <p:cNvPr id="11" name="Oval 10"/>
+          <p:cNvSpPr/>
+          <p:nvPr/>
+        </p:nvSpPr>
+        <p:spPr>
+          <a:xfrm>
+            <a:off x="548640" y="3461004"/>
+            <a:ext cx="384048" cy="384048"/>
+          </a:xfrm>
+          <a:prstGeom prst="ellipse">
+            <a:avLst/>
+          </a:prstGeom>
+          <a:solidFill>
+            <a:srgbClr val="0645AD"/>
+          </a:solidFill>
+          <a:ln>
+            <a:noFill/>
+          </a:ln>
+          <a:effectLst/>
+        </p:spPr>
+        <p:style>
+          <a:lnRef idx="1">
+            <a:schemeClr val="accent1"/>
+          </a:lnRef>
+          <a:fillRef idx="3">
+            <a:schemeClr val="accent1"/>
+          </a:fillRef>
+          <a:effectRef idx="2">
+            <a:schemeClr val="accent1"/>
+          </a:effectRef>
+          <a:fontRef idx="minor">
+            <a:schemeClr val="lt1"/>
+          </a:fontRef>
+        </p:style>
+        <p:txBody>
+          <a:bodyPr rtlCol="0" anchor="ctr" lIns="0" rIns="0" tIns="0" bIns="0"/>
+          <a:lstStyle/>
+          <a:p>
+            <a:pPr algn="ctr"/>
+            <a:r>
+              <a:rPr sz="1300" b="1">
+                <a:solidFill>
+                  <a:srgbClr val="FFFFFF"/>
+                </a:solidFill>
+                <a:latin typeface="Calibri"/>
+              </a:rPr>
+              <a:t>2</a:t>
+            </a:r>
+          </a:p>
+        </p:txBody>
+      </p:sp>
+      <p:sp>
+        <p:nvSpPr>
+          <p:cNvPr id="12" name="TextBox 11"/>
+          <p:cNvSpPr txBox="1"/>
+          <p:nvPr/>
+        </p:nvSpPr>
+        <p:spPr>
+          <a:xfrm>
+            <a:off x="1143000" y="3218688"/>
+            <a:ext cx="5943600" cy="868680"/>
+          </a:xfrm>
+          <a:prstGeom prst="rect">
+            <a:avLst/>
+          </a:prstGeom>
+          <a:noFill/>
+        </p:spPr>
+        <p:txBody>
+          <a:bodyPr wrap="square" anchor="ctr" lIns="0" rIns="0" tIns="0" bIns="0"/>
+          <a:lstStyle/>
+          <a:p>
+            <a:pPr algn="l"/>
+            <a:r>
+              <a:rPr sz="1700" b="0" i="0">
+                <a:solidFill>
+                  <a:srgbClr val="202122"/>
+                </a:solidFill>
+                <a:latin typeface="Calibri"/>
+              </a:rPr>
+              <a:t>Create two VMs: a server OS and a client OS.</a:t>
+            </a:r>
+          </a:p>
+        </p:txBody>
+      </p:sp>
+      <p:sp>
+        <p:nvSpPr>
+          <p:cNvPr id="13" name="Oval 12"/>
+          <p:cNvSpPr/>
+          <p:nvPr/>
+        </p:nvSpPr>
+        <p:spPr>
+          <a:xfrm>
+            <a:off x="548640" y="4439412"/>
+            <a:ext cx="384048" cy="384048"/>
+          </a:xfrm>
+          <a:prstGeom prst="ellipse">
+            <a:avLst/>
+          </a:prstGeom>
+          <a:solidFill>
+            <a:srgbClr val="0645AD"/>
+          </a:solidFill>
+          <a:ln>
+            <a:noFill/>
+          </a:ln>
+          <a:effectLst/>
+        </p:spPr>
+        <p:style>
+          <a:lnRef idx="1">
+            <a:schemeClr val="accent1"/>
+          </a:lnRef>
+          <a:fillRef idx="3">
+            <a:schemeClr val="accent1"/>
+          </a:fillRef>
+          <a:effectRef idx="2">
+            <a:schemeClr val="accent1"/>
+          </a:effectRef>
+          <a:fontRef idx="minor">
+            <a:schemeClr val="lt1"/>
+          </a:fontRef>
+        </p:style>
+        <p:txBody>
+          <a:bodyPr rtlCol="0" anchor="ctr" lIns="0" rIns="0" tIns="0" bIns="0"/>
+          <a:lstStyle/>
+          <a:p>
+            <a:pPr algn="ctr"/>
+            <a:r>
+              <a:rPr sz="1300" b="1">
+                <a:solidFill>
+                  <a:srgbClr val="FFFFFF"/>
+                </a:solidFill>
+                <a:latin typeface="Calibri"/>
+              </a:rPr>
+              <a:t>3</a:t>
+            </a:r>
+          </a:p>
+        </p:txBody>
+      </p:sp>
+      <p:sp>
+        <p:nvSpPr>
+          <p:cNvPr id="14" name="TextBox 13"/>
+          <p:cNvSpPr txBox="1"/>
+          <p:nvPr/>
+        </p:nvSpPr>
+        <p:spPr>
+          <a:xfrm>
+            <a:off x="1143000" y="4197096"/>
+            <a:ext cx="5943600" cy="868680"/>
+          </a:xfrm>
+          <a:prstGeom prst="rect">
+            <a:avLst/>
+          </a:prstGeom>
+          <a:noFill/>
+        </p:spPr>
+        <p:txBody>
+          <a:bodyPr wrap="square" anchor="ctr" lIns="0" rIns="0" tIns="0" bIns="0"/>
+          <a:lstStyle/>
+          <a:p>
+            <a:pPr algn="l"/>
+            <a:r>
+              <a:rPr sz="1700" b="0" i="0">
+                <a:solidFill>
+                  <a:srgbClr val="202122"/>
+                </a:solidFill>
+                <a:latin typeface="Calibri"/>
+              </a:rPr>
+              <a:t>Put them on the same virtual network and test connectivity with ping.</a:t>
+            </a:r>
+          </a:p>
+        </p:txBody>
+      </p:sp>
+      <p:sp>
+        <p:nvSpPr>
+          <p:cNvPr id="15" name="Oval 14"/>
+          <p:cNvSpPr/>
+          <p:nvPr/>
+        </p:nvSpPr>
+        <p:spPr>
+          <a:xfrm>
+            <a:off x="548640" y="5417820"/>
+            <a:ext cx="384048" cy="384048"/>
+          </a:xfrm>
+          <a:prstGeom prst="ellipse">
+            <a:avLst/>
+          </a:prstGeom>
+          <a:solidFill>
+            <a:srgbClr val="0645AD"/>
+          </a:solidFill>
+          <a:ln>
+            <a:noFill/>
+          </a:ln>
+          <a:effectLst/>
+        </p:spPr>
+        <p:style>
+          <a:lnRef idx="1">
+            <a:schemeClr val="accent1"/>
+          </a:lnRef>
+          <a:fillRef idx="3">
+            <a:schemeClr val="accent1"/>
+          </a:fillRef>
+          <a:effectRef idx="2">
+            <a:schemeClr val="accent1"/>
+          </a:effectRef>
+          <a:fontRef idx="minor">
+            <a:schemeClr val="lt1"/>
+          </a:fontRef>
+        </p:style>
+        <p:txBody>
+          <a:bodyPr rtlCol="0" anchor="ctr" lIns="0" rIns="0" tIns="0" bIns="0"/>
+          <a:lstStyle/>
+          <a:p>
+            <a:pPr algn="ctr"/>
+            <a:r>
+              <a:rPr sz="1300" b="1">
+                <a:solidFill>
+                  <a:srgbClr val="FFFFFF"/>
+                </a:solidFill>
+                <a:latin typeface="Calibri"/>
+              </a:rPr>
+              <a:t>4</a:t>
+            </a:r>
+          </a:p>
+        </p:txBody>
+      </p:sp>
+      <p:sp>
+        <p:nvSpPr>
+          <p:cNvPr id="16" name="TextBox 15"/>
+          <p:cNvSpPr txBox="1"/>
+          <p:nvPr/>
+        </p:nvSpPr>
+        <p:spPr>
+          <a:xfrm>
+            <a:off x="1143000" y="5175504"/>
+            <a:ext cx="5943600" cy="868680"/>
+          </a:xfrm>
+          <a:prstGeom prst="rect">
+            <a:avLst/>
+          </a:prstGeom>
+          <a:noFill/>
+        </p:spPr>
+        <p:txBody>
+          <a:bodyPr wrap="square" anchor="ctr" lIns="0" rIns="0" tIns="0" bIns="0"/>
+          <a:lstStyle/>
+          <a:p>
+            <a:pPr algn="l"/>
+            <a:r>
+              <a:rPr sz="1700" b="0" i="0">
+                <a:solidFill>
+                  <a:srgbClr val="202122"/>
+                </a:solidFill>
+                <a:latin typeface="Calibri"/>
+              </a:rPr>
+              <a:t>Take a snapshot, make a change, then roll back.</a:t>
+            </a:r>
+          </a:p>
+        </p:txBody>
+      </p:sp>
+      <p:sp>
+        <p:nvSpPr>
+          <p:cNvPr id="17" name="Rounded Rectangle 16"/>
+          <p:cNvSpPr/>
+          <p:nvPr/>
+        </p:nvSpPr>
+        <p:spPr>
+          <a:xfrm>
+            <a:off x="7772400" y="1508760"/>
+            <a:ext cx="3867912" cy="4572000"/>
+          </a:xfrm>
+          <a:prstGeom prst="roundRect">
+            <a:avLst>
+              <a:gd name="adj" fmla="val 8000"/>
+            </a:avLst>
+          </a:prstGeom>
+          <a:solidFill>
+            <a:srgbClr val="EAF3FF"/>
+          </a:solidFill>
+          <a:ln>
+            <a:noFill/>
+          </a:ln>
+          <a:effectLst/>
+        </p:spPr>
+        <p:style>
+          <a:lnRef idx="1">
+            <a:schemeClr val="accent1"/>
+          </a:lnRef>
+          <a:fillRef idx="3">
+            <a:schemeClr val="accent1"/>
+          </a:fillRef>
+          <a:effectRef idx="2">
+            <a:schemeClr val="accent1"/>
+          </a:effectRef>
+          <a:fontRef idx="minor">
+            <a:schemeClr val="lt1"/>
+          </a:fontRef>
+        </p:style>
+        <p:txBody>
+          <a:bodyPr rtlCol="0" anchor="ctr"/>
+          <a:lstStyle/>
+          <a:p/>
+        </p:txBody>
+      </p:sp>
+      <p:sp>
+        <p:nvSpPr>
+          <p:cNvPr id="18" name="TextBox 17"/>
+          <p:cNvSpPr txBox="1"/>
+          <p:nvPr/>
+        </p:nvSpPr>
+        <p:spPr>
+          <a:xfrm>
+            <a:off x="8046720" y="1737360"/>
+            <a:ext cx="3291840" cy="365760"/>
+          </a:xfrm>
+          <a:prstGeom prst="rect">
+            <a:avLst/>
+          </a:prstGeom>
+          <a:noFill/>
+        </p:spPr>
+        <p:txBody>
+          <a:bodyPr wrap="square" anchor="t" lIns="0" rIns="0" tIns="0" bIns="0"/>
+          <a:lstStyle/>
+          <a:p>
+            <a:pPr algn="l"/>
+            <a:r>
+              <a:rPr sz="1300" b="1" i="0">
+                <a:solidFill>
+                  <a:srgbClr val="0645AD"/>
+                </a:solidFill>
+                <a:latin typeface="Calibri"/>
+              </a:rPr>
+              <a:t>SUCCESS CRITERIA</a:t>
+            </a:r>
+          </a:p>
+        </p:txBody>
+      </p:sp>
+      <p:sp>
+        <p:nvSpPr>
+          <p:cNvPr id="19" name="TextBox 18"/>
+          <p:cNvSpPr txBox="1"/>
+          <p:nvPr/>
+        </p:nvSpPr>
+        <p:spPr>
+          <a:xfrm>
+            <a:off x="8046720" y="2240280"/>
+            <a:ext cx="3337560" cy="3657600"/>
+          </a:xfrm>
+          <a:prstGeom prst="rect">
+            <a:avLst/>
+          </a:prstGeom>
+          <a:noFill/>
+        </p:spPr>
+        <p:txBody>
+          <a:bodyPr wrap="square" lIns="0" rIns="0" tIns="0" bIns="0">
+            <a:spAutoFit/>
+          </a:bodyPr>
+          <a:lstStyle/>
+          <a:p>
+            <a:pPr marL="274320" indent="-274320">
+              <a:spcAft>
+                <a:spcPts val="810"/>
+              </a:spcAft>
+              <a:buClr>
+                <a:srgbClr val="0645AD"/>
+              </a:buClr>
+              <a:buFont typeface="Arial"/>
+              <a:buChar char="•"/>
+            </a:pPr>
+            <a:r>
+              <a:rPr sz="1800" b="0">
+                <a:solidFill>
+                  <a:srgbClr val="202122"/>
+                </a:solidFill>
+                <a:latin typeface="Calibri"/>
+              </a:rPr>
+              <a:t>Both VMs boot</a:t>
+            </a:r>
+          </a:p>
+          <a:p>
+            <a:pPr marL="274320" indent="-274320">
+              <a:spcAft>
+                <a:spcPts val="810"/>
+              </a:spcAft>
+              <a:buClr>
+                <a:srgbClr val="0645AD"/>
+              </a:buClr>
+              <a:buFont typeface="Arial"/>
+              <a:buChar char="•"/>
+            </a:pPr>
+            <a:r>
+              <a:rPr sz="1800" b="0">
+                <a:solidFill>
+                  <a:srgbClr val="202122"/>
+                </a:solidFill>
+                <a:latin typeface="Calibri"/>
+              </a:rPr>
+              <a:t>Ping succeeds both ways</a:t>
+            </a:r>
+          </a:p>
+          <a:p>
+            <a:pPr marL="274320" indent="-274320">
+              <a:spcAft>
+                <a:spcPts val="810"/>
+              </a:spcAft>
+              <a:buClr>
+                <a:srgbClr val="0645AD"/>
+              </a:buClr>
+              <a:buFont typeface="Arial"/>
+              <a:buChar char="•"/>
+            </a:pPr>
+            <a:r>
+              <a:rPr sz="1800" b="0">
+                <a:solidFill>
+                  <a:srgbClr val="202122"/>
+                </a:solidFill>
+                <a:latin typeface="Calibri"/>
+              </a:rPr>
+              <a:t>Snapshot rollback demonstrated</a:t>
+            </a:r>
+          </a:p>
+        </p:txBody>
+      </p:sp>
+    </p:spTree>
+  </p:cSld>
+  <p:clrMapOvr>
+    <a:masterClrMapping/>
+  </p:clrMapOvr>
+</p:sld>
+</file>
+
+<file path=ppt/slides/slide14.xml><?xml version="1.0" encoding="utf-8"?>
+<p:sld xmlns:a="http://schemas.openxmlformats.org/drawingml/2006/main" xmlns:p="http://schemas.openxmlformats.org/presentationml/2006/main" xmlns:r="http://schemas.openxmlformats.org/officeDocument/2006/relationships">
+  <p:cSld>
+    <p:bg>
+      <p:bgPr>
+        <a:solidFill>
           <a:srgbClr val="03306E"/>
         </a:solidFill>
         <a:effectLst/>
@@ -5207,6 +8177,430 @@
                 <a:latin typeface="Calibri"/>
               </a:rPr>
               <a:t>3</a:t>
+            </a:r>
+          </a:p>
+        </p:txBody>
+      </p:sp>
+      <p:sp>
+        <p:nvSpPr>
+          <p:cNvPr id="6" name="TextBox 5"/>
+          <p:cNvSpPr txBox="1"/>
+          <p:nvPr/>
+        </p:nvSpPr>
+        <p:spPr>
+          <a:xfrm>
+            <a:off x="548640" y="1554480"/>
+            <a:ext cx="6720840" cy="4617720"/>
+          </a:xfrm>
+          <a:prstGeom prst="rect">
+            <a:avLst/>
+          </a:prstGeom>
+          <a:noFill/>
+        </p:spPr>
+        <p:txBody>
+          <a:bodyPr wrap="square" lIns="0" rIns="0" tIns="0" bIns="0">
+            <a:spAutoFit/>
+          </a:bodyPr>
+          <a:lstStyle/>
+          <a:p>
+            <a:pPr>
+              <a:spcAft>
+                <a:spcPts val="1200"/>
+              </a:spcAft>
+            </a:pPr>
+            <a:r>
+              <a:rPr sz="2000" b="0">
+                <a:solidFill>
+                  <a:srgbClr val="202122"/>
+                </a:solidFill>
+                <a:latin typeface="Calibri"/>
+              </a:rPr>
+              <a:t>There are four main ways to run server workloads.</a:t>
+            </a:r>
+          </a:p>
+          <a:p>
+            <a:pPr>
+              <a:spcAft>
+                <a:spcPts val="1200"/>
+              </a:spcAft>
+            </a:pPr>
+            <a:r>
+              <a:rPr sz="2000" b="0">
+                <a:solidFill>
+                  <a:srgbClr val="202122"/>
+                </a:solidFill>
+                <a:latin typeface="Calibri"/>
+              </a:rPr>
+              <a:t>Physical servers give full access to hardware and full control, but are expensive to buy and run, harder to scale and need space.</a:t>
+            </a:r>
+          </a:p>
+          <a:p>
+            <a:pPr>
+              <a:spcAft>
+                <a:spcPts val="1200"/>
+              </a:spcAft>
+            </a:pPr>
+            <a:r>
+              <a:rPr sz="2000" b="0">
+                <a:solidFill>
+                  <a:srgbClr val="202122"/>
+                </a:solidFill>
+                <a:latin typeface="Calibri"/>
+              </a:rPr>
+              <a:t>Self-hosted virtual servers run many VMs on your own hardware: good cost control and support for clustering, but a big upfront cost.</a:t>
+            </a:r>
+          </a:p>
+          <a:p>
+            <a:pPr>
+              <a:spcAft>
+                <a:spcPts val="1200"/>
+              </a:spcAft>
+            </a:pPr>
+            <a:r>
+              <a:rPr sz="2000" b="0">
+                <a:solidFill>
+                  <a:srgbClr val="202122"/>
+                </a:solidFill>
+                <a:latin typeface="Calibri"/>
+              </a:rPr>
+              <a:t>Cloud-hosted virtual servers, on Azure or AWS, scale easily with built-in redundancy, but you pay ongoing subscriptions.</a:t>
+            </a:r>
+          </a:p>
+          <a:p>
+            <a:pPr>
+              <a:spcAft>
+                <a:spcPts val="1200"/>
+              </a:spcAft>
+            </a:pPr>
+            <a:r>
+              <a:rPr sz="2000" b="0">
+                <a:solidFill>
+                  <a:srgbClr val="202122"/>
+                </a:solidFill>
+                <a:latin typeface="Calibri"/>
+              </a:rPr>
+              <a:t>Containers package just an application and what it needs. They're light and portable, but less secure if misconfigured and need expertise.</a:t>
+            </a:r>
+          </a:p>
+        </p:txBody>
+      </p:sp>
+      <p:sp>
+        <p:nvSpPr>
+          <p:cNvPr id="7" name="Rounded Rectangle 6"/>
+          <p:cNvSpPr/>
+          <p:nvPr/>
+        </p:nvSpPr>
+        <p:spPr>
+          <a:xfrm>
+            <a:off x="7772400" y="1554480"/>
+            <a:ext cx="3867912" cy="4526280"/>
+          </a:xfrm>
+          <a:prstGeom prst="roundRect">
+            <a:avLst>
+              <a:gd name="adj" fmla="val 8000"/>
+            </a:avLst>
+          </a:prstGeom>
+          <a:solidFill>
+            <a:srgbClr val="03306E"/>
+          </a:solidFill>
+          <a:ln>
+            <a:noFill/>
+          </a:ln>
+          <a:effectLst/>
+        </p:spPr>
+        <p:style>
+          <a:lnRef idx="1">
+            <a:schemeClr val="accent1"/>
+          </a:lnRef>
+          <a:fillRef idx="3">
+            <a:schemeClr val="accent1"/>
+          </a:fillRef>
+          <a:effectRef idx="2">
+            <a:schemeClr val="accent1"/>
+          </a:effectRef>
+          <a:fontRef idx="minor">
+            <a:schemeClr val="lt1"/>
+          </a:fontRef>
+        </p:style>
+        <p:txBody>
+          <a:bodyPr rtlCol="0" anchor="ctr"/>
+          <a:lstStyle/>
+          <a:p/>
+        </p:txBody>
+      </p:sp>
+      <p:sp>
+        <p:nvSpPr>
+          <p:cNvPr id="8" name="Oval 7"/>
+          <p:cNvSpPr/>
+          <p:nvPr/>
+        </p:nvSpPr>
+        <p:spPr>
+          <a:xfrm>
+            <a:off x="8046720" y="1828800"/>
+            <a:ext cx="548640" cy="548640"/>
+          </a:xfrm>
+          <a:prstGeom prst="ellipse">
+            <a:avLst/>
+          </a:prstGeom>
+          <a:solidFill>
+            <a:srgbClr val="33C17A"/>
+          </a:solidFill>
+          <a:ln>
+            <a:noFill/>
+          </a:ln>
+          <a:effectLst/>
+        </p:spPr>
+        <p:style>
+          <a:lnRef idx="1">
+            <a:schemeClr val="accent1"/>
+          </a:lnRef>
+          <a:fillRef idx="3">
+            <a:schemeClr val="accent1"/>
+          </a:fillRef>
+          <a:effectRef idx="2">
+            <a:schemeClr val="accent1"/>
+          </a:effectRef>
+          <a:fontRef idx="minor">
+            <a:schemeClr val="lt1"/>
+          </a:fontRef>
+        </p:style>
+        <p:txBody>
+          <a:bodyPr rtlCol="0" anchor="ctr" lIns="0" rIns="0" tIns="0" bIns="0"/>
+          <a:lstStyle/>
+          <a:p>
+            <a:pPr algn="ctr"/>
+            <a:r>
+              <a:rPr sz="1300" b="1">
+                <a:solidFill>
+                  <a:srgbClr val="202122"/>
+                </a:solidFill>
+                <a:latin typeface="Calibri"/>
+              </a:rPr>
+              <a:t>e.g.</a:t>
+            </a:r>
+          </a:p>
+        </p:txBody>
+      </p:sp>
+      <p:sp>
+        <p:nvSpPr>
+          <p:cNvPr id="9" name="TextBox 8"/>
+          <p:cNvSpPr txBox="1"/>
+          <p:nvPr/>
+        </p:nvSpPr>
+        <p:spPr>
+          <a:xfrm>
+            <a:off x="8046720" y="2560320"/>
+            <a:ext cx="3291840" cy="365760"/>
+          </a:xfrm>
+          <a:prstGeom prst="rect">
+            <a:avLst/>
+          </a:prstGeom>
+          <a:noFill/>
+        </p:spPr>
+        <p:txBody>
+          <a:bodyPr wrap="square" anchor="t" lIns="0" rIns="0" tIns="0" bIns="0"/>
+          <a:lstStyle/>
+          <a:p>
+            <a:pPr algn="l"/>
+            <a:r>
+              <a:rPr sz="1300" b="1" i="0">
+                <a:solidFill>
+                  <a:srgbClr val="A9C8F0"/>
+                </a:solidFill>
+                <a:latin typeface="Calibri"/>
+              </a:rPr>
+              <a:t>EXAMPLE</a:t>
+            </a:r>
+          </a:p>
+        </p:txBody>
+      </p:sp>
+      <p:sp>
+        <p:nvSpPr>
+          <p:cNvPr id="10" name="TextBox 9"/>
+          <p:cNvSpPr txBox="1"/>
+          <p:nvPr/>
+        </p:nvSpPr>
+        <p:spPr>
+          <a:xfrm>
+            <a:off x="8046720" y="2971800"/>
+            <a:ext cx="3291840" cy="2971800"/>
+          </a:xfrm>
+          <a:prstGeom prst="rect">
+            <a:avLst/>
+          </a:prstGeom>
+          <a:noFill/>
+        </p:spPr>
+        <p:txBody>
+          <a:bodyPr wrap="square" anchor="t" lIns="0" rIns="0" tIns="0" bIns="0"/>
+          <a:lstStyle/>
+          <a:p>
+            <a:pPr algn="l"/>
+            <a:r>
+              <a:rPr sz="1900" b="0" i="0">
+                <a:solidFill>
+                  <a:srgbClr val="FFFFFF"/>
+                </a:solidFill>
+                <a:latin typeface="Cambria"/>
+              </a:rPr>
+              <a:t>A start-up with no server room runs its app in containers on a cloud platform, scaling up for busy periods and paying only for what it uses.</a:t>
+            </a:r>
+          </a:p>
+        </p:txBody>
+      </p:sp>
+    </p:spTree>
+  </p:cSld>
+  <p:clrMapOvr>
+    <a:masterClrMapping/>
+  </p:clrMapOvr>
+</p:sld>
+</file>
+
+<file path=ppt/slides/slide4.xml><?xml version="1.0" encoding="utf-8"?>
+<p:sld xmlns:a="http://schemas.openxmlformats.org/drawingml/2006/main" xmlns:p="http://schemas.openxmlformats.org/presentationml/2006/main" xmlns:r="http://schemas.openxmlformats.org/officeDocument/2006/relationships">
+  <p:cSld>
+    <p:bg>
+      <p:bgPr>
+        <a:solidFill>
+          <a:srgbClr val="FFFFFF"/>
+        </a:solidFill>
+        <a:effectLst/>
+      </p:bgPr>
+    </p:bg>
+    <p:spTree>
+      <p:nvGrpSpPr>
+        <p:cNvPr id="1" name=""/>
+        <p:cNvGrpSpPr/>
+        <p:nvPr/>
+      </p:nvGrpSpPr>
+      <p:grpSpPr/>
+      <p:sp>
+        <p:nvSpPr>
+          <p:cNvPr id="2" name="TextBox 1"/>
+          <p:cNvSpPr txBox="1"/>
+          <p:nvPr/>
+        </p:nvSpPr>
+        <p:spPr>
+          <a:xfrm>
+            <a:off x="548640" y="320040"/>
+            <a:ext cx="11094415" cy="274320"/>
+          </a:xfrm>
+          <a:prstGeom prst="rect">
+            <a:avLst/>
+          </a:prstGeom>
+          <a:noFill/>
+        </p:spPr>
+        <p:txBody>
+          <a:bodyPr wrap="square" anchor="t" lIns="0" rIns="0" tIns="0" bIns="0"/>
+          <a:lstStyle/>
+          <a:p>
+            <a:pPr algn="l"/>
+            <a:r>
+              <a:rPr sz="1100" b="1" i="0">
+                <a:solidFill>
+                  <a:srgbClr val="54595D"/>
+                </a:solidFill>
+                <a:latin typeface="Calibri"/>
+              </a:rPr>
+              <a:t>DIGITAL INFRASTRUCTURE  ·  Digital Infrastructure Content Area 2</a:t>
+            </a:r>
+          </a:p>
+        </p:txBody>
+      </p:sp>
+      <p:sp>
+        <p:nvSpPr>
+          <p:cNvPr id="3" name="TextBox 2"/>
+          <p:cNvSpPr txBox="1"/>
+          <p:nvPr/>
+        </p:nvSpPr>
+        <p:spPr>
+          <a:xfrm>
+            <a:off x="548640" y="566928"/>
+            <a:ext cx="11094415" cy="822960"/>
+          </a:xfrm>
+          <a:prstGeom prst="rect">
+            <a:avLst/>
+          </a:prstGeom>
+          <a:noFill/>
+        </p:spPr>
+        <p:txBody>
+          <a:bodyPr wrap="square" anchor="ctr" lIns="0" rIns="0" tIns="0" bIns="0"/>
+          <a:lstStyle/>
+          <a:p>
+            <a:pPr algn="l"/>
+            <a:r>
+              <a:rPr sz="3200" b="1" i="0">
+                <a:solidFill>
+                  <a:srgbClr val="03306E"/>
+                </a:solidFill>
+                <a:latin typeface="Cambria"/>
+              </a:rPr>
+              <a:t>Server options</a:t>
+            </a:r>
+          </a:p>
+        </p:txBody>
+      </p:sp>
+      <p:sp>
+        <p:nvSpPr>
+          <p:cNvPr id="4" name="TextBox 3"/>
+          <p:cNvSpPr txBox="1"/>
+          <p:nvPr/>
+        </p:nvSpPr>
+        <p:spPr>
+          <a:xfrm>
+            <a:off x="548640" y="6446520"/>
+            <a:ext cx="8229600" cy="274320"/>
+          </a:xfrm>
+          <a:prstGeom prst="rect">
+            <a:avLst/>
+          </a:prstGeom>
+          <a:noFill/>
+        </p:spPr>
+        <p:txBody>
+          <a:bodyPr wrap="square" anchor="t" lIns="0" rIns="0" tIns="0" bIns="0"/>
+          <a:lstStyle/>
+          <a:p>
+            <a:pPr algn="l"/>
+            <a:r>
+              <a:rPr sz="1000" b="0" i="0">
+                <a:solidFill>
+                  <a:srgbClr val="54595D"/>
+                </a:solidFill>
+                <a:latin typeface="Calibri"/>
+              </a:rPr>
+              <a:t>Digital Support and Security T Level  ·  Servers, Virtualisation and Operating Systems</a:t>
+            </a:r>
+          </a:p>
+        </p:txBody>
+      </p:sp>
+      <p:sp>
+        <p:nvSpPr>
+          <p:cNvPr id="5" name="TextBox 4"/>
+          <p:cNvSpPr txBox="1"/>
+          <p:nvPr/>
+        </p:nvSpPr>
+        <p:spPr>
+          <a:xfrm>
+            <a:off x="10728655" y="6446520"/>
+            <a:ext cx="914400" cy="274320"/>
+          </a:xfrm>
+          <a:prstGeom prst="rect">
+            <a:avLst/>
+          </a:prstGeom>
+          <a:noFill/>
+        </p:spPr>
+        <p:txBody>
+          <a:bodyPr wrap="square" anchor="t" lIns="0" rIns="0" tIns="0" bIns="0"/>
+          <a:lstStyle/>
+          <a:p>
+            <a:pPr algn="r"/>
+            <a:r>
+              <a:rPr sz="1000" b="0" i="0">
+                <a:solidFill>
+                  <a:srgbClr val="54595D"/>
+                </a:solidFill>
+                <a:latin typeface="Calibri"/>
+              </a:rPr>
+              <a:t>4</a:t>
             </a:r>
           </a:p>
         </p:txBody>
@@ -5586,626 +8980,6 @@
 </p:sld>
 </file>
 
-<file path=ppt/slides/slide4.xml><?xml version="1.0" encoding="utf-8"?>
-<p:sld xmlns:a="http://schemas.openxmlformats.org/drawingml/2006/main" xmlns:p="http://schemas.openxmlformats.org/presentationml/2006/main" xmlns:r="http://schemas.openxmlformats.org/officeDocument/2006/relationships">
-  <p:cSld>
-    <p:bg>
-      <p:bgPr>
-        <a:solidFill>
-          <a:srgbClr val="FFFFFF"/>
-        </a:solidFill>
-        <a:effectLst/>
-      </p:bgPr>
-    </p:bg>
-    <p:spTree>
-      <p:nvGrpSpPr>
-        <p:cNvPr id="1" name=""/>
-        <p:cNvGrpSpPr/>
-        <p:nvPr/>
-      </p:nvGrpSpPr>
-      <p:grpSpPr/>
-      <p:sp>
-        <p:nvSpPr>
-          <p:cNvPr id="2" name="TextBox 1"/>
-          <p:cNvSpPr txBox="1"/>
-          <p:nvPr/>
-        </p:nvSpPr>
-        <p:spPr>
-          <a:xfrm>
-            <a:off x="548640" y="320040"/>
-            <a:ext cx="11094415" cy="274320"/>
-          </a:xfrm>
-          <a:prstGeom prst="rect">
-            <a:avLst/>
-          </a:prstGeom>
-          <a:noFill/>
-        </p:spPr>
-        <p:txBody>
-          <a:bodyPr wrap="square" anchor="t" lIns="0" rIns="0" tIns="0" bIns="0"/>
-          <a:lstStyle/>
-          <a:p>
-            <a:pPr algn="l"/>
-            <a:r>
-              <a:rPr sz="1100" b="1" i="0">
-                <a:solidFill>
-                  <a:srgbClr val="54595D"/>
-                </a:solidFill>
-                <a:latin typeface="Calibri"/>
-              </a:rPr>
-              <a:t>DIGITAL INFRASTRUCTURE  ·  Digital Infrastructure Content Area 2</a:t>
-            </a:r>
-          </a:p>
-        </p:txBody>
-      </p:sp>
-      <p:sp>
-        <p:nvSpPr>
-          <p:cNvPr id="3" name="TextBox 2"/>
-          <p:cNvSpPr txBox="1"/>
-          <p:nvPr/>
-        </p:nvSpPr>
-        <p:spPr>
-          <a:xfrm>
-            <a:off x="548640" y="566928"/>
-            <a:ext cx="11094415" cy="822960"/>
-          </a:xfrm>
-          <a:prstGeom prst="rect">
-            <a:avLst/>
-          </a:prstGeom>
-          <a:noFill/>
-        </p:spPr>
-        <p:txBody>
-          <a:bodyPr wrap="square" anchor="ctr" lIns="0" rIns="0" tIns="0" bIns="0"/>
-          <a:lstStyle/>
-          <a:p>
-            <a:pPr algn="l"/>
-            <a:r>
-              <a:rPr sz="3200" b="1" i="0">
-                <a:solidFill>
-                  <a:srgbClr val="03306E"/>
-                </a:solidFill>
-                <a:latin typeface="Cambria"/>
-              </a:rPr>
-              <a:t>Operating systems</a:t>
-            </a:r>
-          </a:p>
-        </p:txBody>
-      </p:sp>
-      <p:sp>
-        <p:nvSpPr>
-          <p:cNvPr id="4" name="TextBox 3"/>
-          <p:cNvSpPr txBox="1"/>
-          <p:nvPr/>
-        </p:nvSpPr>
-        <p:spPr>
-          <a:xfrm>
-            <a:off x="548640" y="6446520"/>
-            <a:ext cx="8229600" cy="274320"/>
-          </a:xfrm>
-          <a:prstGeom prst="rect">
-            <a:avLst/>
-          </a:prstGeom>
-          <a:noFill/>
-        </p:spPr>
-        <p:txBody>
-          <a:bodyPr wrap="square" anchor="t" lIns="0" rIns="0" tIns="0" bIns="0"/>
-          <a:lstStyle/>
-          <a:p>
-            <a:pPr algn="l"/>
-            <a:r>
-              <a:rPr sz="1000" b="0" i="0">
-                <a:solidFill>
-                  <a:srgbClr val="54595D"/>
-                </a:solidFill>
-                <a:latin typeface="Calibri"/>
-              </a:rPr>
-              <a:t>Digital Support and Security T Level  ·  Servers, Virtualisation and Operating Systems</a:t>
-            </a:r>
-          </a:p>
-        </p:txBody>
-      </p:sp>
-      <p:sp>
-        <p:nvSpPr>
-          <p:cNvPr id="5" name="TextBox 4"/>
-          <p:cNvSpPr txBox="1"/>
-          <p:nvPr/>
-        </p:nvSpPr>
-        <p:spPr>
-          <a:xfrm>
-            <a:off x="10728655" y="6446520"/>
-            <a:ext cx="914400" cy="274320"/>
-          </a:xfrm>
-          <a:prstGeom prst="rect">
-            <a:avLst/>
-          </a:prstGeom>
-          <a:noFill/>
-        </p:spPr>
-        <p:txBody>
-          <a:bodyPr wrap="square" anchor="t" lIns="0" rIns="0" tIns="0" bIns="0"/>
-          <a:lstStyle/>
-          <a:p>
-            <a:pPr algn="r"/>
-            <a:r>
-              <a:rPr sz="1000" b="0" i="0">
-                <a:solidFill>
-                  <a:srgbClr val="54595D"/>
-                </a:solidFill>
-                <a:latin typeface="Calibri"/>
-              </a:rPr>
-              <a:t>4</a:t>
-            </a:r>
-          </a:p>
-        </p:txBody>
-      </p:sp>
-      <p:sp>
-        <p:nvSpPr>
-          <p:cNvPr id="6" name="Rounded Rectangle 5"/>
-          <p:cNvSpPr/>
-          <p:nvPr/>
-        </p:nvSpPr>
-        <p:spPr>
-          <a:xfrm>
-            <a:off x="548640" y="1600200"/>
-            <a:ext cx="5364327" cy="640080"/>
-          </a:xfrm>
-          <a:prstGeom prst="roundRect">
-            <a:avLst>
-              <a:gd name="adj" fmla="val 15000"/>
-            </a:avLst>
-          </a:prstGeom>
-          <a:solidFill>
-            <a:srgbClr val="03306E"/>
-          </a:solidFill>
-          <a:ln>
-            <a:noFill/>
-          </a:ln>
-          <a:effectLst/>
-        </p:spPr>
-        <p:style>
-          <a:lnRef idx="1">
-            <a:schemeClr val="accent1"/>
-          </a:lnRef>
-          <a:fillRef idx="3">
-            <a:schemeClr val="accent1"/>
-          </a:fillRef>
-          <a:effectRef idx="2">
-            <a:schemeClr val="accent1"/>
-          </a:effectRef>
-          <a:fontRef idx="minor">
-            <a:schemeClr val="lt1"/>
-          </a:fontRef>
-        </p:style>
-        <p:txBody>
-          <a:bodyPr rtlCol="0" anchor="ctr"/>
-          <a:lstStyle/>
-          <a:p/>
-        </p:txBody>
-      </p:sp>
-      <p:sp>
-        <p:nvSpPr>
-          <p:cNvPr id="7" name="TextBox 6"/>
-          <p:cNvSpPr txBox="1"/>
-          <p:nvPr/>
-        </p:nvSpPr>
-        <p:spPr>
-          <a:xfrm>
-            <a:off x="777240" y="1600200"/>
-            <a:ext cx="4907127" cy="640080"/>
-          </a:xfrm>
-          <a:prstGeom prst="rect">
-            <a:avLst/>
-          </a:prstGeom>
-          <a:noFill/>
-        </p:spPr>
-        <p:txBody>
-          <a:bodyPr wrap="square" anchor="ctr" lIns="0" rIns="0" tIns="0" bIns="0"/>
-          <a:lstStyle/>
-          <a:p>
-            <a:pPr algn="l"/>
-            <a:r>
-              <a:rPr sz="2000" b="1" i="0">
-                <a:solidFill>
-                  <a:srgbClr val="FFFFFF"/>
-                </a:solidFill>
-                <a:latin typeface="Calibri"/>
-              </a:rPr>
-              <a:t>Types</a:t>
-            </a:r>
-          </a:p>
-        </p:txBody>
-      </p:sp>
-      <p:sp>
-        <p:nvSpPr>
-          <p:cNvPr id="8" name="Rounded Rectangle 7"/>
-          <p:cNvSpPr/>
-          <p:nvPr/>
-        </p:nvSpPr>
-        <p:spPr>
-          <a:xfrm>
-            <a:off x="548640" y="2377440"/>
-            <a:ext cx="5364327" cy="3794760"/>
-          </a:xfrm>
-          <a:prstGeom prst="roundRect">
-            <a:avLst>
-              <a:gd name="adj" fmla="val 4000"/>
-            </a:avLst>
-          </a:prstGeom>
-          <a:solidFill>
-            <a:srgbClr val="EAF3FF"/>
-          </a:solidFill>
-          <a:ln>
-            <a:noFill/>
-          </a:ln>
-          <a:effectLst/>
-        </p:spPr>
-        <p:style>
-          <a:lnRef idx="1">
-            <a:schemeClr val="accent1"/>
-          </a:lnRef>
-          <a:fillRef idx="3">
-            <a:schemeClr val="accent1"/>
-          </a:fillRef>
-          <a:effectRef idx="2">
-            <a:schemeClr val="accent1"/>
-          </a:effectRef>
-          <a:fontRef idx="minor">
-            <a:schemeClr val="lt1"/>
-          </a:fontRef>
-        </p:style>
-        <p:txBody>
-          <a:bodyPr rtlCol="0" anchor="ctr"/>
-          <a:lstStyle/>
-          <a:p/>
-        </p:txBody>
-      </p:sp>
-      <p:sp>
-        <p:nvSpPr>
-          <p:cNvPr id="9" name="TextBox 8"/>
-          <p:cNvSpPr txBox="1"/>
-          <p:nvPr/>
-        </p:nvSpPr>
-        <p:spPr>
-          <a:xfrm>
-            <a:off x="822959" y="2606040"/>
-            <a:ext cx="4815687" cy="3337560"/>
-          </a:xfrm>
-          <a:prstGeom prst="rect">
-            <a:avLst/>
-          </a:prstGeom>
-          <a:noFill/>
-        </p:spPr>
-        <p:txBody>
-          <a:bodyPr wrap="square" lIns="0" rIns="0" tIns="0" bIns="0">
-            <a:spAutoFit/>
-          </a:bodyPr>
-          <a:lstStyle/>
-          <a:p>
-            <a:pPr marL="274320" indent="-274320">
-              <a:spcAft>
-                <a:spcPts val="990"/>
-              </a:spcAft>
-              <a:buClr>
-                <a:srgbClr val="0645AD"/>
-              </a:buClr>
-              <a:buFont typeface="Arial"/>
-              <a:buChar char="•"/>
-            </a:pPr>
-            <a:r>
-              <a:rPr sz="2200" b="1">
-                <a:solidFill>
-                  <a:srgbClr val="202122"/>
-                </a:solidFill>
-                <a:latin typeface="Calibri"/>
-              </a:rPr>
-              <a:t>Desktop:</a:t>
-            </a:r>
-            <a:r>
-              <a:rPr sz="2200" b="0">
-                <a:solidFill>
-                  <a:srgbClr val="202122"/>
-                </a:solidFill>
-                <a:latin typeface="Calibri"/>
-              </a:rPr>
-              <a:t> Windows, macOS</a:t>
-            </a:r>
-          </a:p>
-          <a:p>
-            <a:pPr marL="274320" indent="-274320">
-              <a:spcAft>
-                <a:spcPts val="990"/>
-              </a:spcAft>
-              <a:buClr>
-                <a:srgbClr val="0645AD"/>
-              </a:buClr>
-              <a:buFont typeface="Arial"/>
-              <a:buChar char="•"/>
-            </a:pPr>
-            <a:r>
-              <a:rPr sz="2200" b="1">
-                <a:solidFill>
-                  <a:srgbClr val="202122"/>
-                </a:solidFill>
-                <a:latin typeface="Calibri"/>
-              </a:rPr>
-              <a:t>Mobile:</a:t>
-            </a:r>
-            <a:r>
-              <a:rPr sz="2200" b="0">
-                <a:solidFill>
-                  <a:srgbClr val="202122"/>
-                </a:solidFill>
-                <a:latin typeface="Calibri"/>
-              </a:rPr>
-              <a:t> Android, iOS</a:t>
-            </a:r>
-          </a:p>
-          <a:p>
-            <a:pPr marL="274320" indent="-274320">
-              <a:spcAft>
-                <a:spcPts val="990"/>
-              </a:spcAft>
-              <a:buClr>
-                <a:srgbClr val="0645AD"/>
-              </a:buClr>
-              <a:buFont typeface="Arial"/>
-              <a:buChar char="•"/>
-            </a:pPr>
-            <a:r>
-              <a:rPr sz="2200" b="1">
-                <a:solidFill>
-                  <a:srgbClr val="202122"/>
-                </a:solidFill>
-                <a:latin typeface="Calibri"/>
-              </a:rPr>
-              <a:t>Server:</a:t>
-            </a:r>
-            <a:r>
-              <a:rPr sz="2200" b="0">
-                <a:solidFill>
-                  <a:srgbClr val="202122"/>
-                </a:solidFill>
-                <a:latin typeface="Calibri"/>
-              </a:rPr>
-              <a:t> Linux, Windows Server</a:t>
-            </a:r>
-          </a:p>
-        </p:txBody>
-      </p:sp>
-      <p:sp>
-        <p:nvSpPr>
-          <p:cNvPr id="10" name="Rounded Rectangle 9"/>
-          <p:cNvSpPr/>
-          <p:nvPr/>
-        </p:nvSpPr>
-        <p:spPr>
-          <a:xfrm>
-            <a:off x="6278727" y="1600200"/>
-            <a:ext cx="5364327" cy="640080"/>
-          </a:xfrm>
-          <a:prstGeom prst="roundRect">
-            <a:avLst>
-              <a:gd name="adj" fmla="val 15000"/>
-            </a:avLst>
-          </a:prstGeom>
-          <a:solidFill>
-            <a:srgbClr val="0645AD"/>
-          </a:solidFill>
-          <a:ln>
-            <a:noFill/>
-          </a:ln>
-          <a:effectLst/>
-        </p:spPr>
-        <p:style>
-          <a:lnRef idx="1">
-            <a:schemeClr val="accent1"/>
-          </a:lnRef>
-          <a:fillRef idx="3">
-            <a:schemeClr val="accent1"/>
-          </a:fillRef>
-          <a:effectRef idx="2">
-            <a:schemeClr val="accent1"/>
-          </a:effectRef>
-          <a:fontRef idx="minor">
-            <a:schemeClr val="lt1"/>
-          </a:fontRef>
-        </p:style>
-        <p:txBody>
-          <a:bodyPr rtlCol="0" anchor="ctr"/>
-          <a:lstStyle/>
-          <a:p/>
-        </p:txBody>
-      </p:sp>
-      <p:sp>
-        <p:nvSpPr>
-          <p:cNvPr id="11" name="TextBox 10"/>
-          <p:cNvSpPr txBox="1"/>
-          <p:nvPr/>
-        </p:nvSpPr>
-        <p:spPr>
-          <a:xfrm>
-            <a:off x="6507327" y="1600200"/>
-            <a:ext cx="4907127" cy="640080"/>
-          </a:xfrm>
-          <a:prstGeom prst="rect">
-            <a:avLst/>
-          </a:prstGeom>
-          <a:noFill/>
-        </p:spPr>
-        <p:txBody>
-          <a:bodyPr wrap="square" anchor="ctr" lIns="0" rIns="0" tIns="0" bIns="0"/>
-          <a:lstStyle/>
-          <a:p>
-            <a:pPr algn="l"/>
-            <a:r>
-              <a:rPr sz="2000" b="1" i="0">
-                <a:solidFill>
-                  <a:srgbClr val="FFFFFF"/>
-                </a:solidFill>
-                <a:latin typeface="Calibri"/>
-              </a:rPr>
-              <a:t>What they share</a:t>
-            </a:r>
-          </a:p>
-        </p:txBody>
-      </p:sp>
-      <p:sp>
-        <p:nvSpPr>
-          <p:cNvPr id="12" name="Rounded Rectangle 11"/>
-          <p:cNvSpPr/>
-          <p:nvPr/>
-        </p:nvSpPr>
-        <p:spPr>
-          <a:xfrm>
-            <a:off x="6278727" y="2377440"/>
-            <a:ext cx="5364327" cy="3794760"/>
-          </a:xfrm>
-          <a:prstGeom prst="roundRect">
-            <a:avLst>
-              <a:gd name="adj" fmla="val 4000"/>
-            </a:avLst>
-          </a:prstGeom>
-          <a:solidFill>
-            <a:srgbClr val="EAF3FF"/>
-          </a:solidFill>
-          <a:ln>
-            <a:noFill/>
-          </a:ln>
-          <a:effectLst/>
-        </p:spPr>
-        <p:style>
-          <a:lnRef idx="1">
-            <a:schemeClr val="accent1"/>
-          </a:lnRef>
-          <a:fillRef idx="3">
-            <a:schemeClr val="accent1"/>
-          </a:fillRef>
-          <a:effectRef idx="2">
-            <a:schemeClr val="accent1"/>
-          </a:effectRef>
-          <a:fontRef idx="minor">
-            <a:schemeClr val="lt1"/>
-          </a:fontRef>
-        </p:style>
-        <p:txBody>
-          <a:bodyPr rtlCol="0" anchor="ctr"/>
-          <a:lstStyle/>
-          <a:p/>
-        </p:txBody>
-      </p:sp>
-      <p:sp>
-        <p:nvSpPr>
-          <p:cNvPr id="13" name="TextBox 12"/>
-          <p:cNvSpPr txBox="1"/>
-          <p:nvPr/>
-        </p:nvSpPr>
-        <p:spPr>
-          <a:xfrm>
-            <a:off x="6553047" y="2606040"/>
-            <a:ext cx="4815687" cy="3337560"/>
-          </a:xfrm>
-          <a:prstGeom prst="rect">
-            <a:avLst/>
-          </a:prstGeom>
-          <a:noFill/>
-        </p:spPr>
-        <p:txBody>
-          <a:bodyPr wrap="square" lIns="0" rIns="0" tIns="0" bIns="0">
-            <a:spAutoFit/>
-          </a:bodyPr>
-          <a:lstStyle/>
-          <a:p>
-            <a:pPr marL="274320" indent="-274320">
-              <a:spcAft>
-                <a:spcPts val="990"/>
-              </a:spcAft>
-              <a:buClr>
-                <a:srgbClr val="0645AD"/>
-              </a:buClr>
-              <a:buFont typeface="Arial"/>
-              <a:buChar char="•"/>
-            </a:pPr>
-            <a:r>
-              <a:rPr sz="2200" b="0">
-                <a:solidFill>
-                  <a:srgbClr val="202122"/>
-                </a:solidFill>
-                <a:latin typeface="Calibri"/>
-              </a:rPr>
-              <a:t>A user interface and personalisation</a:t>
-            </a:r>
-          </a:p>
-          <a:p>
-            <a:pPr marL="274320" indent="-274320">
-              <a:spcAft>
-                <a:spcPts val="990"/>
-              </a:spcAft>
-              <a:buClr>
-                <a:srgbClr val="0645AD"/>
-              </a:buClr>
-              <a:buFont typeface="Arial"/>
-              <a:buChar char="•"/>
-            </a:pPr>
-            <a:r>
-              <a:rPr sz="2200" b="0">
-                <a:solidFill>
-                  <a:srgbClr val="202122"/>
-                </a:solidFill>
-                <a:latin typeface="Calibri"/>
-              </a:rPr>
-              <a:t>Resource management</a:t>
-            </a:r>
-          </a:p>
-          <a:p>
-            <a:pPr marL="274320" indent="-274320">
-              <a:spcAft>
-                <a:spcPts val="990"/>
-              </a:spcAft>
-              <a:buClr>
-                <a:srgbClr val="0645AD"/>
-              </a:buClr>
-              <a:buFont typeface="Arial"/>
-              <a:buChar char="•"/>
-            </a:pPr>
-            <a:r>
-              <a:rPr sz="2200" b="0">
-                <a:solidFill>
-                  <a:srgbClr val="202122"/>
-                </a:solidFill>
-                <a:latin typeface="Calibri"/>
-              </a:rPr>
-              <a:t>A platform for applications</a:t>
-            </a:r>
-          </a:p>
-          <a:p>
-            <a:pPr marL="274320" indent="-274320">
-              <a:spcAft>
-                <a:spcPts val="990"/>
-              </a:spcAft>
-              <a:buClr>
-                <a:srgbClr val="0645AD"/>
-              </a:buClr>
-              <a:buFont typeface="Arial"/>
-              <a:buChar char="•"/>
-            </a:pPr>
-            <a:r>
-              <a:rPr sz="2200" b="0">
-                <a:solidFill>
-                  <a:srgbClr val="202122"/>
-                </a:solidFill>
-                <a:latin typeface="Calibri"/>
-              </a:rPr>
-              <a:t>They differ in features, UX and purpose</a:t>
-            </a:r>
-          </a:p>
-        </p:txBody>
-      </p:sp>
-    </p:spTree>
-  </p:cSld>
-  <p:clrMapOvr>
-    <a:masterClrMapping/>
-  </p:clrMapOvr>
-</p:sld>
-</file>
-
 <file path=ppt/slides/slide5.xml><?xml version="1.0" encoding="utf-8"?>
 <p:sld xmlns:a="http://schemas.openxmlformats.org/drawingml/2006/main" xmlns:p="http://schemas.openxmlformats.org/presentationml/2006/main" xmlns:r="http://schemas.openxmlformats.org/officeDocument/2006/relationships">
   <p:cSld>
@@ -6285,7 +9059,7 @@
                 </a:solidFill>
                 <a:latin typeface="Cambria"/>
               </a:rPr>
-              <a:t>Virtualisation concepts</a:t>
+              <a:t>Quick check: Server options</a:t>
             </a:r>
           </a:p>
         </p:txBody>
@@ -6358,58 +9132,14 @@
       </p:sp>
       <p:sp>
         <p:nvSpPr>
-          <p:cNvPr id="6" name="Rounded Rectangle 5"/>
+          <p:cNvPr id="6" name="Oval 5"/>
           <p:cNvSpPr/>
           <p:nvPr/>
         </p:nvSpPr>
         <p:spPr>
           <a:xfrm>
-            <a:off x="548640" y="1600200"/>
-            <a:ext cx="5410047" cy="2148840"/>
-          </a:xfrm>
-          <a:prstGeom prst="roundRect">
-            <a:avLst>
-              <a:gd name="adj" fmla="val 6000"/>
-            </a:avLst>
-          </a:prstGeom>
-          <a:solidFill>
-            <a:srgbClr val="EAF3FF"/>
-          </a:solidFill>
-          <a:ln>
-            <a:noFill/>
-          </a:ln>
-          <a:effectLst/>
-        </p:spPr>
-        <p:style>
-          <a:lnRef idx="1">
-            <a:schemeClr val="accent1"/>
-          </a:lnRef>
-          <a:fillRef idx="3">
-            <a:schemeClr val="accent1"/>
-          </a:fillRef>
-          <a:effectRef idx="2">
-            <a:schemeClr val="accent1"/>
-          </a:effectRef>
-          <a:fontRef idx="minor">
-            <a:schemeClr val="lt1"/>
-          </a:fontRef>
-        </p:style>
-        <p:txBody>
-          <a:bodyPr rtlCol="0" anchor="ctr"/>
-          <a:lstStyle/>
-          <a:p/>
-        </p:txBody>
-      </p:sp>
-      <p:sp>
-        <p:nvSpPr>
-          <p:cNvPr id="7" name="Oval 6"/>
-          <p:cNvSpPr/>
-          <p:nvPr/>
-        </p:nvSpPr>
-        <p:spPr>
-          <a:xfrm>
-            <a:off x="777240" y="1828800"/>
-            <a:ext cx="457200" cy="457200"/>
+            <a:off x="548640" y="1691640"/>
+            <a:ext cx="502920" cy="502920"/>
           </a:xfrm>
           <a:prstGeom prst="ellipse">
             <a:avLst/>
@@ -6442,7 +9172,7 @@
           <a:p>
             <a:pPr algn="ctr"/>
             <a:r>
-              <a:rPr sz="1500" b="1">
+              <a:rPr sz="1600" b="1">
                 <a:solidFill>
                   <a:srgbClr val="202122"/>
                 </a:solidFill>
@@ -6455,14 +9185,14 @@
       </p:sp>
       <p:sp>
         <p:nvSpPr>
-          <p:cNvPr id="8" name="TextBox 7"/>
+          <p:cNvPr id="7" name="TextBox 6"/>
           <p:cNvSpPr txBox="1"/>
           <p:nvPr/>
         </p:nvSpPr>
         <p:spPr>
           <a:xfrm>
-            <a:off x="1371600" y="1801368"/>
-            <a:ext cx="4404207" cy="512064"/>
+            <a:off x="1371600" y="1645920"/>
+            <a:ext cx="10271455" cy="1188720"/>
           </a:xfrm>
           <a:prstGeom prst="rect">
             <a:avLst/>
@@ -6470,109 +9200,32 @@
           <a:noFill/>
         </p:spPr>
         <p:txBody>
-          <a:bodyPr wrap="square" anchor="ctr" lIns="0" rIns="0" tIns="0" bIns="0"/>
+          <a:bodyPr wrap="square" anchor="t" lIns="0" rIns="0" tIns="0" bIns="0"/>
           <a:lstStyle/>
           <a:p>
             <a:pPr algn="l"/>
             <a:r>
-              <a:rPr sz="1900" b="1" i="0">
-                <a:solidFill>
-                  <a:srgbClr val="03306E"/>
-                </a:solidFill>
-                <a:latin typeface="Calibri"/>
-              </a:rPr>
-              <a:t>Partitioning</a:t>
-            </a:r>
-          </a:p>
-        </p:txBody>
-      </p:sp>
-      <p:sp>
-        <p:nvSpPr>
-          <p:cNvPr id="9" name="TextBox 8"/>
-          <p:cNvSpPr txBox="1"/>
-          <p:nvPr/>
-        </p:nvSpPr>
-        <p:spPr>
-          <a:xfrm>
-            <a:off x="777240" y="2468880"/>
-            <a:ext cx="4952847" cy="1143000"/>
-          </a:xfrm>
-          <a:prstGeom prst="rect">
-            <a:avLst/>
-          </a:prstGeom>
-          <a:noFill/>
-        </p:spPr>
-        <p:txBody>
-          <a:bodyPr wrap="square" anchor="t" lIns="0" rIns="0" tIns="0" bIns="0"/>
-          <a:lstStyle/>
-          <a:p>
-            <a:pPr algn="l"/>
-            <a:r>
-              <a:rPr sz="2000" b="0" i="0">
+              <a:rPr sz="2400" b="0" i="0">
                 <a:solidFill>
                   <a:srgbClr val="202122"/>
                 </a:solidFill>
                 <a:latin typeface="Calibri"/>
               </a:rPr>
-              <a:t>Many virtual resources from one physical resource, or one from many.</a:t>
-            </a:r>
-          </a:p>
-        </p:txBody>
-      </p:sp>
-      <p:sp>
-        <p:nvSpPr>
-          <p:cNvPr id="10" name="Rounded Rectangle 9"/>
+              <a:t>Give one disadvantage of physical servers.</a:t>
+            </a:r>
+          </a:p>
+        </p:txBody>
+      </p:sp>
+      <p:sp>
+        <p:nvSpPr>
+          <p:cNvPr id="8" name="Oval 7"/>
           <p:cNvSpPr/>
           <p:nvPr/>
         </p:nvSpPr>
         <p:spPr>
           <a:xfrm>
-            <a:off x="6233007" y="1600200"/>
-            <a:ext cx="5410047" cy="2148840"/>
-          </a:xfrm>
-          <a:prstGeom prst="roundRect">
-            <a:avLst>
-              <a:gd name="adj" fmla="val 6000"/>
-            </a:avLst>
-          </a:prstGeom>
-          <a:solidFill>
-            <a:srgbClr val="EAF3FF"/>
-          </a:solidFill>
-          <a:ln>
-            <a:noFill/>
-          </a:ln>
-          <a:effectLst/>
-        </p:spPr>
-        <p:style>
-          <a:lnRef idx="1">
-            <a:schemeClr val="accent1"/>
-          </a:lnRef>
-          <a:fillRef idx="3">
-            <a:schemeClr val="accent1"/>
-          </a:fillRef>
-          <a:effectRef idx="2">
-            <a:schemeClr val="accent1"/>
-          </a:effectRef>
-          <a:fontRef idx="minor">
-            <a:schemeClr val="lt1"/>
-          </a:fontRef>
-        </p:style>
-        <p:txBody>
-          <a:bodyPr rtlCol="0" anchor="ctr"/>
-          <a:lstStyle/>
-          <a:p/>
-        </p:txBody>
-      </p:sp>
-      <p:sp>
-        <p:nvSpPr>
-          <p:cNvPr id="11" name="Oval 10"/>
-          <p:cNvSpPr/>
-          <p:nvPr/>
-        </p:nvSpPr>
-        <p:spPr>
-          <a:xfrm>
-            <a:off x="6461607" y="1828800"/>
-            <a:ext cx="457200" cy="457200"/>
+            <a:off x="548640" y="3108960"/>
+            <a:ext cx="502920" cy="502920"/>
           </a:xfrm>
           <a:prstGeom prst="ellipse">
             <a:avLst/>
@@ -6605,7 +9258,7 @@
           <a:p>
             <a:pPr algn="ctr"/>
             <a:r>
-              <a:rPr sz="1500" b="1">
+              <a:rPr sz="1600" b="1">
                 <a:solidFill>
                   <a:srgbClr val="202122"/>
                 </a:solidFill>
@@ -6618,14 +9271,14 @@
       </p:sp>
       <p:sp>
         <p:nvSpPr>
-          <p:cNvPr id="12" name="TextBox 11"/>
+          <p:cNvPr id="9" name="TextBox 8"/>
           <p:cNvSpPr txBox="1"/>
           <p:nvPr/>
         </p:nvSpPr>
         <p:spPr>
           <a:xfrm>
-            <a:off x="7055967" y="1801368"/>
-            <a:ext cx="4404207" cy="512064"/>
+            <a:off x="1371600" y="3063240"/>
+            <a:ext cx="10271455" cy="1188720"/>
           </a:xfrm>
           <a:prstGeom prst="rect">
             <a:avLst/>
@@ -6633,109 +9286,32 @@
           <a:noFill/>
         </p:spPr>
         <p:txBody>
-          <a:bodyPr wrap="square" anchor="ctr" lIns="0" rIns="0" tIns="0" bIns="0"/>
+          <a:bodyPr wrap="square" anchor="t" lIns="0" rIns="0" tIns="0" bIns="0"/>
           <a:lstStyle/>
           <a:p>
             <a:pPr algn="l"/>
             <a:r>
-              <a:rPr sz="1900" b="1" i="0">
-                <a:solidFill>
-                  <a:srgbClr val="03306E"/>
-                </a:solidFill>
-                <a:latin typeface="Calibri"/>
-              </a:rPr>
-              <a:t>Isolation</a:t>
-            </a:r>
-          </a:p>
-        </p:txBody>
-      </p:sp>
-      <p:sp>
-        <p:nvSpPr>
-          <p:cNvPr id="13" name="TextBox 12"/>
-          <p:cNvSpPr txBox="1"/>
-          <p:nvPr/>
-        </p:nvSpPr>
-        <p:spPr>
-          <a:xfrm>
-            <a:off x="6461607" y="2468880"/>
-            <a:ext cx="4952847" cy="1143000"/>
-          </a:xfrm>
-          <a:prstGeom prst="rect">
-            <a:avLst/>
-          </a:prstGeom>
-          <a:noFill/>
-        </p:spPr>
-        <p:txBody>
-          <a:bodyPr wrap="square" anchor="t" lIns="0" rIns="0" tIns="0" bIns="0"/>
-          <a:lstStyle/>
-          <a:p>
-            <a:pPr algn="l"/>
-            <a:r>
-              <a:rPr sz="2000" b="0" i="0">
+              <a:rPr sz="2400" b="0" i="0">
                 <a:solidFill>
                   <a:srgbClr val="202122"/>
                 </a:solidFill>
                 <a:latin typeface="Calibri"/>
               </a:rPr>
-              <a:t>Each virtual machine is separated from the others.</a:t>
-            </a:r>
-          </a:p>
-        </p:txBody>
-      </p:sp>
-      <p:sp>
-        <p:nvSpPr>
-          <p:cNvPr id="14" name="Rounded Rectangle 13"/>
+              <a:t>What is a container?</a:t>
+            </a:r>
+          </a:p>
+        </p:txBody>
+      </p:sp>
+      <p:sp>
+        <p:nvSpPr>
+          <p:cNvPr id="10" name="Oval 9"/>
           <p:cNvSpPr/>
           <p:nvPr/>
         </p:nvSpPr>
         <p:spPr>
           <a:xfrm>
-            <a:off x="548640" y="4023360"/>
-            <a:ext cx="5410047" cy="2148840"/>
-          </a:xfrm>
-          <a:prstGeom prst="roundRect">
-            <a:avLst>
-              <a:gd name="adj" fmla="val 6000"/>
-            </a:avLst>
-          </a:prstGeom>
-          <a:solidFill>
-            <a:srgbClr val="EAF3FF"/>
-          </a:solidFill>
-          <a:ln>
-            <a:noFill/>
-          </a:ln>
-          <a:effectLst/>
-        </p:spPr>
-        <p:style>
-          <a:lnRef idx="1">
-            <a:schemeClr val="accent1"/>
-          </a:lnRef>
-          <a:fillRef idx="3">
-            <a:schemeClr val="accent1"/>
-          </a:fillRef>
-          <a:effectRef idx="2">
-            <a:schemeClr val="accent1"/>
-          </a:effectRef>
-          <a:fontRef idx="minor">
-            <a:schemeClr val="lt1"/>
-          </a:fontRef>
-        </p:style>
-        <p:txBody>
-          <a:bodyPr rtlCol="0" anchor="ctr"/>
-          <a:lstStyle/>
-          <a:p/>
-        </p:txBody>
-      </p:sp>
-      <p:sp>
-        <p:nvSpPr>
-          <p:cNvPr id="15" name="Oval 14"/>
-          <p:cNvSpPr/>
-          <p:nvPr/>
-        </p:nvSpPr>
-        <p:spPr>
-          <a:xfrm>
-            <a:off x="777240" y="4251960"/>
-            <a:ext cx="457200" cy="457200"/>
+            <a:off x="548640" y="4526280"/>
+            <a:ext cx="502920" cy="502920"/>
           </a:xfrm>
           <a:prstGeom prst="ellipse">
             <a:avLst/>
@@ -6768,7 +9344,7 @@
           <a:p>
             <a:pPr algn="ctr"/>
             <a:r>
-              <a:rPr sz="1500" b="1">
+              <a:rPr sz="1600" b="1">
                 <a:solidFill>
                   <a:srgbClr val="202122"/>
                 </a:solidFill>
@@ -6781,14 +9357,14 @@
       </p:sp>
       <p:sp>
         <p:nvSpPr>
-          <p:cNvPr id="16" name="TextBox 15"/>
+          <p:cNvPr id="11" name="TextBox 10"/>
           <p:cNvSpPr txBox="1"/>
           <p:nvPr/>
         </p:nvSpPr>
         <p:spPr>
           <a:xfrm>
-            <a:off x="1371600" y="4224528"/>
-            <a:ext cx="4404207" cy="512064"/>
+            <a:off x="1371600" y="4480560"/>
+            <a:ext cx="10271455" cy="1188720"/>
           </a:xfrm>
           <a:prstGeom prst="rect">
             <a:avLst/>
@@ -6796,32 +9372,32 @@
           <a:noFill/>
         </p:spPr>
         <p:txBody>
-          <a:bodyPr wrap="square" anchor="ctr" lIns="0" rIns="0" tIns="0" bIns="0"/>
+          <a:bodyPr wrap="square" anchor="t" lIns="0" rIns="0" tIns="0" bIns="0"/>
           <a:lstStyle/>
           <a:p>
             <a:pPr algn="l"/>
             <a:r>
-              <a:rPr sz="1900" b="1" i="0">
-                <a:solidFill>
-                  <a:srgbClr val="03306E"/>
-                </a:solidFill>
-                <a:latin typeface="Calibri"/>
-              </a:rPr>
-              <a:t>Encapsulation</a:t>
-            </a:r>
-          </a:p>
-        </p:txBody>
-      </p:sp>
-      <p:sp>
-        <p:nvSpPr>
-          <p:cNvPr id="17" name="TextBox 16"/>
+              <a:rPr sz="2400" b="0" i="0">
+                <a:solidFill>
+                  <a:srgbClr val="202122"/>
+                </a:solidFill>
+                <a:latin typeface="Calibri"/>
+              </a:rPr>
+              <a:t>Why might a business choose cloud-hosted servers?</a:t>
+            </a:r>
+          </a:p>
+        </p:txBody>
+      </p:sp>
+      <p:sp>
+        <p:nvSpPr>
+          <p:cNvPr id="12" name="TextBox 11"/>
           <p:cNvSpPr txBox="1"/>
           <p:nvPr/>
         </p:nvSpPr>
         <p:spPr>
           <a:xfrm>
-            <a:off x="777240" y="4892040"/>
-            <a:ext cx="4952847" cy="1143000"/>
+            <a:off x="548640" y="5852160"/>
+            <a:ext cx="11094415" cy="365760"/>
           </a:xfrm>
           <a:prstGeom prst="rect">
             <a:avLst/>
@@ -6834,176 +9410,13 @@
           <a:p>
             <a:pPr algn="l"/>
             <a:r>
-              <a:rPr sz="2000" b="0" i="0">
-                <a:solidFill>
-                  <a:srgbClr val="202122"/>
-                </a:solidFill>
-                <a:latin typeface="Calibri"/>
-              </a:rPr>
-              <a:t>A whole VM is saved as files that can be copied or moved.</a:t>
-            </a:r>
-          </a:p>
-        </p:txBody>
-      </p:sp>
-      <p:sp>
-        <p:nvSpPr>
-          <p:cNvPr id="18" name="Rounded Rectangle 17"/>
-          <p:cNvSpPr/>
-          <p:nvPr/>
-        </p:nvSpPr>
-        <p:spPr>
-          <a:xfrm>
-            <a:off x="6233007" y="4023360"/>
-            <a:ext cx="5410047" cy="2148840"/>
-          </a:xfrm>
-          <a:prstGeom prst="roundRect">
-            <a:avLst>
-              <a:gd name="adj" fmla="val 6000"/>
-            </a:avLst>
-          </a:prstGeom>
-          <a:solidFill>
-            <a:srgbClr val="EAF3FF"/>
-          </a:solidFill>
-          <a:ln>
-            <a:noFill/>
-          </a:ln>
-          <a:effectLst/>
-        </p:spPr>
-        <p:style>
-          <a:lnRef idx="1">
-            <a:schemeClr val="accent1"/>
-          </a:lnRef>
-          <a:fillRef idx="3">
-            <a:schemeClr val="accent1"/>
-          </a:fillRef>
-          <a:effectRef idx="2">
-            <a:schemeClr val="accent1"/>
-          </a:effectRef>
-          <a:fontRef idx="minor">
-            <a:schemeClr val="lt1"/>
-          </a:fontRef>
-        </p:style>
-        <p:txBody>
-          <a:bodyPr rtlCol="0" anchor="ctr"/>
-          <a:lstStyle/>
-          <a:p/>
-        </p:txBody>
-      </p:sp>
-      <p:sp>
-        <p:nvSpPr>
-          <p:cNvPr id="19" name="Oval 18"/>
-          <p:cNvSpPr/>
-          <p:nvPr/>
-        </p:nvSpPr>
-        <p:spPr>
-          <a:xfrm>
-            <a:off x="6461607" y="4251960"/>
-            <a:ext cx="457200" cy="457200"/>
-          </a:xfrm>
-          <a:prstGeom prst="ellipse">
-            <a:avLst/>
-          </a:prstGeom>
-          <a:solidFill>
-            <a:srgbClr val="33C17A"/>
-          </a:solidFill>
-          <a:ln>
-            <a:noFill/>
-          </a:ln>
-          <a:effectLst/>
-        </p:spPr>
-        <p:style>
-          <a:lnRef idx="1">
-            <a:schemeClr val="accent1"/>
-          </a:lnRef>
-          <a:fillRef idx="3">
-            <a:schemeClr val="accent1"/>
-          </a:fillRef>
-          <a:effectRef idx="2">
-            <a:schemeClr val="accent1"/>
-          </a:effectRef>
-          <a:fontRef idx="minor">
-            <a:schemeClr val="lt1"/>
-          </a:fontRef>
-        </p:style>
-        <p:txBody>
-          <a:bodyPr rtlCol="0" anchor="ctr" lIns="0" rIns="0" tIns="0" bIns="0"/>
-          <a:lstStyle/>
-          <a:p>
-            <a:pPr algn="ctr"/>
-            <a:r>
-              <a:rPr sz="1500" b="1">
-                <a:solidFill>
-                  <a:srgbClr val="202122"/>
-                </a:solidFill>
-                <a:latin typeface="Calibri"/>
-              </a:rPr>
-              <a:t>4</a:t>
-            </a:r>
-          </a:p>
-        </p:txBody>
-      </p:sp>
-      <p:sp>
-        <p:nvSpPr>
-          <p:cNvPr id="20" name="TextBox 19"/>
-          <p:cNvSpPr txBox="1"/>
-          <p:nvPr/>
-        </p:nvSpPr>
-        <p:spPr>
-          <a:xfrm>
-            <a:off x="7055967" y="4224528"/>
-            <a:ext cx="4404207" cy="512064"/>
-          </a:xfrm>
-          <a:prstGeom prst="rect">
-            <a:avLst/>
-          </a:prstGeom>
-          <a:noFill/>
-        </p:spPr>
-        <p:txBody>
-          <a:bodyPr wrap="square" anchor="ctr" lIns="0" rIns="0" tIns="0" bIns="0"/>
-          <a:lstStyle/>
-          <a:p>
-            <a:pPr algn="l"/>
-            <a:r>
-              <a:rPr sz="1900" b="1" i="0">
-                <a:solidFill>
-                  <a:srgbClr val="03306E"/>
-                </a:solidFill>
-                <a:latin typeface="Calibri"/>
-              </a:rPr>
-              <a:t>Hardware independence</a:t>
-            </a:r>
-          </a:p>
-        </p:txBody>
-      </p:sp>
-      <p:sp>
-        <p:nvSpPr>
-          <p:cNvPr id="21" name="TextBox 20"/>
-          <p:cNvSpPr txBox="1"/>
-          <p:nvPr/>
-        </p:nvSpPr>
-        <p:spPr>
-          <a:xfrm>
-            <a:off x="6461607" y="4892040"/>
-            <a:ext cx="4952847" cy="1143000"/>
-          </a:xfrm>
-          <a:prstGeom prst="rect">
-            <a:avLst/>
-          </a:prstGeom>
-          <a:noFill/>
-        </p:spPr>
-        <p:txBody>
-          <a:bodyPr wrap="square" anchor="t" lIns="0" rIns="0" tIns="0" bIns="0"/>
-          <a:lstStyle/>
-          <a:p>
-            <a:pPr algn="l"/>
-            <a:r>
-              <a:rPr sz="2000" b="0" i="0">
-                <a:solidFill>
-                  <a:srgbClr val="202122"/>
-                </a:solidFill>
-                <a:latin typeface="Calibri"/>
-              </a:rPr>
-              <a:t>VMs run on any host with a compatible hypervisor.</a:t>
+              <a:rPr sz="1300" b="0" i="1">
+                <a:solidFill>
+                  <a:srgbClr val="54595D"/>
+                </a:solidFill>
+                <a:latin typeface="Calibri"/>
+              </a:rPr>
+              <a:t>Answer on mini whiteboards or in your book. Answers are in the speaker notes.</a:t>
             </a:r>
           </a:p>
         </p:txBody>
@@ -7095,7 +9508,7 @@
                 </a:solidFill>
                 <a:latin typeface="Cambria"/>
               </a:rPr>
-              <a:t>Applications of virtualisation</a:t>
+              <a:t>Operating systems</a:t>
             </a:r>
           </a:p>
         </p:txBody>
@@ -7175,11 +9588,88 @@
         <p:spPr>
           <a:xfrm>
             <a:off x="548640" y="1600200"/>
-            <a:ext cx="3515258" cy="2148840"/>
+            <a:ext cx="5364327" cy="640080"/>
           </a:xfrm>
           <a:prstGeom prst="roundRect">
             <a:avLst>
-              <a:gd name="adj" fmla="val 6000"/>
+              <a:gd name="adj" fmla="val 15000"/>
+            </a:avLst>
+          </a:prstGeom>
+          <a:solidFill>
+            <a:srgbClr val="03306E"/>
+          </a:solidFill>
+          <a:ln>
+            <a:noFill/>
+          </a:ln>
+          <a:effectLst/>
+        </p:spPr>
+        <p:style>
+          <a:lnRef idx="1">
+            <a:schemeClr val="accent1"/>
+          </a:lnRef>
+          <a:fillRef idx="3">
+            <a:schemeClr val="accent1"/>
+          </a:fillRef>
+          <a:effectRef idx="2">
+            <a:schemeClr val="accent1"/>
+          </a:effectRef>
+          <a:fontRef idx="minor">
+            <a:schemeClr val="lt1"/>
+          </a:fontRef>
+        </p:style>
+        <p:txBody>
+          <a:bodyPr rtlCol="0" anchor="ctr"/>
+          <a:lstStyle/>
+          <a:p/>
+        </p:txBody>
+      </p:sp>
+      <p:sp>
+        <p:nvSpPr>
+          <p:cNvPr id="7" name="TextBox 6"/>
+          <p:cNvSpPr txBox="1"/>
+          <p:nvPr/>
+        </p:nvSpPr>
+        <p:spPr>
+          <a:xfrm>
+            <a:off x="777240" y="1600200"/>
+            <a:ext cx="4907127" cy="640080"/>
+          </a:xfrm>
+          <a:prstGeom prst="rect">
+            <a:avLst/>
+          </a:prstGeom>
+          <a:noFill/>
+        </p:spPr>
+        <p:txBody>
+          <a:bodyPr wrap="square" anchor="ctr" lIns="0" rIns="0" tIns="0" bIns="0"/>
+          <a:lstStyle/>
+          <a:p>
+            <a:pPr algn="l"/>
+            <a:r>
+              <a:rPr sz="2000" b="1" i="0">
+                <a:solidFill>
+                  <a:srgbClr val="FFFFFF"/>
+                </a:solidFill>
+                <a:latin typeface="Calibri"/>
+              </a:rPr>
+              <a:t>Types</a:t>
+            </a:r>
+          </a:p>
+        </p:txBody>
+      </p:sp>
+      <p:sp>
+        <p:nvSpPr>
+          <p:cNvPr id="8" name="Rounded Rectangle 7"/>
+          <p:cNvSpPr/>
+          <p:nvPr/>
+        </p:nvSpPr>
+        <p:spPr>
+          <a:xfrm>
+            <a:off x="548640" y="2377440"/>
+            <a:ext cx="5364327" cy="3794760"/>
+          </a:xfrm>
+          <a:prstGeom prst="roundRect">
+            <a:avLst>
+              <a:gd name="adj" fmla="val 4000"/>
             </a:avLst>
           </a:prstGeom>
           <a:solidFill>
@@ -7212,20 +9702,135 @@
       </p:sp>
       <p:sp>
         <p:nvSpPr>
-          <p:cNvPr id="7" name="Oval 6"/>
+          <p:cNvPr id="9" name="TextBox 8"/>
+          <p:cNvSpPr txBox="1"/>
+          <p:nvPr/>
+        </p:nvSpPr>
+        <p:spPr>
+          <a:xfrm>
+            <a:off x="822959" y="2606040"/>
+            <a:ext cx="4815687" cy="3337560"/>
+          </a:xfrm>
+          <a:prstGeom prst="rect">
+            <a:avLst/>
+          </a:prstGeom>
+          <a:noFill/>
+        </p:spPr>
+        <p:txBody>
+          <a:bodyPr wrap="square" lIns="0" rIns="0" tIns="0" bIns="0">
+            <a:spAutoFit/>
+          </a:bodyPr>
+          <a:lstStyle/>
+          <a:p>
+            <a:pPr marL="274320" indent="-274320">
+              <a:spcAft>
+                <a:spcPts val="990"/>
+              </a:spcAft>
+              <a:buClr>
+                <a:srgbClr val="0645AD"/>
+              </a:buClr>
+              <a:buFont typeface="Arial"/>
+              <a:buChar char="•"/>
+            </a:pPr>
+            <a:r>
+              <a:rPr sz="2200" b="1">
+                <a:solidFill>
+                  <a:srgbClr val="202122"/>
+                </a:solidFill>
+                <a:latin typeface="Calibri"/>
+              </a:rPr>
+              <a:t>Desktop:</a:t>
+            </a:r>
+            <a:r>
+              <a:rPr sz="2200" b="0">
+                <a:solidFill>
+                  <a:srgbClr val="202122"/>
+                </a:solidFill>
+                <a:latin typeface="Calibri"/>
+              </a:rPr>
+              <a:t> Windows, macOS</a:t>
+            </a:r>
+          </a:p>
+          <a:p>
+            <a:pPr marL="274320" indent="-274320">
+              <a:spcAft>
+                <a:spcPts val="990"/>
+              </a:spcAft>
+              <a:buClr>
+                <a:srgbClr val="0645AD"/>
+              </a:buClr>
+              <a:buFont typeface="Arial"/>
+              <a:buChar char="•"/>
+            </a:pPr>
+            <a:r>
+              <a:rPr sz="2200" b="1">
+                <a:solidFill>
+                  <a:srgbClr val="202122"/>
+                </a:solidFill>
+                <a:latin typeface="Calibri"/>
+              </a:rPr>
+              <a:t>Mobile:</a:t>
+            </a:r>
+            <a:r>
+              <a:rPr sz="2200" b="0">
+                <a:solidFill>
+                  <a:srgbClr val="202122"/>
+                </a:solidFill>
+                <a:latin typeface="Calibri"/>
+              </a:rPr>
+              <a:t> Android, iOS</a:t>
+            </a:r>
+          </a:p>
+          <a:p>
+            <a:pPr marL="274320" indent="-274320">
+              <a:spcAft>
+                <a:spcPts val="990"/>
+              </a:spcAft>
+              <a:buClr>
+                <a:srgbClr val="0645AD"/>
+              </a:buClr>
+              <a:buFont typeface="Arial"/>
+              <a:buChar char="•"/>
+            </a:pPr>
+            <a:r>
+              <a:rPr sz="2200" b="1">
+                <a:solidFill>
+                  <a:srgbClr val="202122"/>
+                </a:solidFill>
+                <a:latin typeface="Calibri"/>
+              </a:rPr>
+              <a:t>Server:</a:t>
+            </a:r>
+            <a:r>
+              <a:rPr sz="2200" b="0">
+                <a:solidFill>
+                  <a:srgbClr val="202122"/>
+                </a:solidFill>
+                <a:latin typeface="Calibri"/>
+              </a:rPr>
+              <a:t> Linux, Windows Server</a:t>
+            </a:r>
+          </a:p>
+        </p:txBody>
+      </p:sp>
+      <p:sp>
+        <p:nvSpPr>
+          <p:cNvPr id="10" name="Rounded Rectangle 9"/>
           <p:cNvSpPr/>
           <p:nvPr/>
         </p:nvSpPr>
         <p:spPr>
           <a:xfrm>
-            <a:off x="777240" y="1828800"/>
-            <a:ext cx="457200" cy="457200"/>
-          </a:xfrm>
-          <a:prstGeom prst="ellipse">
-            <a:avLst/>
+            <a:off x="6278727" y="1600200"/>
+            <a:ext cx="5364327" cy="640080"/>
+          </a:xfrm>
+          <a:prstGeom prst="roundRect">
+            <a:avLst>
+              <a:gd name="adj" fmla="val 15000"/>
+            </a:avLst>
           </a:prstGeom>
           <a:solidFill>
-            <a:srgbClr val="33C17A"/>
+            <a:srgbClr val="0645AD"/>
           </a:solidFill>
           <a:ln>
             <a:noFill/>
@@ -7247,32 +9852,21 @@
           </a:fontRef>
         </p:style>
         <p:txBody>
-          <a:bodyPr rtlCol="0" anchor="ctr" lIns="0" rIns="0" tIns="0" bIns="0"/>
-          <a:lstStyle/>
-          <a:p>
-            <a:pPr algn="ctr"/>
-            <a:r>
-              <a:rPr sz="1500" b="1">
-                <a:solidFill>
-                  <a:srgbClr val="202122"/>
-                </a:solidFill>
-                <a:latin typeface="Calibri"/>
-              </a:rPr>
-              <a:t>1</a:t>
-            </a:r>
-          </a:p>
-        </p:txBody>
-      </p:sp>
-      <p:sp>
-        <p:nvSpPr>
-          <p:cNvPr id="8" name="TextBox 7"/>
+          <a:bodyPr rtlCol="0" anchor="ctr"/>
+          <a:lstStyle/>
+          <a:p/>
+        </p:txBody>
+      </p:sp>
+      <p:sp>
+        <p:nvSpPr>
+          <p:cNvPr id="11" name="TextBox 10"/>
           <p:cNvSpPr txBox="1"/>
           <p:nvPr/>
         </p:nvSpPr>
         <p:spPr>
           <a:xfrm>
-            <a:off x="1371600" y="1801368"/>
-            <a:ext cx="2509418" cy="512064"/>
+            <a:off x="6507327" y="1600200"/>
+            <a:ext cx="4907127" cy="640080"/>
           </a:xfrm>
           <a:prstGeom prst="rect">
             <a:avLst/>
@@ -7285,64 +9879,31 @@
           <a:p>
             <a:pPr algn="l"/>
             <a:r>
-              <a:rPr sz="1900" b="1" i="0">
-                <a:solidFill>
-                  <a:srgbClr val="03306E"/>
-                </a:solidFill>
-                <a:latin typeface="Calibri"/>
-              </a:rPr>
-              <a:t>Network</a:t>
-            </a:r>
-          </a:p>
-        </p:txBody>
-      </p:sp>
-      <p:sp>
-        <p:nvSpPr>
-          <p:cNvPr id="9" name="TextBox 8"/>
-          <p:cNvSpPr txBox="1"/>
-          <p:nvPr/>
-        </p:nvSpPr>
-        <p:spPr>
-          <a:xfrm>
-            <a:off x="777240" y="2468880"/>
-            <a:ext cx="3058058" cy="1143000"/>
-          </a:xfrm>
-          <a:prstGeom prst="rect">
-            <a:avLst/>
-          </a:prstGeom>
-          <a:noFill/>
-        </p:spPr>
-        <p:txBody>
-          <a:bodyPr wrap="square" anchor="t" lIns="0" rIns="0" tIns="0" bIns="0"/>
-          <a:lstStyle/>
-          <a:p>
-            <a:pPr algn="l"/>
-            <a:r>
-              <a:rPr sz="2000" b="0" i="0">
-                <a:solidFill>
-                  <a:srgbClr val="202122"/>
-                </a:solidFill>
-                <a:latin typeface="Calibri"/>
-              </a:rPr>
-              <a:t>Virtual switches, routers and networks.</a:t>
-            </a:r>
-          </a:p>
-        </p:txBody>
-      </p:sp>
-      <p:sp>
-        <p:nvSpPr>
-          <p:cNvPr id="10" name="Rounded Rectangle 9"/>
+              <a:rPr sz="2000" b="1" i="0">
+                <a:solidFill>
+                  <a:srgbClr val="FFFFFF"/>
+                </a:solidFill>
+                <a:latin typeface="Calibri"/>
+              </a:rPr>
+              <a:t>What they share</a:t>
+            </a:r>
+          </a:p>
+        </p:txBody>
+      </p:sp>
+      <p:sp>
+        <p:nvSpPr>
+          <p:cNvPr id="12" name="Rounded Rectangle 11"/>
           <p:cNvSpPr/>
           <p:nvPr/>
         </p:nvSpPr>
         <p:spPr>
           <a:xfrm>
-            <a:off x="4338218" y="1600200"/>
-            <a:ext cx="3515258" cy="2148840"/>
+            <a:off x="6278727" y="2377440"/>
+            <a:ext cx="5364327" cy="3794760"/>
           </a:xfrm>
           <a:prstGeom prst="roundRect">
             <a:avLst>
-              <a:gd name="adj" fmla="val 6000"/>
+              <a:gd name="adj" fmla="val 4000"/>
             </a:avLst>
           </a:prstGeom>
           <a:solidFill>
@@ -7375,100 +9936,14 @@
       </p:sp>
       <p:sp>
         <p:nvSpPr>
-          <p:cNvPr id="11" name="Oval 10"/>
-          <p:cNvSpPr/>
-          <p:nvPr/>
-        </p:nvSpPr>
-        <p:spPr>
-          <a:xfrm>
-            <a:off x="4566818" y="1828800"/>
-            <a:ext cx="457200" cy="457200"/>
-          </a:xfrm>
-          <a:prstGeom prst="ellipse">
-            <a:avLst/>
-          </a:prstGeom>
-          <a:solidFill>
-            <a:srgbClr val="33C17A"/>
-          </a:solidFill>
-          <a:ln>
-            <a:noFill/>
-          </a:ln>
-          <a:effectLst/>
-        </p:spPr>
-        <p:style>
-          <a:lnRef idx="1">
-            <a:schemeClr val="accent1"/>
-          </a:lnRef>
-          <a:fillRef idx="3">
-            <a:schemeClr val="accent1"/>
-          </a:fillRef>
-          <a:effectRef idx="2">
-            <a:schemeClr val="accent1"/>
-          </a:effectRef>
-          <a:fontRef idx="minor">
-            <a:schemeClr val="lt1"/>
-          </a:fontRef>
-        </p:style>
-        <p:txBody>
-          <a:bodyPr rtlCol="0" anchor="ctr" lIns="0" rIns="0" tIns="0" bIns="0"/>
-          <a:lstStyle/>
-          <a:p>
-            <a:pPr algn="ctr"/>
-            <a:r>
-              <a:rPr sz="1500" b="1">
-                <a:solidFill>
-                  <a:srgbClr val="202122"/>
-                </a:solidFill>
-                <a:latin typeface="Calibri"/>
-              </a:rPr>
-              <a:t>2</a:t>
-            </a:r>
-          </a:p>
-        </p:txBody>
-      </p:sp>
-      <p:sp>
-        <p:nvSpPr>
-          <p:cNvPr id="12" name="TextBox 11"/>
-          <p:cNvSpPr txBox="1"/>
-          <p:nvPr/>
-        </p:nvSpPr>
-        <p:spPr>
-          <a:xfrm>
-            <a:off x="5161178" y="1801368"/>
-            <a:ext cx="2509418" cy="512064"/>
-          </a:xfrm>
-          <a:prstGeom prst="rect">
-            <a:avLst/>
-          </a:prstGeom>
-          <a:noFill/>
-        </p:spPr>
-        <p:txBody>
-          <a:bodyPr wrap="square" anchor="ctr" lIns="0" rIns="0" tIns="0" bIns="0"/>
-          <a:lstStyle/>
-          <a:p>
-            <a:pPr algn="l"/>
-            <a:r>
-              <a:rPr sz="1900" b="1" i="0">
-                <a:solidFill>
-                  <a:srgbClr val="03306E"/>
-                </a:solidFill>
-                <a:latin typeface="Calibri"/>
-              </a:rPr>
-              <a:t>Server</a:t>
-            </a:r>
-          </a:p>
-        </p:txBody>
-      </p:sp>
-      <p:sp>
-        <p:nvSpPr>
           <p:cNvPr id="13" name="TextBox 12"/>
           <p:cNvSpPr txBox="1"/>
           <p:nvPr/>
         </p:nvSpPr>
         <p:spPr>
           <a:xfrm>
-            <a:off x="4566818" y="2468880"/>
-            <a:ext cx="3058058" cy="1143000"/>
+            <a:off x="6553047" y="2606040"/>
+            <a:ext cx="4815687" cy="3337560"/>
           </a:xfrm>
           <a:prstGeom prst="rect">
             <a:avLst/>
@@ -7476,507 +9951,92 @@
           <a:noFill/>
         </p:spPr>
         <p:txBody>
-          <a:bodyPr wrap="square" anchor="t" lIns="0" rIns="0" tIns="0" bIns="0"/>
-          <a:lstStyle/>
-          <a:p>
-            <a:pPr algn="l"/>
-            <a:r>
-              <a:rPr sz="2000" b="0" i="0">
+          <a:bodyPr wrap="square" lIns="0" rIns="0" tIns="0" bIns="0">
+            <a:spAutoFit/>
+          </a:bodyPr>
+          <a:lstStyle/>
+          <a:p>
+            <a:pPr marL="274320" indent="-274320">
+              <a:spcAft>
+                <a:spcPts val="990"/>
+              </a:spcAft>
+              <a:buClr>
+                <a:srgbClr val="0645AD"/>
+              </a:buClr>
+              <a:buFont typeface="Arial"/>
+              <a:buChar char="•"/>
+            </a:pPr>
+            <a:r>
+              <a:rPr sz="2200" b="0">
                 <a:solidFill>
                   <a:srgbClr val="202122"/>
                 </a:solidFill>
                 <a:latin typeface="Calibri"/>
               </a:rPr>
-              <a:t>Many servers on one host.</a:t>
-            </a:r>
-          </a:p>
-        </p:txBody>
-      </p:sp>
-      <p:sp>
-        <p:nvSpPr>
-          <p:cNvPr id="14" name="Rounded Rectangle 13"/>
-          <p:cNvSpPr/>
-          <p:nvPr/>
-        </p:nvSpPr>
-        <p:spPr>
-          <a:xfrm>
-            <a:off x="8127796" y="1600200"/>
-            <a:ext cx="3515258" cy="2148840"/>
-          </a:xfrm>
-          <a:prstGeom prst="roundRect">
-            <a:avLst>
-              <a:gd name="adj" fmla="val 6000"/>
-            </a:avLst>
-          </a:prstGeom>
-          <a:solidFill>
-            <a:srgbClr val="EAF3FF"/>
-          </a:solidFill>
-          <a:ln>
-            <a:noFill/>
-          </a:ln>
-          <a:effectLst/>
-        </p:spPr>
-        <p:style>
-          <a:lnRef idx="1">
-            <a:schemeClr val="accent1"/>
-          </a:lnRef>
-          <a:fillRef idx="3">
-            <a:schemeClr val="accent1"/>
-          </a:fillRef>
-          <a:effectRef idx="2">
-            <a:schemeClr val="accent1"/>
-          </a:effectRef>
-          <a:fontRef idx="minor">
-            <a:schemeClr val="lt1"/>
-          </a:fontRef>
-        </p:style>
-        <p:txBody>
-          <a:bodyPr rtlCol="0" anchor="ctr"/>
-          <a:lstStyle/>
-          <a:p/>
-        </p:txBody>
-      </p:sp>
-      <p:sp>
-        <p:nvSpPr>
-          <p:cNvPr id="15" name="Oval 14"/>
-          <p:cNvSpPr/>
-          <p:nvPr/>
-        </p:nvSpPr>
-        <p:spPr>
-          <a:xfrm>
-            <a:off x="8356396" y="1828800"/>
-            <a:ext cx="457200" cy="457200"/>
-          </a:xfrm>
-          <a:prstGeom prst="ellipse">
-            <a:avLst/>
-          </a:prstGeom>
-          <a:solidFill>
-            <a:srgbClr val="33C17A"/>
-          </a:solidFill>
-          <a:ln>
-            <a:noFill/>
-          </a:ln>
-          <a:effectLst/>
-        </p:spPr>
-        <p:style>
-          <a:lnRef idx="1">
-            <a:schemeClr val="accent1"/>
-          </a:lnRef>
-          <a:fillRef idx="3">
-            <a:schemeClr val="accent1"/>
-          </a:fillRef>
-          <a:effectRef idx="2">
-            <a:schemeClr val="accent1"/>
-          </a:effectRef>
-          <a:fontRef idx="minor">
-            <a:schemeClr val="lt1"/>
-          </a:fontRef>
-        </p:style>
-        <p:txBody>
-          <a:bodyPr rtlCol="0" anchor="ctr" lIns="0" rIns="0" tIns="0" bIns="0"/>
-          <a:lstStyle/>
-          <a:p>
-            <a:pPr algn="ctr"/>
-            <a:r>
-              <a:rPr sz="1500" b="1">
+              <a:t>A user interface and personalisation</a:t>
+            </a:r>
+          </a:p>
+          <a:p>
+            <a:pPr marL="274320" indent="-274320">
+              <a:spcAft>
+                <a:spcPts val="990"/>
+              </a:spcAft>
+              <a:buClr>
+                <a:srgbClr val="0645AD"/>
+              </a:buClr>
+              <a:buFont typeface="Arial"/>
+              <a:buChar char="•"/>
+            </a:pPr>
+            <a:r>
+              <a:rPr sz="2200" b="0">
                 <a:solidFill>
                   <a:srgbClr val="202122"/>
                 </a:solidFill>
                 <a:latin typeface="Calibri"/>
               </a:rPr>
-              <a:t>3</a:t>
-            </a:r>
-          </a:p>
-        </p:txBody>
-      </p:sp>
-      <p:sp>
-        <p:nvSpPr>
-          <p:cNvPr id="16" name="TextBox 15"/>
-          <p:cNvSpPr txBox="1"/>
-          <p:nvPr/>
-        </p:nvSpPr>
-        <p:spPr>
-          <a:xfrm>
-            <a:off x="8950756" y="1801368"/>
-            <a:ext cx="2509418" cy="512064"/>
-          </a:xfrm>
-          <a:prstGeom prst="rect">
-            <a:avLst/>
-          </a:prstGeom>
-          <a:noFill/>
-        </p:spPr>
-        <p:txBody>
-          <a:bodyPr wrap="square" anchor="ctr" lIns="0" rIns="0" tIns="0" bIns="0"/>
-          <a:lstStyle/>
-          <a:p>
-            <a:pPr algn="l"/>
-            <a:r>
-              <a:rPr sz="1900" b="1" i="0">
-                <a:solidFill>
-                  <a:srgbClr val="03306E"/>
-                </a:solidFill>
-                <a:latin typeface="Calibri"/>
-              </a:rPr>
-              <a:t>Desktop</a:t>
-            </a:r>
-          </a:p>
-        </p:txBody>
-      </p:sp>
-      <p:sp>
-        <p:nvSpPr>
-          <p:cNvPr id="17" name="TextBox 16"/>
-          <p:cNvSpPr txBox="1"/>
-          <p:nvPr/>
-        </p:nvSpPr>
-        <p:spPr>
-          <a:xfrm>
-            <a:off x="8356396" y="2468880"/>
-            <a:ext cx="3058058" cy="1143000"/>
-          </a:xfrm>
-          <a:prstGeom prst="rect">
-            <a:avLst/>
-          </a:prstGeom>
-          <a:noFill/>
-        </p:spPr>
-        <p:txBody>
-          <a:bodyPr wrap="square" anchor="t" lIns="0" rIns="0" tIns="0" bIns="0"/>
-          <a:lstStyle/>
-          <a:p>
-            <a:pPr algn="l"/>
-            <a:r>
-              <a:rPr sz="2000" b="0" i="0">
+              <a:t>Resource management</a:t>
+            </a:r>
+          </a:p>
+          <a:p>
+            <a:pPr marL="274320" indent="-274320">
+              <a:spcAft>
+                <a:spcPts val="990"/>
+              </a:spcAft>
+              <a:buClr>
+                <a:srgbClr val="0645AD"/>
+              </a:buClr>
+              <a:buFont typeface="Arial"/>
+              <a:buChar char="•"/>
+            </a:pPr>
+            <a:r>
+              <a:rPr sz="2200" b="0">
                 <a:solidFill>
                   <a:srgbClr val="202122"/>
                 </a:solidFill>
                 <a:latin typeface="Calibri"/>
               </a:rPr>
-              <a:t>Users' desktops hosted centrally.</a:t>
-            </a:r>
-          </a:p>
-        </p:txBody>
-      </p:sp>
-      <p:sp>
-        <p:nvSpPr>
-          <p:cNvPr id="18" name="Rounded Rectangle 17"/>
-          <p:cNvSpPr/>
-          <p:nvPr/>
-        </p:nvSpPr>
-        <p:spPr>
-          <a:xfrm>
-            <a:off x="548640" y="4023360"/>
-            <a:ext cx="3515258" cy="2148840"/>
-          </a:xfrm>
-          <a:prstGeom prst="roundRect">
-            <a:avLst>
-              <a:gd name="adj" fmla="val 6000"/>
-            </a:avLst>
-          </a:prstGeom>
-          <a:solidFill>
-            <a:srgbClr val="EAF3FF"/>
-          </a:solidFill>
-          <a:ln>
-            <a:noFill/>
-          </a:ln>
-          <a:effectLst/>
-        </p:spPr>
-        <p:style>
-          <a:lnRef idx="1">
-            <a:schemeClr val="accent1"/>
-          </a:lnRef>
-          <a:fillRef idx="3">
-            <a:schemeClr val="accent1"/>
-          </a:fillRef>
-          <a:effectRef idx="2">
-            <a:schemeClr val="accent1"/>
-          </a:effectRef>
-          <a:fontRef idx="minor">
-            <a:schemeClr val="lt1"/>
-          </a:fontRef>
-        </p:style>
-        <p:txBody>
-          <a:bodyPr rtlCol="0" anchor="ctr"/>
-          <a:lstStyle/>
-          <a:p/>
-        </p:txBody>
-      </p:sp>
-      <p:sp>
-        <p:nvSpPr>
-          <p:cNvPr id="19" name="Oval 18"/>
-          <p:cNvSpPr/>
-          <p:nvPr/>
-        </p:nvSpPr>
-        <p:spPr>
-          <a:xfrm>
-            <a:off x="777240" y="4251960"/>
-            <a:ext cx="457200" cy="457200"/>
-          </a:xfrm>
-          <a:prstGeom prst="ellipse">
-            <a:avLst/>
-          </a:prstGeom>
-          <a:solidFill>
-            <a:srgbClr val="33C17A"/>
-          </a:solidFill>
-          <a:ln>
-            <a:noFill/>
-          </a:ln>
-          <a:effectLst/>
-        </p:spPr>
-        <p:style>
-          <a:lnRef idx="1">
-            <a:schemeClr val="accent1"/>
-          </a:lnRef>
-          <a:fillRef idx="3">
-            <a:schemeClr val="accent1"/>
-          </a:fillRef>
-          <a:effectRef idx="2">
-            <a:schemeClr val="accent1"/>
-          </a:effectRef>
-          <a:fontRef idx="minor">
-            <a:schemeClr val="lt1"/>
-          </a:fontRef>
-        </p:style>
-        <p:txBody>
-          <a:bodyPr rtlCol="0" anchor="ctr" lIns="0" rIns="0" tIns="0" bIns="0"/>
-          <a:lstStyle/>
-          <a:p>
-            <a:pPr algn="ctr"/>
-            <a:r>
-              <a:rPr sz="1500" b="1">
+              <a:t>A platform for applications</a:t>
+            </a:r>
+          </a:p>
+          <a:p>
+            <a:pPr marL="274320" indent="-274320">
+              <a:spcAft>
+                <a:spcPts val="990"/>
+              </a:spcAft>
+              <a:buClr>
+                <a:srgbClr val="0645AD"/>
+              </a:buClr>
+              <a:buFont typeface="Arial"/>
+              <a:buChar char="•"/>
+            </a:pPr>
+            <a:r>
+              <a:rPr sz="2200" b="0">
                 <a:solidFill>
                   <a:srgbClr val="202122"/>
                 </a:solidFill>
                 <a:latin typeface="Calibri"/>
               </a:rPr>
-              <a:t>4</a:t>
-            </a:r>
-          </a:p>
-        </p:txBody>
-      </p:sp>
-      <p:sp>
-        <p:nvSpPr>
-          <p:cNvPr id="20" name="TextBox 19"/>
-          <p:cNvSpPr txBox="1"/>
-          <p:nvPr/>
-        </p:nvSpPr>
-        <p:spPr>
-          <a:xfrm>
-            <a:off x="1371600" y="4224528"/>
-            <a:ext cx="2509418" cy="512064"/>
-          </a:xfrm>
-          <a:prstGeom prst="rect">
-            <a:avLst/>
-          </a:prstGeom>
-          <a:noFill/>
-        </p:spPr>
-        <p:txBody>
-          <a:bodyPr wrap="square" anchor="ctr" lIns="0" rIns="0" tIns="0" bIns="0"/>
-          <a:lstStyle/>
-          <a:p>
-            <a:pPr algn="l"/>
-            <a:r>
-              <a:rPr sz="1900" b="1" i="0">
-                <a:solidFill>
-                  <a:srgbClr val="03306E"/>
-                </a:solidFill>
-                <a:latin typeface="Calibri"/>
-              </a:rPr>
-              <a:t>Operating system</a:t>
-            </a:r>
-          </a:p>
-        </p:txBody>
-      </p:sp>
-      <p:sp>
-        <p:nvSpPr>
-          <p:cNvPr id="21" name="TextBox 20"/>
-          <p:cNvSpPr txBox="1"/>
-          <p:nvPr/>
-        </p:nvSpPr>
-        <p:spPr>
-          <a:xfrm>
-            <a:off x="777240" y="4892040"/>
-            <a:ext cx="3058058" cy="1143000"/>
-          </a:xfrm>
-          <a:prstGeom prst="rect">
-            <a:avLst/>
-          </a:prstGeom>
-          <a:noFill/>
-        </p:spPr>
-        <p:txBody>
-          <a:bodyPr wrap="square" anchor="t" lIns="0" rIns="0" tIns="0" bIns="0"/>
-          <a:lstStyle/>
-          <a:p>
-            <a:pPr algn="l"/>
-            <a:r>
-              <a:rPr sz="2000" b="0" i="0">
-                <a:solidFill>
-                  <a:srgbClr val="202122"/>
-                </a:solidFill>
-                <a:latin typeface="Calibri"/>
-              </a:rPr>
-              <a:t>Several OSs on one machine.</a:t>
-            </a:r>
-          </a:p>
-        </p:txBody>
-      </p:sp>
-      <p:sp>
-        <p:nvSpPr>
-          <p:cNvPr id="22" name="Rounded Rectangle 21"/>
-          <p:cNvSpPr/>
-          <p:nvPr/>
-        </p:nvSpPr>
-        <p:spPr>
-          <a:xfrm>
-            <a:off x="4338218" y="4023360"/>
-            <a:ext cx="3515258" cy="2148840"/>
-          </a:xfrm>
-          <a:prstGeom prst="roundRect">
-            <a:avLst>
-              <a:gd name="adj" fmla="val 6000"/>
-            </a:avLst>
-          </a:prstGeom>
-          <a:solidFill>
-            <a:srgbClr val="EAF3FF"/>
-          </a:solidFill>
-          <a:ln>
-            <a:noFill/>
-          </a:ln>
-          <a:effectLst/>
-        </p:spPr>
-        <p:style>
-          <a:lnRef idx="1">
-            <a:schemeClr val="accent1"/>
-          </a:lnRef>
-          <a:fillRef idx="3">
-            <a:schemeClr val="accent1"/>
-          </a:fillRef>
-          <a:effectRef idx="2">
-            <a:schemeClr val="accent1"/>
-          </a:effectRef>
-          <a:fontRef idx="minor">
-            <a:schemeClr val="lt1"/>
-          </a:fontRef>
-        </p:style>
-        <p:txBody>
-          <a:bodyPr rtlCol="0" anchor="ctr"/>
-          <a:lstStyle/>
-          <a:p/>
-        </p:txBody>
-      </p:sp>
-      <p:sp>
-        <p:nvSpPr>
-          <p:cNvPr id="23" name="Oval 22"/>
-          <p:cNvSpPr/>
-          <p:nvPr/>
-        </p:nvSpPr>
-        <p:spPr>
-          <a:xfrm>
-            <a:off x="4566818" y="4251960"/>
-            <a:ext cx="457200" cy="457200"/>
-          </a:xfrm>
-          <a:prstGeom prst="ellipse">
-            <a:avLst/>
-          </a:prstGeom>
-          <a:solidFill>
-            <a:srgbClr val="33C17A"/>
-          </a:solidFill>
-          <a:ln>
-            <a:noFill/>
-          </a:ln>
-          <a:effectLst/>
-        </p:spPr>
-        <p:style>
-          <a:lnRef idx="1">
-            <a:schemeClr val="accent1"/>
-          </a:lnRef>
-          <a:fillRef idx="3">
-            <a:schemeClr val="accent1"/>
-          </a:fillRef>
-          <a:effectRef idx="2">
-            <a:schemeClr val="accent1"/>
-          </a:effectRef>
-          <a:fontRef idx="minor">
-            <a:schemeClr val="lt1"/>
-          </a:fontRef>
-        </p:style>
-        <p:txBody>
-          <a:bodyPr rtlCol="0" anchor="ctr" lIns="0" rIns="0" tIns="0" bIns="0"/>
-          <a:lstStyle/>
-          <a:p>
-            <a:pPr algn="ctr"/>
-            <a:r>
-              <a:rPr sz="1500" b="1">
-                <a:solidFill>
-                  <a:srgbClr val="202122"/>
-                </a:solidFill>
-                <a:latin typeface="Calibri"/>
-              </a:rPr>
-              <a:t>5</a:t>
-            </a:r>
-          </a:p>
-        </p:txBody>
-      </p:sp>
-      <p:sp>
-        <p:nvSpPr>
-          <p:cNvPr id="24" name="TextBox 23"/>
-          <p:cNvSpPr txBox="1"/>
-          <p:nvPr/>
-        </p:nvSpPr>
-        <p:spPr>
-          <a:xfrm>
-            <a:off x="5161178" y="4224528"/>
-            <a:ext cx="2509418" cy="512064"/>
-          </a:xfrm>
-          <a:prstGeom prst="rect">
-            <a:avLst/>
-          </a:prstGeom>
-          <a:noFill/>
-        </p:spPr>
-        <p:txBody>
-          <a:bodyPr wrap="square" anchor="ctr" lIns="0" rIns="0" tIns="0" bIns="0"/>
-          <a:lstStyle/>
-          <a:p>
-            <a:pPr algn="l"/>
-            <a:r>
-              <a:rPr sz="1900" b="1" i="0">
-                <a:solidFill>
-                  <a:srgbClr val="03306E"/>
-                </a:solidFill>
-                <a:latin typeface="Calibri"/>
-              </a:rPr>
-              <a:t>Data</a:t>
-            </a:r>
-          </a:p>
-        </p:txBody>
-      </p:sp>
-      <p:sp>
-        <p:nvSpPr>
-          <p:cNvPr id="25" name="TextBox 24"/>
-          <p:cNvSpPr txBox="1"/>
-          <p:nvPr/>
-        </p:nvSpPr>
-        <p:spPr>
-          <a:xfrm>
-            <a:off x="4566818" y="4892040"/>
-            <a:ext cx="3058058" cy="1143000"/>
-          </a:xfrm>
-          <a:prstGeom prst="rect">
-            <a:avLst/>
-          </a:prstGeom>
-          <a:noFill/>
-        </p:spPr>
-        <p:txBody>
-          <a:bodyPr wrap="square" anchor="t" lIns="0" rIns="0" tIns="0" bIns="0"/>
-          <a:lstStyle/>
-          <a:p>
-            <a:pPr algn="l"/>
-            <a:r>
-              <a:rPr sz="2000" b="0" i="0">
-                <a:solidFill>
-                  <a:srgbClr val="202122"/>
-                </a:solidFill>
-                <a:latin typeface="Calibri"/>
-              </a:rPr>
-              <a:t>One view of data held in many places.</a:t>
+              <a:t>They differ in features, UX and purpose</a:t>
             </a:r>
           </a:p>
         </p:txBody>
@@ -8068,7 +10128,7 @@
                 </a:solidFill>
                 <a:latin typeface="Cambria"/>
               </a:rPr>
-              <a:t>Check your understanding</a:t>
+              <a:t>Virtualisation concepts</a:t>
             </a:r>
           </a:p>
         </p:txBody>
@@ -8141,14 +10201,129 @@
       </p:sp>
       <p:sp>
         <p:nvSpPr>
-          <p:cNvPr id="6" name="Oval 5"/>
+          <p:cNvPr id="6" name="TextBox 5"/>
+          <p:cNvSpPr txBox="1"/>
+          <p:nvPr/>
+        </p:nvSpPr>
+        <p:spPr>
+          <a:xfrm>
+            <a:off x="548640" y="1554480"/>
+            <a:ext cx="6720840" cy="4617720"/>
+          </a:xfrm>
+          <a:prstGeom prst="rect">
+            <a:avLst/>
+          </a:prstGeom>
+          <a:noFill/>
+        </p:spPr>
+        <p:txBody>
+          <a:bodyPr wrap="square" lIns="0" rIns="0" tIns="0" bIns="0">
+            <a:spAutoFit/>
+          </a:bodyPr>
+          <a:lstStyle/>
+          <a:p>
+            <a:pPr>
+              <a:spcAft>
+                <a:spcPts val="1320"/>
+              </a:spcAft>
+            </a:pPr>
+            <a:r>
+              <a:rPr sz="2200" b="0">
+                <a:solidFill>
+                  <a:srgbClr val="202122"/>
+                </a:solidFill>
+                <a:latin typeface="Calibri"/>
+              </a:rPr>
+              <a:t>Virtualisation separates software from the physical hardware underneath.</a:t>
+            </a:r>
+          </a:p>
+          <a:p>
+            <a:pPr>
+              <a:spcAft>
+                <a:spcPts val="1320"/>
+              </a:spcAft>
+            </a:pPr>
+            <a:r>
+              <a:rPr sz="2200" b="0">
+                <a:solidFill>
+                  <a:srgbClr val="202122"/>
+                </a:solidFill>
+                <a:latin typeface="Calibri"/>
+              </a:rPr>
+              <a:t>Partitioning creates many virtual resources from one physical resource, or one virtual resource from many. Isolation keeps each virtual machine separate, so a crash or infection in one doesn't affect the others. Encapsulation stores a whole VM as a set of files that can be copied, backed up or moved. Hardware independence means a VM runs on any host with a compatible hypervisor.</a:t>
+            </a:r>
+          </a:p>
+          <a:p>
+            <a:pPr>
+              <a:spcAft>
+                <a:spcPts val="1320"/>
+              </a:spcAft>
+            </a:pPr>
+            <a:r>
+              <a:rPr sz="2200" b="0">
+                <a:solidFill>
+                  <a:srgbClr val="202122"/>
+                </a:solidFill>
+                <a:latin typeface="Calibri"/>
+              </a:rPr>
+              <a:t>Virtualisation can apply to networks, servers, desktops, operating systems and data.</a:t>
+            </a:r>
+          </a:p>
+        </p:txBody>
+      </p:sp>
+      <p:sp>
+        <p:nvSpPr>
+          <p:cNvPr id="7" name="Rounded Rectangle 6"/>
           <p:cNvSpPr/>
           <p:nvPr/>
         </p:nvSpPr>
         <p:spPr>
           <a:xfrm>
-            <a:off x="548640" y="1618488"/>
-            <a:ext cx="411480" cy="411480"/>
+            <a:off x="7772400" y="1554480"/>
+            <a:ext cx="3867912" cy="4526280"/>
+          </a:xfrm>
+          <a:prstGeom prst="roundRect">
+            <a:avLst>
+              <a:gd name="adj" fmla="val 8000"/>
+            </a:avLst>
+          </a:prstGeom>
+          <a:solidFill>
+            <a:srgbClr val="03306E"/>
+          </a:solidFill>
+          <a:ln>
+            <a:noFill/>
+          </a:ln>
+          <a:effectLst/>
+        </p:spPr>
+        <p:style>
+          <a:lnRef idx="1">
+            <a:schemeClr val="accent1"/>
+          </a:lnRef>
+          <a:fillRef idx="3">
+            <a:schemeClr val="accent1"/>
+          </a:fillRef>
+          <a:effectRef idx="2">
+            <a:schemeClr val="accent1"/>
+          </a:effectRef>
+          <a:fontRef idx="minor">
+            <a:schemeClr val="lt1"/>
+          </a:fontRef>
+        </p:style>
+        <p:txBody>
+          <a:bodyPr rtlCol="0" anchor="ctr"/>
+          <a:lstStyle/>
+          <a:p/>
+        </p:txBody>
+      </p:sp>
+      <p:sp>
+        <p:nvSpPr>
+          <p:cNvPr id="8" name="Oval 7"/>
+          <p:cNvSpPr/>
+          <p:nvPr/>
+        </p:nvSpPr>
+        <p:spPr>
+          <a:xfrm>
+            <a:off x="8046720" y="1828800"/>
+            <a:ext cx="548640" cy="548640"/>
           </a:xfrm>
           <a:prstGeom prst="ellipse">
             <a:avLst/>
@@ -8181,99 +10356,13 @@
           <a:p>
             <a:pPr algn="ctr"/>
             <a:r>
-              <a:rPr sz="1400" b="1">
+              <a:rPr sz="1300" b="1">
                 <a:solidFill>
                   <a:srgbClr val="202122"/>
                 </a:solidFill>
                 <a:latin typeface="Calibri"/>
               </a:rPr>
-              <a:t>1</a:t>
-            </a:r>
-          </a:p>
-        </p:txBody>
-      </p:sp>
-      <p:sp>
-        <p:nvSpPr>
-          <p:cNvPr id="7" name="TextBox 6"/>
-          <p:cNvSpPr txBox="1"/>
-          <p:nvPr/>
-        </p:nvSpPr>
-        <p:spPr>
-          <a:xfrm>
-            <a:off x="1234440" y="1600200"/>
-            <a:ext cx="10408615" cy="1030986"/>
-          </a:xfrm>
-          <a:prstGeom prst="rect">
-            <a:avLst/>
-          </a:prstGeom>
-          <a:noFill/>
-        </p:spPr>
-        <p:txBody>
-          <a:bodyPr wrap="square" anchor="t" lIns="0" rIns="0" tIns="0" bIns="0"/>
-          <a:lstStyle/>
-          <a:p>
-            <a:pPr algn="l"/>
-            <a:r>
-              <a:rPr sz="2200" b="0" i="0">
-                <a:solidFill>
-                  <a:srgbClr val="202122"/>
-                </a:solidFill>
-                <a:latin typeface="Calibri"/>
-              </a:rPr>
-              <a:t>Give one disadvantage of a physical server.</a:t>
-            </a:r>
-          </a:p>
-        </p:txBody>
-      </p:sp>
-      <p:sp>
-        <p:nvSpPr>
-          <p:cNvPr id="8" name="Oval 7"/>
-          <p:cNvSpPr/>
-          <p:nvPr/>
-        </p:nvSpPr>
-        <p:spPr>
-          <a:xfrm>
-            <a:off x="548640" y="2814066"/>
-            <a:ext cx="411480" cy="411480"/>
-          </a:xfrm>
-          <a:prstGeom prst="ellipse">
-            <a:avLst/>
-          </a:prstGeom>
-          <a:solidFill>
-            <a:srgbClr val="33C17A"/>
-          </a:solidFill>
-          <a:ln>
-            <a:noFill/>
-          </a:ln>
-          <a:effectLst/>
-        </p:spPr>
-        <p:style>
-          <a:lnRef idx="1">
-            <a:schemeClr val="accent1"/>
-          </a:lnRef>
-          <a:fillRef idx="3">
-            <a:schemeClr val="accent1"/>
-          </a:fillRef>
-          <a:effectRef idx="2">
-            <a:schemeClr val="accent1"/>
-          </a:effectRef>
-          <a:fontRef idx="minor">
-            <a:schemeClr val="lt1"/>
-          </a:fontRef>
-        </p:style>
-        <p:txBody>
-          <a:bodyPr rtlCol="0" anchor="ctr" lIns="0" rIns="0" tIns="0" bIns="0"/>
-          <a:lstStyle/>
-          <a:p>
-            <a:pPr algn="ctr"/>
-            <a:r>
-              <a:rPr sz="1400" b="1">
-                <a:solidFill>
-                  <a:srgbClr val="202122"/>
-                </a:solidFill>
-                <a:latin typeface="Calibri"/>
-              </a:rPr>
-              <a:t>2</a:t>
+              <a:t>e.g.</a:t>
             </a:r>
           </a:p>
         </p:txBody>
@@ -8286,8 +10375,8 @@
         </p:nvSpPr>
         <p:spPr>
           <a:xfrm>
-            <a:off x="1234440" y="2795778"/>
-            <a:ext cx="10408615" cy="1030986"/>
+            <a:off x="8046720" y="2560320"/>
+            <a:ext cx="3291840" cy="365760"/>
           </a:xfrm>
           <a:prstGeom prst="rect">
             <a:avLst/>
@@ -8300,80 +10389,27 @@
           <a:p>
             <a:pPr algn="l"/>
             <a:r>
-              <a:rPr sz="2200" b="0" i="0">
-                <a:solidFill>
-                  <a:srgbClr val="202122"/>
-                </a:solidFill>
-                <a:latin typeface="Calibri"/>
-              </a:rPr>
-              <a:t>Why are containers lightweight?</a:t>
-            </a:r>
-          </a:p>
-        </p:txBody>
-      </p:sp>
-      <p:sp>
-        <p:nvSpPr>
-          <p:cNvPr id="10" name="Oval 9"/>
-          <p:cNvSpPr/>
-          <p:nvPr/>
-        </p:nvSpPr>
-        <p:spPr>
-          <a:xfrm>
-            <a:off x="548640" y="4009644"/>
-            <a:ext cx="411480" cy="411480"/>
-          </a:xfrm>
-          <a:prstGeom prst="ellipse">
-            <a:avLst/>
-          </a:prstGeom>
-          <a:solidFill>
-            <a:srgbClr val="33C17A"/>
-          </a:solidFill>
-          <a:ln>
-            <a:noFill/>
-          </a:ln>
-          <a:effectLst/>
-        </p:spPr>
-        <p:style>
-          <a:lnRef idx="1">
-            <a:schemeClr val="accent1"/>
-          </a:lnRef>
-          <a:fillRef idx="3">
-            <a:schemeClr val="accent1"/>
-          </a:fillRef>
-          <a:effectRef idx="2">
-            <a:schemeClr val="accent1"/>
-          </a:effectRef>
-          <a:fontRef idx="minor">
-            <a:schemeClr val="lt1"/>
-          </a:fontRef>
-        </p:style>
-        <p:txBody>
-          <a:bodyPr rtlCol="0" anchor="ctr" lIns="0" rIns="0" tIns="0" bIns="0"/>
-          <a:lstStyle/>
-          <a:p>
-            <a:pPr algn="ctr"/>
-            <a:r>
-              <a:rPr sz="1400" b="1">
-                <a:solidFill>
-                  <a:srgbClr val="202122"/>
-                </a:solidFill>
-                <a:latin typeface="Calibri"/>
-              </a:rPr>
-              <a:t>3</a:t>
-            </a:r>
-          </a:p>
-        </p:txBody>
-      </p:sp>
-      <p:sp>
-        <p:nvSpPr>
-          <p:cNvPr id="11" name="TextBox 10"/>
+              <a:rPr sz="1300" b="1" i="0">
+                <a:solidFill>
+                  <a:srgbClr val="A9C8F0"/>
+                </a:solidFill>
+                <a:latin typeface="Calibri"/>
+              </a:rPr>
+              <a:t>EXAMPLE</a:t>
+            </a:r>
+          </a:p>
+        </p:txBody>
+      </p:sp>
+      <p:sp>
+        <p:nvSpPr>
+          <p:cNvPr id="10" name="TextBox 9"/>
           <p:cNvSpPr txBox="1"/>
           <p:nvPr/>
         </p:nvSpPr>
         <p:spPr>
           <a:xfrm>
-            <a:off x="1234440" y="3991356"/>
-            <a:ext cx="10408615" cy="1030986"/>
+            <a:off x="8046720" y="2971800"/>
+            <a:ext cx="3291840" cy="2971800"/>
           </a:xfrm>
           <a:prstGeom prst="rect">
             <a:avLst/>
@@ -8386,99 +10422,13 @@
           <a:p>
             <a:pPr algn="l"/>
             <a:r>
-              <a:rPr sz="2200" b="0" i="0">
-                <a:solidFill>
-                  <a:srgbClr val="202122"/>
-                </a:solidFill>
-                <a:latin typeface="Calibri"/>
-              </a:rPr>
-              <a:t>What does encapsulation mean in virtualisation?</a:t>
-            </a:r>
-          </a:p>
-        </p:txBody>
-      </p:sp>
-      <p:sp>
-        <p:nvSpPr>
-          <p:cNvPr id="12" name="Oval 11"/>
-          <p:cNvSpPr/>
-          <p:nvPr/>
-        </p:nvSpPr>
-        <p:spPr>
-          <a:xfrm>
-            <a:off x="548640" y="5205221"/>
-            <a:ext cx="411480" cy="411480"/>
-          </a:xfrm>
-          <a:prstGeom prst="ellipse">
-            <a:avLst/>
-          </a:prstGeom>
-          <a:solidFill>
-            <a:srgbClr val="33C17A"/>
-          </a:solidFill>
-          <a:ln>
-            <a:noFill/>
-          </a:ln>
-          <a:effectLst/>
-        </p:spPr>
-        <p:style>
-          <a:lnRef idx="1">
-            <a:schemeClr val="accent1"/>
-          </a:lnRef>
-          <a:fillRef idx="3">
-            <a:schemeClr val="accent1"/>
-          </a:fillRef>
-          <a:effectRef idx="2">
-            <a:schemeClr val="accent1"/>
-          </a:effectRef>
-          <a:fontRef idx="minor">
-            <a:schemeClr val="lt1"/>
-          </a:fontRef>
-        </p:style>
-        <p:txBody>
-          <a:bodyPr rtlCol="0" anchor="ctr" lIns="0" rIns="0" tIns="0" bIns="0"/>
-          <a:lstStyle/>
-          <a:p>
-            <a:pPr algn="ctr"/>
-            <a:r>
-              <a:rPr sz="1400" b="1">
-                <a:solidFill>
-                  <a:srgbClr val="202122"/>
-                </a:solidFill>
-                <a:latin typeface="Calibri"/>
-              </a:rPr>
-              <a:t>4</a:t>
-            </a:r>
-          </a:p>
-        </p:txBody>
-      </p:sp>
-      <p:sp>
-        <p:nvSpPr>
-          <p:cNvPr id="13" name="TextBox 12"/>
-          <p:cNvSpPr txBox="1"/>
-          <p:nvPr/>
-        </p:nvSpPr>
-        <p:spPr>
-          <a:xfrm>
-            <a:off x="1234440" y="5186933"/>
-            <a:ext cx="10408615" cy="1030986"/>
-          </a:xfrm>
-          <a:prstGeom prst="rect">
-            <a:avLst/>
-          </a:prstGeom>
-          <a:noFill/>
-        </p:spPr>
-        <p:txBody>
-          <a:bodyPr wrap="square" anchor="t" lIns="0" rIns="0" tIns="0" bIns="0"/>
-          <a:lstStyle/>
-          <a:p>
-            <a:pPr algn="l"/>
-            <a:r>
-              <a:rPr sz="2200" b="0" i="0">
-                <a:solidFill>
-                  <a:srgbClr val="202122"/>
-                </a:solidFill>
-                <a:latin typeface="Calibri"/>
-              </a:rPr>
-              <a:t>Name a server operating system.</a:t>
+              <a:rPr sz="1900" b="0" i="0">
+                <a:solidFill>
+                  <a:srgbClr val="FFFFFF"/>
+                </a:solidFill>
+                <a:latin typeface="Cambria"/>
+              </a:rPr>
+              <a:t>Because a VM is just files (encapsulation), a failing host's VMs can be moved to another host and restarted in minutes.</a:t>
             </a:r>
           </a:p>
         </p:txBody>
@@ -8570,7 +10520,7 @@
                 </a:solidFill>
                 <a:latin typeface="Cambria"/>
               </a:rPr>
-              <a:t>Answers</a:t>
+              <a:t>Virtualisation concepts</a:t>
             </a:r>
           </a:p>
         </p:txBody>
@@ -8643,14 +10593,58 @@
       </p:sp>
       <p:sp>
         <p:nvSpPr>
-          <p:cNvPr id="6" name="Oval 5"/>
+          <p:cNvPr id="6" name="Rounded Rectangle 5"/>
           <p:cNvSpPr/>
           <p:nvPr/>
         </p:nvSpPr>
         <p:spPr>
           <a:xfrm>
-            <a:off x="548640" y="1618488"/>
-            <a:ext cx="411480" cy="411480"/>
+            <a:off x="548640" y="1600200"/>
+            <a:ext cx="5410047" cy="2148840"/>
+          </a:xfrm>
+          <a:prstGeom prst="roundRect">
+            <a:avLst>
+              <a:gd name="adj" fmla="val 6000"/>
+            </a:avLst>
+          </a:prstGeom>
+          <a:solidFill>
+            <a:srgbClr val="EAF3FF"/>
+          </a:solidFill>
+          <a:ln>
+            <a:noFill/>
+          </a:ln>
+          <a:effectLst/>
+        </p:spPr>
+        <p:style>
+          <a:lnRef idx="1">
+            <a:schemeClr val="accent1"/>
+          </a:lnRef>
+          <a:fillRef idx="3">
+            <a:schemeClr val="accent1"/>
+          </a:fillRef>
+          <a:effectRef idx="2">
+            <a:schemeClr val="accent1"/>
+          </a:effectRef>
+          <a:fontRef idx="minor">
+            <a:schemeClr val="lt1"/>
+          </a:fontRef>
+        </p:style>
+        <p:txBody>
+          <a:bodyPr rtlCol="0" anchor="ctr"/>
+          <a:lstStyle/>
+          <a:p/>
+        </p:txBody>
+      </p:sp>
+      <p:sp>
+        <p:nvSpPr>
+          <p:cNvPr id="7" name="Oval 6"/>
+          <p:cNvSpPr/>
+          <p:nvPr/>
+        </p:nvSpPr>
+        <p:spPr>
+          <a:xfrm>
+            <a:off x="777240" y="1828800"/>
+            <a:ext cx="457200" cy="457200"/>
           </a:xfrm>
           <a:prstGeom prst="ellipse">
             <a:avLst/>
@@ -8683,7 +10677,7 @@
           <a:p>
             <a:pPr algn="ctr"/>
             <a:r>
-              <a:rPr sz="1400" b="1">
+              <a:rPr sz="1500" b="1">
                 <a:solidFill>
                   <a:srgbClr val="202122"/>
                 </a:solidFill>
@@ -8696,14 +10690,14 @@
       </p:sp>
       <p:sp>
         <p:nvSpPr>
-          <p:cNvPr id="7" name="TextBox 6"/>
+          <p:cNvPr id="8" name="TextBox 7"/>
           <p:cNvSpPr txBox="1"/>
           <p:nvPr/>
         </p:nvSpPr>
         <p:spPr>
           <a:xfrm>
-            <a:off x="1234440" y="1600200"/>
-            <a:ext cx="10408615" cy="1030986"/>
+            <a:off x="1371600" y="1801368"/>
+            <a:ext cx="4404207" cy="512064"/>
           </a:xfrm>
           <a:prstGeom prst="rect">
             <a:avLst/>
@@ -8711,43 +10705,109 @@
           <a:noFill/>
         </p:spPr>
         <p:txBody>
+          <a:bodyPr wrap="square" anchor="ctr" lIns="0" rIns="0" tIns="0" bIns="0"/>
+          <a:lstStyle/>
+          <a:p>
+            <a:pPr algn="l"/>
+            <a:r>
+              <a:rPr sz="1900" b="1" i="0">
+                <a:solidFill>
+                  <a:srgbClr val="03306E"/>
+                </a:solidFill>
+                <a:latin typeface="Calibri"/>
+              </a:rPr>
+              <a:t>Partitioning</a:t>
+            </a:r>
+          </a:p>
+        </p:txBody>
+      </p:sp>
+      <p:sp>
+        <p:nvSpPr>
+          <p:cNvPr id="9" name="TextBox 8"/>
+          <p:cNvSpPr txBox="1"/>
+          <p:nvPr/>
+        </p:nvSpPr>
+        <p:spPr>
+          <a:xfrm>
+            <a:off x="777240" y="2468880"/>
+            <a:ext cx="4952847" cy="1143000"/>
+          </a:xfrm>
+          <a:prstGeom prst="rect">
+            <a:avLst/>
+          </a:prstGeom>
+          <a:noFill/>
+        </p:spPr>
+        <p:txBody>
           <a:bodyPr wrap="square" anchor="t" lIns="0" rIns="0" tIns="0" bIns="0"/>
           <a:lstStyle/>
           <a:p>
             <a:pPr algn="l"/>
             <a:r>
-              <a:rPr sz="1800" b="0" i="0">
-                <a:solidFill>
-                  <a:srgbClr val="54595D"/>
-                </a:solidFill>
-                <a:latin typeface="Calibri"/>
-              </a:rPr>
-              <a:t>Give one disadvantage of a physical server.</a:t>
-            </a:r>
-          </a:p>
-          <a:p>
-            <a:r>
-              <a:rPr sz="1800" b="1">
-                <a:solidFill>
-                  <a:srgbClr val="03306E"/>
-                </a:solidFill>
-                <a:latin typeface="Calibri"/>
-              </a:rPr>
-              <a:t>E.g. expensive, hard to scale, needs physical space.</a:t>
-            </a:r>
-          </a:p>
-        </p:txBody>
-      </p:sp>
-      <p:sp>
-        <p:nvSpPr>
-          <p:cNvPr id="8" name="Oval 7"/>
+              <a:rPr sz="2000" b="0" i="0">
+                <a:solidFill>
+                  <a:srgbClr val="202122"/>
+                </a:solidFill>
+                <a:latin typeface="Calibri"/>
+              </a:rPr>
+              <a:t>Many virtual resources from one physical resource, or one from many.</a:t>
+            </a:r>
+          </a:p>
+        </p:txBody>
+      </p:sp>
+      <p:sp>
+        <p:nvSpPr>
+          <p:cNvPr id="10" name="Rounded Rectangle 9"/>
           <p:cNvSpPr/>
           <p:nvPr/>
         </p:nvSpPr>
         <p:spPr>
           <a:xfrm>
-            <a:off x="548640" y="2814066"/>
-            <a:ext cx="411480" cy="411480"/>
+            <a:off x="6233007" y="1600200"/>
+            <a:ext cx="5410047" cy="2148840"/>
+          </a:xfrm>
+          <a:prstGeom prst="roundRect">
+            <a:avLst>
+              <a:gd name="adj" fmla="val 6000"/>
+            </a:avLst>
+          </a:prstGeom>
+          <a:solidFill>
+            <a:srgbClr val="EAF3FF"/>
+          </a:solidFill>
+          <a:ln>
+            <a:noFill/>
+          </a:ln>
+          <a:effectLst/>
+        </p:spPr>
+        <p:style>
+          <a:lnRef idx="1">
+            <a:schemeClr val="accent1"/>
+          </a:lnRef>
+          <a:fillRef idx="3">
+            <a:schemeClr val="accent1"/>
+          </a:fillRef>
+          <a:effectRef idx="2">
+            <a:schemeClr val="accent1"/>
+          </a:effectRef>
+          <a:fontRef idx="minor">
+            <a:schemeClr val="lt1"/>
+          </a:fontRef>
+        </p:style>
+        <p:txBody>
+          <a:bodyPr rtlCol="0" anchor="ctr"/>
+          <a:lstStyle/>
+          <a:p/>
+        </p:txBody>
+      </p:sp>
+      <p:sp>
+        <p:nvSpPr>
+          <p:cNvPr id="11" name="Oval 10"/>
+          <p:cNvSpPr/>
+          <p:nvPr/>
+        </p:nvSpPr>
+        <p:spPr>
+          <a:xfrm>
+            <a:off x="6461607" y="1828800"/>
+            <a:ext cx="457200" cy="457200"/>
           </a:xfrm>
           <a:prstGeom prst="ellipse">
             <a:avLst/>
@@ -8780,7 +10840,7 @@
           <a:p>
             <a:pPr algn="ctr"/>
             <a:r>
-              <a:rPr sz="1400" b="1">
+              <a:rPr sz="1500" b="1">
                 <a:solidFill>
                   <a:srgbClr val="202122"/>
                 </a:solidFill>
@@ -8793,14 +10853,14 @@
       </p:sp>
       <p:sp>
         <p:nvSpPr>
-          <p:cNvPr id="9" name="TextBox 8"/>
+          <p:cNvPr id="12" name="TextBox 11"/>
           <p:cNvSpPr txBox="1"/>
           <p:nvPr/>
         </p:nvSpPr>
         <p:spPr>
           <a:xfrm>
-            <a:off x="1234440" y="2795778"/>
-            <a:ext cx="10408615" cy="1030986"/>
+            <a:off x="7055967" y="1801368"/>
+            <a:ext cx="4404207" cy="512064"/>
           </a:xfrm>
           <a:prstGeom prst="rect">
             <a:avLst/>
@@ -8808,43 +10868,109 @@
           <a:noFill/>
         </p:spPr>
         <p:txBody>
+          <a:bodyPr wrap="square" anchor="ctr" lIns="0" rIns="0" tIns="0" bIns="0"/>
+          <a:lstStyle/>
+          <a:p>
+            <a:pPr algn="l"/>
+            <a:r>
+              <a:rPr sz="1900" b="1" i="0">
+                <a:solidFill>
+                  <a:srgbClr val="03306E"/>
+                </a:solidFill>
+                <a:latin typeface="Calibri"/>
+              </a:rPr>
+              <a:t>Isolation</a:t>
+            </a:r>
+          </a:p>
+        </p:txBody>
+      </p:sp>
+      <p:sp>
+        <p:nvSpPr>
+          <p:cNvPr id="13" name="TextBox 12"/>
+          <p:cNvSpPr txBox="1"/>
+          <p:nvPr/>
+        </p:nvSpPr>
+        <p:spPr>
+          <a:xfrm>
+            <a:off x="6461607" y="2468880"/>
+            <a:ext cx="4952847" cy="1143000"/>
+          </a:xfrm>
+          <a:prstGeom prst="rect">
+            <a:avLst/>
+          </a:prstGeom>
+          <a:noFill/>
+        </p:spPr>
+        <p:txBody>
           <a:bodyPr wrap="square" anchor="t" lIns="0" rIns="0" tIns="0" bIns="0"/>
           <a:lstStyle/>
           <a:p>
             <a:pPr algn="l"/>
             <a:r>
-              <a:rPr sz="1800" b="0" i="0">
-                <a:solidFill>
-                  <a:srgbClr val="54595D"/>
-                </a:solidFill>
-                <a:latin typeface="Calibri"/>
-              </a:rPr>
-              <a:t>Why are containers lightweight?</a:t>
-            </a:r>
-          </a:p>
-          <a:p>
-            <a:r>
-              <a:rPr sz="1800" b="1">
-                <a:solidFill>
-                  <a:srgbClr val="03306E"/>
-                </a:solidFill>
-                <a:latin typeface="Calibri"/>
-              </a:rPr>
-              <a:t>They carry only what the application needs and share the host OS kernel.</a:t>
-            </a:r>
-          </a:p>
-        </p:txBody>
-      </p:sp>
-      <p:sp>
-        <p:nvSpPr>
-          <p:cNvPr id="10" name="Oval 9"/>
+              <a:rPr sz="2000" b="0" i="0">
+                <a:solidFill>
+                  <a:srgbClr val="202122"/>
+                </a:solidFill>
+                <a:latin typeface="Calibri"/>
+              </a:rPr>
+              <a:t>Each virtual machine is separated from the others.</a:t>
+            </a:r>
+          </a:p>
+        </p:txBody>
+      </p:sp>
+      <p:sp>
+        <p:nvSpPr>
+          <p:cNvPr id="14" name="Rounded Rectangle 13"/>
           <p:cNvSpPr/>
           <p:nvPr/>
         </p:nvSpPr>
         <p:spPr>
           <a:xfrm>
-            <a:off x="548640" y="4009644"/>
-            <a:ext cx="411480" cy="411480"/>
+            <a:off x="548640" y="4023360"/>
+            <a:ext cx="5410047" cy="2148840"/>
+          </a:xfrm>
+          <a:prstGeom prst="roundRect">
+            <a:avLst>
+              <a:gd name="adj" fmla="val 6000"/>
+            </a:avLst>
+          </a:prstGeom>
+          <a:solidFill>
+            <a:srgbClr val="EAF3FF"/>
+          </a:solidFill>
+          <a:ln>
+            <a:noFill/>
+          </a:ln>
+          <a:effectLst/>
+        </p:spPr>
+        <p:style>
+          <a:lnRef idx="1">
+            <a:schemeClr val="accent1"/>
+          </a:lnRef>
+          <a:fillRef idx="3">
+            <a:schemeClr val="accent1"/>
+          </a:fillRef>
+          <a:effectRef idx="2">
+            <a:schemeClr val="accent1"/>
+          </a:effectRef>
+          <a:fontRef idx="minor">
+            <a:schemeClr val="lt1"/>
+          </a:fontRef>
+        </p:style>
+        <p:txBody>
+          <a:bodyPr rtlCol="0" anchor="ctr"/>
+          <a:lstStyle/>
+          <a:p/>
+        </p:txBody>
+      </p:sp>
+      <p:sp>
+        <p:nvSpPr>
+          <p:cNvPr id="15" name="Oval 14"/>
+          <p:cNvSpPr/>
+          <p:nvPr/>
+        </p:nvSpPr>
+        <p:spPr>
+          <a:xfrm>
+            <a:off x="777240" y="4251960"/>
+            <a:ext cx="457200" cy="457200"/>
           </a:xfrm>
           <a:prstGeom prst="ellipse">
             <a:avLst/>
@@ -8877,7 +11003,7 @@
           <a:p>
             <a:pPr algn="ctr"/>
             <a:r>
-              <a:rPr sz="1400" b="1">
+              <a:rPr sz="1500" b="1">
                 <a:solidFill>
                   <a:srgbClr val="202122"/>
                 </a:solidFill>
@@ -8890,14 +11016,14 @@
       </p:sp>
       <p:sp>
         <p:nvSpPr>
-          <p:cNvPr id="11" name="TextBox 10"/>
+          <p:cNvPr id="16" name="TextBox 15"/>
           <p:cNvSpPr txBox="1"/>
           <p:nvPr/>
         </p:nvSpPr>
         <p:spPr>
           <a:xfrm>
-            <a:off x="1234440" y="3991356"/>
-            <a:ext cx="10408615" cy="1030986"/>
+            <a:off x="1371600" y="4224528"/>
+            <a:ext cx="4404207" cy="512064"/>
           </a:xfrm>
           <a:prstGeom prst="rect">
             <a:avLst/>
@@ -8905,43 +11031,109 @@
           <a:noFill/>
         </p:spPr>
         <p:txBody>
+          <a:bodyPr wrap="square" anchor="ctr" lIns="0" rIns="0" tIns="0" bIns="0"/>
+          <a:lstStyle/>
+          <a:p>
+            <a:pPr algn="l"/>
+            <a:r>
+              <a:rPr sz="1900" b="1" i="0">
+                <a:solidFill>
+                  <a:srgbClr val="03306E"/>
+                </a:solidFill>
+                <a:latin typeface="Calibri"/>
+              </a:rPr>
+              <a:t>Encapsulation</a:t>
+            </a:r>
+          </a:p>
+        </p:txBody>
+      </p:sp>
+      <p:sp>
+        <p:nvSpPr>
+          <p:cNvPr id="17" name="TextBox 16"/>
+          <p:cNvSpPr txBox="1"/>
+          <p:nvPr/>
+        </p:nvSpPr>
+        <p:spPr>
+          <a:xfrm>
+            <a:off x="777240" y="4892040"/>
+            <a:ext cx="4952847" cy="1143000"/>
+          </a:xfrm>
+          <a:prstGeom prst="rect">
+            <a:avLst/>
+          </a:prstGeom>
+          <a:noFill/>
+        </p:spPr>
+        <p:txBody>
           <a:bodyPr wrap="square" anchor="t" lIns="0" rIns="0" tIns="0" bIns="0"/>
           <a:lstStyle/>
           <a:p>
             <a:pPr algn="l"/>
             <a:r>
-              <a:rPr sz="1800" b="0" i="0">
-                <a:solidFill>
-                  <a:srgbClr val="54595D"/>
-                </a:solidFill>
-                <a:latin typeface="Calibri"/>
-              </a:rPr>
-              <a:t>What does encapsulation mean in virtualisation?</a:t>
-            </a:r>
-          </a:p>
-          <a:p>
-            <a:r>
-              <a:rPr sz="1800" b="1">
-                <a:solidFill>
-                  <a:srgbClr val="03306E"/>
-                </a:solidFill>
-                <a:latin typeface="Calibri"/>
-              </a:rPr>
-              <a:t>The whole VM is stored as files that can be moved or copied.</a:t>
-            </a:r>
-          </a:p>
-        </p:txBody>
-      </p:sp>
-      <p:sp>
-        <p:nvSpPr>
-          <p:cNvPr id="12" name="Oval 11"/>
+              <a:rPr sz="2000" b="0" i="0">
+                <a:solidFill>
+                  <a:srgbClr val="202122"/>
+                </a:solidFill>
+                <a:latin typeface="Calibri"/>
+              </a:rPr>
+              <a:t>A whole VM is saved as files that can be copied or moved.</a:t>
+            </a:r>
+          </a:p>
+        </p:txBody>
+      </p:sp>
+      <p:sp>
+        <p:nvSpPr>
+          <p:cNvPr id="18" name="Rounded Rectangle 17"/>
           <p:cNvSpPr/>
           <p:nvPr/>
         </p:nvSpPr>
         <p:spPr>
           <a:xfrm>
-            <a:off x="548640" y="5205221"/>
-            <a:ext cx="411480" cy="411480"/>
+            <a:off x="6233007" y="4023360"/>
+            <a:ext cx="5410047" cy="2148840"/>
+          </a:xfrm>
+          <a:prstGeom prst="roundRect">
+            <a:avLst>
+              <a:gd name="adj" fmla="val 6000"/>
+            </a:avLst>
+          </a:prstGeom>
+          <a:solidFill>
+            <a:srgbClr val="EAF3FF"/>
+          </a:solidFill>
+          <a:ln>
+            <a:noFill/>
+          </a:ln>
+          <a:effectLst/>
+        </p:spPr>
+        <p:style>
+          <a:lnRef idx="1">
+            <a:schemeClr val="accent1"/>
+          </a:lnRef>
+          <a:fillRef idx="3">
+            <a:schemeClr val="accent1"/>
+          </a:fillRef>
+          <a:effectRef idx="2">
+            <a:schemeClr val="accent1"/>
+          </a:effectRef>
+          <a:fontRef idx="minor">
+            <a:schemeClr val="lt1"/>
+          </a:fontRef>
+        </p:style>
+        <p:txBody>
+          <a:bodyPr rtlCol="0" anchor="ctr"/>
+          <a:lstStyle/>
+          <a:p/>
+        </p:txBody>
+      </p:sp>
+      <p:sp>
+        <p:nvSpPr>
+          <p:cNvPr id="19" name="Oval 18"/>
+          <p:cNvSpPr/>
+          <p:nvPr/>
+        </p:nvSpPr>
+        <p:spPr>
+          <a:xfrm>
+            <a:off x="6461607" y="4251960"/>
+            <a:ext cx="457200" cy="457200"/>
           </a:xfrm>
           <a:prstGeom prst="ellipse">
             <a:avLst/>
@@ -8974,7 +11166,7 @@
           <a:p>
             <a:pPr algn="ctr"/>
             <a:r>
-              <a:rPr sz="1400" b="1">
+              <a:rPr sz="1500" b="1">
                 <a:solidFill>
                   <a:srgbClr val="202122"/>
                 </a:solidFill>
@@ -8987,14 +11179,14 @@
       </p:sp>
       <p:sp>
         <p:nvSpPr>
-          <p:cNvPr id="13" name="TextBox 12"/>
+          <p:cNvPr id="20" name="TextBox 19"/>
           <p:cNvSpPr txBox="1"/>
           <p:nvPr/>
         </p:nvSpPr>
         <p:spPr>
           <a:xfrm>
-            <a:off x="1234440" y="5186933"/>
-            <a:ext cx="10408615" cy="1030986"/>
+            <a:off x="7055967" y="4224528"/>
+            <a:ext cx="4404207" cy="512064"/>
           </a:xfrm>
           <a:prstGeom prst="rect">
             <a:avLst/>
@@ -9002,29 +11194,51 @@
           <a:noFill/>
         </p:spPr>
         <p:txBody>
+          <a:bodyPr wrap="square" anchor="ctr" lIns="0" rIns="0" tIns="0" bIns="0"/>
+          <a:lstStyle/>
+          <a:p>
+            <a:pPr algn="l"/>
+            <a:r>
+              <a:rPr sz="1900" b="1" i="0">
+                <a:solidFill>
+                  <a:srgbClr val="03306E"/>
+                </a:solidFill>
+                <a:latin typeface="Calibri"/>
+              </a:rPr>
+              <a:t>Hardware independence</a:t>
+            </a:r>
+          </a:p>
+        </p:txBody>
+      </p:sp>
+      <p:sp>
+        <p:nvSpPr>
+          <p:cNvPr id="21" name="TextBox 20"/>
+          <p:cNvSpPr txBox="1"/>
+          <p:nvPr/>
+        </p:nvSpPr>
+        <p:spPr>
+          <a:xfrm>
+            <a:off x="6461607" y="4892040"/>
+            <a:ext cx="4952847" cy="1143000"/>
+          </a:xfrm>
+          <a:prstGeom prst="rect">
+            <a:avLst/>
+          </a:prstGeom>
+          <a:noFill/>
+        </p:spPr>
+        <p:txBody>
           <a:bodyPr wrap="square" anchor="t" lIns="0" rIns="0" tIns="0" bIns="0"/>
           <a:lstStyle/>
           <a:p>
             <a:pPr algn="l"/>
             <a:r>
-              <a:rPr sz="1800" b="0" i="0">
-                <a:solidFill>
-                  <a:srgbClr val="54595D"/>
-                </a:solidFill>
-                <a:latin typeface="Calibri"/>
-              </a:rPr>
-              <a:t>Name a server operating system.</a:t>
-            </a:r>
-          </a:p>
-          <a:p>
-            <a:r>
-              <a:rPr sz="1800" b="1">
-                <a:solidFill>
-                  <a:srgbClr val="03306E"/>
-                </a:solidFill>
-                <a:latin typeface="Calibri"/>
-              </a:rPr>
-              <a:t>Linux or Windows Server.</a:t>
+              <a:rPr sz="2000" b="0" i="0">
+                <a:solidFill>
+                  <a:srgbClr val="202122"/>
+                </a:solidFill>
+                <a:latin typeface="Calibri"/>
+              </a:rPr>
+              <a:t>VMs run on any host with a compatible hypervisor.</a:t>
             </a:r>
           </a:p>
         </p:txBody>
@@ -9116,7 +11330,7 @@
                 </a:solidFill>
                 <a:latin typeface="Cambria"/>
               </a:rPr>
-              <a:t>Activity: Build a virtual lab</a:t>
+              <a:t>Quick check: Virtualisation concepts</a:t>
             </a:r>
           </a:p>
         </p:txBody>
@@ -9189,19 +11403,17 @@
       </p:sp>
       <p:sp>
         <p:nvSpPr>
-          <p:cNvPr id="6" name="Rounded Rectangle 5"/>
+          <p:cNvPr id="6" name="Oval 5"/>
           <p:cNvSpPr/>
           <p:nvPr/>
         </p:nvSpPr>
         <p:spPr>
           <a:xfrm>
-            <a:off x="548640" y="1508760"/>
-            <a:ext cx="2011680" cy="457200"/>
-          </a:xfrm>
-          <a:prstGeom prst="roundRect">
-            <a:avLst>
-              <a:gd name="adj" fmla="val 50000"/>
-            </a:avLst>
+            <a:off x="548640" y="1691640"/>
+            <a:ext cx="502920" cy="502920"/>
+          </a:xfrm>
+          <a:prstGeom prst="ellipse">
+            <a:avLst/>
           </a:prstGeom>
           <a:solidFill>
             <a:srgbClr val="33C17A"/>
@@ -9226,9 +11438,20 @@
           </a:fontRef>
         </p:style>
         <p:txBody>
-          <a:bodyPr rtlCol="0" anchor="ctr"/>
-          <a:lstStyle/>
-          <a:p/>
+          <a:bodyPr rtlCol="0" anchor="ctr" lIns="0" rIns="0" tIns="0" bIns="0"/>
+          <a:lstStyle/>
+          <a:p>
+            <a:pPr algn="ctr"/>
+            <a:r>
+              <a:rPr sz="1600" b="1">
+                <a:solidFill>
+                  <a:srgbClr val="202122"/>
+                </a:solidFill>
+                <a:latin typeface="Calibri"/>
+              </a:rPr>
+              <a:t>1</a:t>
+            </a:r>
+          </a:p>
         </p:txBody>
       </p:sp>
       <p:sp>
@@ -9239,8 +11462,8 @@
         </p:nvSpPr>
         <p:spPr>
           <a:xfrm>
-            <a:off x="548640" y="1508760"/>
-            <a:ext cx="2011680" cy="457200"/>
+            <a:off x="1371600" y="1645920"/>
+            <a:ext cx="10271455" cy="1188720"/>
           </a:xfrm>
           <a:prstGeom prst="rect">
             <a:avLst/>
@@ -9248,71 +11471,38 @@
           <a:noFill/>
         </p:spPr>
         <p:txBody>
-          <a:bodyPr wrap="square" anchor="ctr" lIns="0" rIns="0" tIns="0" bIns="0"/>
-          <a:lstStyle/>
-          <a:p>
-            <a:pPr algn="ctr"/>
-            <a:r>
-              <a:rPr sz="1400" b="1" i="0">
+          <a:bodyPr wrap="square" anchor="t" lIns="0" rIns="0" tIns="0" bIns="0"/>
+          <a:lstStyle/>
+          <a:p>
+            <a:pPr algn="l"/>
+            <a:r>
+              <a:rPr sz="2400" b="0" i="0">
                 <a:solidFill>
                   <a:srgbClr val="202122"/>
                 </a:solidFill>
                 <a:latin typeface="Calibri"/>
               </a:rPr>
-              <a:t>40 minutes</a:t>
-            </a:r>
-          </a:p>
-        </p:txBody>
-      </p:sp>
-      <p:sp>
-        <p:nvSpPr>
-          <p:cNvPr id="8" name="TextBox 7"/>
-          <p:cNvSpPr txBox="1"/>
-          <p:nvPr/>
-        </p:nvSpPr>
-        <p:spPr>
-          <a:xfrm>
-            <a:off x="2743200" y="1508760"/>
-            <a:ext cx="4754880" cy="457200"/>
-          </a:xfrm>
-          <a:prstGeom prst="rect">
-            <a:avLst/>
-          </a:prstGeom>
-          <a:noFill/>
-        </p:spPr>
-        <p:txBody>
-          <a:bodyPr wrap="square" anchor="ctr" lIns="0" rIns="0" tIns="0" bIns="0"/>
-          <a:lstStyle/>
-          <a:p>
-            <a:pPr algn="l"/>
-            <a:r>
-              <a:rPr sz="1400" b="0" i="1">
-                <a:solidFill>
-                  <a:srgbClr val="54595D"/>
-                </a:solidFill>
-                <a:latin typeface="Calibri"/>
-              </a:rPr>
-              <a:t>Pairs, on a lab PC</a:t>
-            </a:r>
-          </a:p>
-        </p:txBody>
-      </p:sp>
-      <p:sp>
-        <p:nvSpPr>
-          <p:cNvPr id="9" name="Oval 8"/>
+              <a:t>What is encapsulation in virtualisation?</a:t>
+            </a:r>
+          </a:p>
+        </p:txBody>
+      </p:sp>
+      <p:sp>
+        <p:nvSpPr>
+          <p:cNvPr id="8" name="Oval 7"/>
           <p:cNvSpPr/>
           <p:nvPr/>
         </p:nvSpPr>
         <p:spPr>
           <a:xfrm>
-            <a:off x="548640" y="2482596"/>
-            <a:ext cx="384048" cy="384048"/>
+            <a:off x="548640" y="3108960"/>
+            <a:ext cx="502920" cy="502920"/>
           </a:xfrm>
           <a:prstGeom prst="ellipse">
             <a:avLst/>
           </a:prstGeom>
           <a:solidFill>
-            <a:srgbClr val="0645AD"/>
+            <a:srgbClr val="33C17A"/>
           </a:solidFill>
           <a:ln>
             <a:noFill/>
@@ -9339,27 +11529,27 @@
           <a:p>
             <a:pPr algn="ctr"/>
             <a:r>
-              <a:rPr sz="1300" b="1">
-                <a:solidFill>
-                  <a:srgbClr val="FFFFFF"/>
-                </a:solidFill>
-                <a:latin typeface="Calibri"/>
-              </a:rPr>
-              <a:t>1</a:t>
-            </a:r>
-          </a:p>
-        </p:txBody>
-      </p:sp>
-      <p:sp>
-        <p:nvSpPr>
-          <p:cNvPr id="10" name="TextBox 9"/>
+              <a:rPr sz="1600" b="1">
+                <a:solidFill>
+                  <a:srgbClr val="202122"/>
+                </a:solidFill>
+                <a:latin typeface="Calibri"/>
+              </a:rPr>
+              <a:t>2</a:t>
+            </a:r>
+          </a:p>
+        </p:txBody>
+      </p:sp>
+      <p:sp>
+        <p:nvSpPr>
+          <p:cNvPr id="9" name="TextBox 8"/>
           <p:cNvSpPr txBox="1"/>
           <p:nvPr/>
         </p:nvSpPr>
         <p:spPr>
           <a:xfrm>
-            <a:off x="1143000" y="2240280"/>
-            <a:ext cx="5943600" cy="868680"/>
+            <a:off x="1371600" y="3063240"/>
+            <a:ext cx="10271455" cy="1188720"/>
           </a:xfrm>
           <a:prstGeom prst="rect">
             <a:avLst/>
@@ -9367,38 +11557,38 @@
           <a:noFill/>
         </p:spPr>
         <p:txBody>
-          <a:bodyPr wrap="square" anchor="ctr" lIns="0" rIns="0" tIns="0" bIns="0"/>
+          <a:bodyPr wrap="square" anchor="t" lIns="0" rIns="0" tIns="0" bIns="0"/>
           <a:lstStyle/>
           <a:p>
             <a:pPr algn="l"/>
             <a:r>
-              <a:rPr sz="1700" b="0" i="0">
+              <a:rPr sz="2400" b="0" i="0">
                 <a:solidFill>
                   <a:srgbClr val="202122"/>
                 </a:solidFill>
                 <a:latin typeface="Calibri"/>
               </a:rPr>
-              <a:t>Install a Type 2 hypervisor or use the one provided.</a:t>
-            </a:r>
-          </a:p>
-        </p:txBody>
-      </p:sp>
-      <p:sp>
-        <p:nvSpPr>
-          <p:cNvPr id="11" name="Oval 10"/>
+              <a:t>What does isolation prevent?</a:t>
+            </a:r>
+          </a:p>
+        </p:txBody>
+      </p:sp>
+      <p:sp>
+        <p:nvSpPr>
+          <p:cNvPr id="10" name="Oval 9"/>
           <p:cNvSpPr/>
           <p:nvPr/>
         </p:nvSpPr>
         <p:spPr>
           <a:xfrm>
-            <a:off x="548640" y="3461004"/>
-            <a:ext cx="384048" cy="384048"/>
+            <a:off x="548640" y="4526280"/>
+            <a:ext cx="502920" cy="502920"/>
           </a:xfrm>
           <a:prstGeom prst="ellipse">
             <a:avLst/>
           </a:prstGeom>
           <a:solidFill>
-            <a:srgbClr val="0645AD"/>
+            <a:srgbClr val="33C17A"/>
           </a:solidFill>
           <a:ln>
             <a:noFill/>
@@ -9425,13 +11615,46 @@
           <a:p>
             <a:pPr algn="ctr"/>
             <a:r>
-              <a:rPr sz="1300" b="1">
-                <a:solidFill>
-                  <a:srgbClr val="FFFFFF"/>
-                </a:solidFill>
-                <a:latin typeface="Calibri"/>
-              </a:rPr>
-              <a:t>2</a:t>
+              <a:rPr sz="1600" b="1">
+                <a:solidFill>
+                  <a:srgbClr val="202122"/>
+                </a:solidFill>
+                <a:latin typeface="Calibri"/>
+              </a:rPr>
+              <a:t>3</a:t>
+            </a:r>
+          </a:p>
+        </p:txBody>
+      </p:sp>
+      <p:sp>
+        <p:nvSpPr>
+          <p:cNvPr id="11" name="TextBox 10"/>
+          <p:cNvSpPr txBox="1"/>
+          <p:nvPr/>
+        </p:nvSpPr>
+        <p:spPr>
+          <a:xfrm>
+            <a:off x="1371600" y="4480560"/>
+            <a:ext cx="10271455" cy="1188720"/>
+          </a:xfrm>
+          <a:prstGeom prst="rect">
+            <a:avLst/>
+          </a:prstGeom>
+          <a:noFill/>
+        </p:spPr>
+        <p:txBody>
+          <a:bodyPr wrap="square" anchor="t" lIns="0" rIns="0" tIns="0" bIns="0"/>
+          <a:lstStyle/>
+          <a:p>
+            <a:pPr algn="l"/>
+            <a:r>
+              <a:rPr sz="2400" b="0" i="0">
+                <a:solidFill>
+                  <a:srgbClr val="202122"/>
+                </a:solidFill>
+                <a:latin typeface="Calibri"/>
+              </a:rPr>
+              <a:t>Name two types of virtualisation.</a:t>
             </a:r>
           </a:p>
         </p:txBody>
@@ -9444,8 +11667,8 @@
         </p:nvSpPr>
         <p:spPr>
           <a:xfrm>
-            <a:off x="1143000" y="3218688"/>
-            <a:ext cx="5943600" cy="868680"/>
+            <a:off x="548640" y="5852160"/>
+            <a:ext cx="11094415" cy="365760"/>
           </a:xfrm>
           <a:prstGeom prst="rect">
             <a:avLst/>
@@ -9453,353 +11676,18 @@
           <a:noFill/>
         </p:spPr>
         <p:txBody>
-          <a:bodyPr wrap="square" anchor="ctr" lIns="0" rIns="0" tIns="0" bIns="0"/>
+          <a:bodyPr wrap="square" anchor="t" lIns="0" rIns="0" tIns="0" bIns="0"/>
           <a:lstStyle/>
           <a:p>
             <a:pPr algn="l"/>
             <a:r>
-              <a:rPr sz="1700" b="0" i="0">
-                <a:solidFill>
-                  <a:srgbClr val="202122"/>
-                </a:solidFill>
-                <a:latin typeface="Calibri"/>
-              </a:rPr>
-              <a:t>Create two VMs: a server OS and a client OS.</a:t>
-            </a:r>
-          </a:p>
-        </p:txBody>
-      </p:sp>
-      <p:sp>
-        <p:nvSpPr>
-          <p:cNvPr id="13" name="Oval 12"/>
-          <p:cNvSpPr/>
-          <p:nvPr/>
-        </p:nvSpPr>
-        <p:spPr>
-          <a:xfrm>
-            <a:off x="548640" y="4439412"/>
-            <a:ext cx="384048" cy="384048"/>
-          </a:xfrm>
-          <a:prstGeom prst="ellipse">
-            <a:avLst/>
-          </a:prstGeom>
-          <a:solidFill>
-            <a:srgbClr val="0645AD"/>
-          </a:solidFill>
-          <a:ln>
-            <a:noFill/>
-          </a:ln>
-          <a:effectLst/>
-        </p:spPr>
-        <p:style>
-          <a:lnRef idx="1">
-            <a:schemeClr val="accent1"/>
-          </a:lnRef>
-          <a:fillRef idx="3">
-            <a:schemeClr val="accent1"/>
-          </a:fillRef>
-          <a:effectRef idx="2">
-            <a:schemeClr val="accent1"/>
-          </a:effectRef>
-          <a:fontRef idx="minor">
-            <a:schemeClr val="lt1"/>
-          </a:fontRef>
-        </p:style>
-        <p:txBody>
-          <a:bodyPr rtlCol="0" anchor="ctr" lIns="0" rIns="0" tIns="0" bIns="0"/>
-          <a:lstStyle/>
-          <a:p>
-            <a:pPr algn="ctr"/>
-            <a:r>
-              <a:rPr sz="1300" b="1">
-                <a:solidFill>
-                  <a:srgbClr val="FFFFFF"/>
-                </a:solidFill>
-                <a:latin typeface="Calibri"/>
-              </a:rPr>
-              <a:t>3</a:t>
-            </a:r>
-          </a:p>
-        </p:txBody>
-      </p:sp>
-      <p:sp>
-        <p:nvSpPr>
-          <p:cNvPr id="14" name="TextBox 13"/>
-          <p:cNvSpPr txBox="1"/>
-          <p:nvPr/>
-        </p:nvSpPr>
-        <p:spPr>
-          <a:xfrm>
-            <a:off x="1143000" y="4197096"/>
-            <a:ext cx="5943600" cy="868680"/>
-          </a:xfrm>
-          <a:prstGeom prst="rect">
-            <a:avLst/>
-          </a:prstGeom>
-          <a:noFill/>
-        </p:spPr>
-        <p:txBody>
-          <a:bodyPr wrap="square" anchor="ctr" lIns="0" rIns="0" tIns="0" bIns="0"/>
-          <a:lstStyle/>
-          <a:p>
-            <a:pPr algn="l"/>
-            <a:r>
-              <a:rPr sz="1700" b="0" i="0">
-                <a:solidFill>
-                  <a:srgbClr val="202122"/>
-                </a:solidFill>
-                <a:latin typeface="Calibri"/>
-              </a:rPr>
-              <a:t>Put them on the same virtual network and test connectivity with ping.</a:t>
-            </a:r>
-          </a:p>
-        </p:txBody>
-      </p:sp>
-      <p:sp>
-        <p:nvSpPr>
-          <p:cNvPr id="15" name="Oval 14"/>
-          <p:cNvSpPr/>
-          <p:nvPr/>
-        </p:nvSpPr>
-        <p:spPr>
-          <a:xfrm>
-            <a:off x="548640" y="5417820"/>
-            <a:ext cx="384048" cy="384048"/>
-          </a:xfrm>
-          <a:prstGeom prst="ellipse">
-            <a:avLst/>
-          </a:prstGeom>
-          <a:solidFill>
-            <a:srgbClr val="0645AD"/>
-          </a:solidFill>
-          <a:ln>
-            <a:noFill/>
-          </a:ln>
-          <a:effectLst/>
-        </p:spPr>
-        <p:style>
-          <a:lnRef idx="1">
-            <a:schemeClr val="accent1"/>
-          </a:lnRef>
-          <a:fillRef idx="3">
-            <a:schemeClr val="accent1"/>
-          </a:fillRef>
-          <a:effectRef idx="2">
-            <a:schemeClr val="accent1"/>
-          </a:effectRef>
-          <a:fontRef idx="minor">
-            <a:schemeClr val="lt1"/>
-          </a:fontRef>
-        </p:style>
-        <p:txBody>
-          <a:bodyPr rtlCol="0" anchor="ctr" lIns="0" rIns="0" tIns="0" bIns="0"/>
-          <a:lstStyle/>
-          <a:p>
-            <a:pPr algn="ctr"/>
-            <a:r>
-              <a:rPr sz="1300" b="1">
-                <a:solidFill>
-                  <a:srgbClr val="FFFFFF"/>
-                </a:solidFill>
-                <a:latin typeface="Calibri"/>
-              </a:rPr>
-              <a:t>4</a:t>
-            </a:r>
-          </a:p>
-        </p:txBody>
-      </p:sp>
-      <p:sp>
-        <p:nvSpPr>
-          <p:cNvPr id="16" name="TextBox 15"/>
-          <p:cNvSpPr txBox="1"/>
-          <p:nvPr/>
-        </p:nvSpPr>
-        <p:spPr>
-          <a:xfrm>
-            <a:off x="1143000" y="5175504"/>
-            <a:ext cx="5943600" cy="868680"/>
-          </a:xfrm>
-          <a:prstGeom prst="rect">
-            <a:avLst/>
-          </a:prstGeom>
-          <a:noFill/>
-        </p:spPr>
-        <p:txBody>
-          <a:bodyPr wrap="square" anchor="ctr" lIns="0" rIns="0" tIns="0" bIns="0"/>
-          <a:lstStyle/>
-          <a:p>
-            <a:pPr algn="l"/>
-            <a:r>
-              <a:rPr sz="1700" b="0" i="0">
-                <a:solidFill>
-                  <a:srgbClr val="202122"/>
-                </a:solidFill>
-                <a:latin typeface="Calibri"/>
-              </a:rPr>
-              <a:t>Take a snapshot, make a change, then roll back.</a:t>
-            </a:r>
-          </a:p>
-        </p:txBody>
-      </p:sp>
-      <p:sp>
-        <p:nvSpPr>
-          <p:cNvPr id="17" name="Rounded Rectangle 16"/>
-          <p:cNvSpPr/>
-          <p:nvPr/>
-        </p:nvSpPr>
-        <p:spPr>
-          <a:xfrm>
-            <a:off x="7772400" y="1508760"/>
-            <a:ext cx="3867912" cy="4572000"/>
-          </a:xfrm>
-          <a:prstGeom prst="roundRect">
-            <a:avLst>
-              <a:gd name="adj" fmla="val 8000"/>
-            </a:avLst>
-          </a:prstGeom>
-          <a:solidFill>
-            <a:srgbClr val="EAF3FF"/>
-          </a:solidFill>
-          <a:ln>
-            <a:noFill/>
-          </a:ln>
-          <a:effectLst/>
-        </p:spPr>
-        <p:style>
-          <a:lnRef idx="1">
-            <a:schemeClr val="accent1"/>
-          </a:lnRef>
-          <a:fillRef idx="3">
-            <a:schemeClr val="accent1"/>
-          </a:fillRef>
-          <a:effectRef idx="2">
-            <a:schemeClr val="accent1"/>
-          </a:effectRef>
-          <a:fontRef idx="minor">
-            <a:schemeClr val="lt1"/>
-          </a:fontRef>
-        </p:style>
-        <p:txBody>
-          <a:bodyPr rtlCol="0" anchor="ctr"/>
-          <a:lstStyle/>
-          <a:p/>
-        </p:txBody>
-      </p:sp>
-      <p:sp>
-        <p:nvSpPr>
-          <p:cNvPr id="18" name="TextBox 17"/>
-          <p:cNvSpPr txBox="1"/>
-          <p:nvPr/>
-        </p:nvSpPr>
-        <p:spPr>
-          <a:xfrm>
-            <a:off x="8046720" y="1737360"/>
-            <a:ext cx="3291840" cy="365760"/>
-          </a:xfrm>
-          <a:prstGeom prst="rect">
-            <a:avLst/>
-          </a:prstGeom>
-          <a:noFill/>
-        </p:spPr>
-        <p:txBody>
-          <a:bodyPr wrap="square" anchor="t" lIns="0" rIns="0" tIns="0" bIns="0"/>
-          <a:lstStyle/>
-          <a:p>
-            <a:pPr algn="l"/>
-            <a:r>
-              <a:rPr sz="1300" b="1" i="0">
-                <a:solidFill>
-                  <a:srgbClr val="0645AD"/>
-                </a:solidFill>
-                <a:latin typeface="Calibri"/>
-              </a:rPr>
-              <a:t>SUCCESS CRITERIA</a:t>
-            </a:r>
-          </a:p>
-        </p:txBody>
-      </p:sp>
-      <p:sp>
-        <p:nvSpPr>
-          <p:cNvPr id="19" name="TextBox 18"/>
-          <p:cNvSpPr txBox="1"/>
-          <p:nvPr/>
-        </p:nvSpPr>
-        <p:spPr>
-          <a:xfrm>
-            <a:off x="8046720" y="2240280"/>
-            <a:ext cx="3337560" cy="3657600"/>
-          </a:xfrm>
-          <a:prstGeom prst="rect">
-            <a:avLst/>
-          </a:prstGeom>
-          <a:noFill/>
-        </p:spPr>
-        <p:txBody>
-          <a:bodyPr wrap="square" lIns="0" rIns="0" tIns="0" bIns="0">
-            <a:spAutoFit/>
-          </a:bodyPr>
-          <a:lstStyle/>
-          <a:p>
-            <a:pPr marL="274320" indent="-274320">
-              <a:spcAft>
-                <a:spcPts val="810"/>
-              </a:spcAft>
-              <a:buClr>
-                <a:srgbClr val="0645AD"/>
-              </a:buClr>
-              <a:buFont typeface="Arial"/>
-              <a:buChar char="•"/>
-            </a:pPr>
-            <a:r>
-              <a:rPr sz="1800" b="0">
-                <a:solidFill>
-                  <a:srgbClr val="202122"/>
-                </a:solidFill>
-                <a:latin typeface="Calibri"/>
-              </a:rPr>
-              <a:t>Both VMs boot</a:t>
-            </a:r>
-          </a:p>
-          <a:p>
-            <a:pPr marL="274320" indent="-274320">
-              <a:spcAft>
-                <a:spcPts val="810"/>
-              </a:spcAft>
-              <a:buClr>
-                <a:srgbClr val="0645AD"/>
-              </a:buClr>
-              <a:buFont typeface="Arial"/>
-              <a:buChar char="•"/>
-            </a:pPr>
-            <a:r>
-              <a:rPr sz="1800" b="0">
-                <a:solidFill>
-                  <a:srgbClr val="202122"/>
-                </a:solidFill>
-                <a:latin typeface="Calibri"/>
-              </a:rPr>
-              <a:t>Ping succeeds both ways</a:t>
-            </a:r>
-          </a:p>
-          <a:p>
-            <a:pPr marL="274320" indent="-274320">
-              <a:spcAft>
-                <a:spcPts val="810"/>
-              </a:spcAft>
-              <a:buClr>
-                <a:srgbClr val="0645AD"/>
-              </a:buClr>
-              <a:buFont typeface="Arial"/>
-              <a:buChar char="•"/>
-            </a:pPr>
-            <a:r>
-              <a:rPr sz="1800" b="0">
-                <a:solidFill>
-                  <a:srgbClr val="202122"/>
-                </a:solidFill>
-                <a:latin typeface="Calibri"/>
-              </a:rPr>
-              <a:t>Snapshot rollback demonstrated</a:t>
+              <a:rPr sz="1300" b="0" i="1">
+                <a:solidFill>
+                  <a:srgbClr val="54595D"/>
+                </a:solidFill>
+                <a:latin typeface="Calibri"/>
+              </a:rPr>
+              <a:t>Answer on mini whiteboards or in your book. Answers are in the speaker notes.</a:t>
             </a:r>
           </a:p>
         </p:txBody>
